--- a/manaberu/slides/manaberu-02-ai-basics.pptx
+++ b/manaberu/slides/manaberu-02-ai-basics.pptx
@@ -116,13 +116,13 @@
   <p:extLst>
     <p:ext uri="{521415D9-36F7-43E2-AB2F-B90AF26B5E84}">
       <p14:sectionLst xmlns:p14="http://schemas.microsoft.com/office/powerpoint/2010/main">
-        <p14:section name="導入" id="{5116db85-9187-ca34-b872-025daff79785}">
+        <p14:section name="導入" id="{f68bfd82-8ad7-3a19-b8bf-d83aaa08bdb3}">
           <p14:sldIdLst>
             <p14:sldId id="256"/>
             <p14:sldId id="257"/>
           </p14:sldIdLst>
         </p14:section>
-        <p14:section name="本編" id="{41dbe73a-b3e6-1267-c685-b537a89a6188}">
+        <p14:section name="本編" id="{2ce7462e-1a7c-f569-2dc3-b75f309c9c7a}">
           <p14:sldIdLst>
             <p14:sldId id="258"/>
             <p14:sldId id="259"/>
@@ -132,7 +132,7 @@
             <p14:sldId id="263"/>
           </p14:sldIdLst>
         </p14:section>
-        <p14:section name="まとめ" id="{5d984821-24fb-4de1-5333-9730d73a8f2b}">
+        <p14:section name="まとめ" id="{4245bf97-e9d3-da06-4ddf-8149d3d1da9a}">
           <p14:sldIdLst>
             <p14:sldId id="264"/>
             <p14:sldId id="265"/>
@@ -1408,12 +1408,19 @@
 
 <file path=ppt/slideLayouts/slideLayout2.xml><?xml version="1.0" encoding="utf-8"?>
 <p:sldLayout xmlns:a="http://schemas.openxmlformats.org/drawingml/2006/main" xmlns:r="http://schemas.openxmlformats.org/officeDocument/2006/relationships" xmlns:p="http://schemas.openxmlformats.org/presentationml/2006/main" preserve="1">
-  <p:cSld name="MANA_TITLE">
+  <p:cSld name="MANA_COVER">
     <p:bg>
       <p:bgPr>
-        <a:solidFill>
-          <a:srgbClr val="FFD600"/>
-        </a:solidFill>
+        <a:blipFill dpi="0" rotWithShape="1">
+          <a:blip r:embed="rId1">
+            <a:lum/>
+          </a:blip>
+          <a:srcRect/>
+          <a:stretch>
+            <a:fillRect/>
+          </a:stretch>
+        </a:blipFill>
+        <a:effectLst/>
       </p:bgPr>
     </p:bg>
     <p:spTree>
@@ -1430,156 +1437,6 @@
           <a:chExt cx="0" cy="0"/>
         </a:xfrm>
       </p:grpSpPr>
-      <p:sp>
-        <p:nvSpPr>
-          <p:cNvPr id="2" name="Text 0"/>
-          <p:cNvSpPr/>
-          <p:nvPr>
-            <p:ph idx="100" type="title" hasCustomPrompt="1"/>
-          </p:nvPr>
-        </p:nvSpPr>
-        <p:spPr>
-          <a:xfrm>
-            <a:off x="548640" y="1691640"/>
-            <a:ext cx="5852160" cy="1371600"/>
-          </a:xfrm>
-          <a:prstGeom prst="rect">
-            <a:avLst/>
-          </a:prstGeom>
-          <a:noFill/>
-          <a:ln/>
-        </p:spPr>
-        <p:txBody>
-          <a:bodyPr wrap="square" rtlCol="0"/>
-          <a:lstStyle>
-            <a:lvl1pPr algn="l" indent="0" marL="0">
-              <a:buNone/>
-              <a:defRPr lang="en-US" sz="3200" b="1" dirty="0">
-                <a:solidFill>
-                  <a:schemeClr val="tx1"/>
-                </a:solidFill>
-              </a:defRPr>
-            </a:lvl1pPr>
-          </a:lstStyle>
-          <a:p>
-            <a:pPr algn="l" indent="0" marL="0">
-              <a:buNone/>
-            </a:pPr>
-            <a:endParaRPr lang="en-US" sz="3200" dirty="0"/>
-          </a:p>
-        </p:txBody>
-      </p:sp>
-      <p:sp>
-        <p:nvSpPr>
-          <p:cNvPr id="3" name="Text 0"/>
-          <p:cNvSpPr/>
-          <p:nvPr>
-            <p:ph idx="101" type="body" hasCustomPrompt="1"/>
-          </p:nvPr>
-        </p:nvSpPr>
-        <p:spPr>
-          <a:xfrm>
-            <a:off x="548640" y="3246120"/>
-            <a:ext cx="5852160" cy="457200"/>
-          </a:xfrm>
-          <a:prstGeom prst="rect">
-            <a:avLst/>
-          </a:prstGeom>
-          <a:noFill/>
-          <a:ln/>
-        </p:spPr>
-        <p:txBody>
-          <a:bodyPr wrap="square" rtlCol="0"/>
-          <a:lstStyle>
-            <a:lvl1pPr indent="0" marL="0">
-              <a:buNone/>
-              <a:defRPr lang="en-US" sz="1400" dirty="0">
-                <a:solidFill>
-                  <a:schemeClr val="tx1"/>
-                </a:solidFill>
-              </a:defRPr>
-            </a:lvl1pPr>
-          </a:lstStyle>
-          <a:p>
-            <a:pPr indent="0" marL="0">
-              <a:buNone/>
-            </a:pPr>
-            <a:endParaRPr lang="en-US" sz="1400" dirty="0"/>
-          </a:p>
-        </p:txBody>
-      </p:sp>
-      <p:sp>
-        <p:nvSpPr>
-          <p:cNvPr id="4" name="Text 0"/>
-          <p:cNvSpPr/>
-          <p:nvPr/>
-        </p:nvSpPr>
-        <p:spPr>
-          <a:xfrm>
-            <a:off x="548640" y="4526280"/>
-            <a:ext cx="5486400" cy="274320"/>
-          </a:xfrm>
-          <a:prstGeom prst="rect">
-            <a:avLst/>
-          </a:prstGeom>
-          <a:noFill/>
-          <a:ln/>
-        </p:spPr>
-        <p:txBody>
-          <a:bodyPr wrap="square" lIns="0" tIns="0" rIns="0" bIns="0" rtlCol="0" anchor="ctr"/>
-          <a:lstStyle/>
-          <a:p>
-            <a:pPr indent="0" marL="0">
-              <a:buNone/>
-            </a:pPr>
-            <a:r>
-              <a:rPr lang="en-US" sz="1000" dirty="0">
-                <a:solidFill>
-                  <a:schemeClr val="tx1"/>
-                </a:solidFill>
-              </a:rPr>
-              <a:t>マナベル｜AI×Lark 構築者育成講座</a:t>
-            </a:r>
-            <a:endParaRPr lang="en-US" sz="1000" dirty="0"/>
-          </a:p>
-        </p:txBody>
-      </p:sp>
-      <p:sp>
-        <p:nvSpPr>
-          <p:cNvPr id="5" name="Text 1"/>
-          <p:cNvSpPr/>
-          <p:nvPr/>
-        </p:nvSpPr>
-        <p:spPr>
-          <a:xfrm>
-            <a:off x="6766560" y="4526280"/>
-            <a:ext cx="1828800" cy="274320"/>
-          </a:xfrm>
-          <a:prstGeom prst="rect">
-            <a:avLst/>
-          </a:prstGeom>
-          <a:noFill/>
-          <a:ln/>
-        </p:spPr>
-        <p:txBody>
-          <a:bodyPr wrap="square" lIns="0" tIns="0" rIns="0" bIns="0" rtlCol="0" anchor="ctr"/>
-          <a:lstStyle/>
-          <a:p>
-            <a:pPr algn="r" indent="0" marL="0">
-              <a:buNone/>
-            </a:pPr>
-            <a:r>
-              <a:rPr lang="en-US" sz="1000" b="1" dirty="0">
-                <a:solidFill>
-                  <a:schemeClr val="tx1"/>
-                </a:solidFill>
-              </a:rPr>
-              <a:t>ささエール</a:t>
-            </a:r>
-            <a:endParaRPr lang="en-US" sz="1000" dirty="0"/>
-          </a:p>
-        </p:txBody>
-      </p:sp>
     </p:spTree>
   </p:cSld>
   <p:clrMapOvr>
@@ -1593,9 +1450,16 @@
   <p:cSld name="MANA_CONTENT">
     <p:bg>
       <p:bgPr>
-        <a:solidFill>
-          <a:srgbClr val="FFFFFF"/>
-        </a:solidFill>
+        <a:blipFill dpi="0" rotWithShape="1">
+          <a:blip r:embed="rId1">
+            <a:lum/>
+          </a:blip>
+          <a:srcRect/>
+          <a:stretch>
+            <a:fillRect/>
+          </a:stretch>
+        </a:blipFill>
+        <a:effectLst/>
       </p:bgPr>
     </p:bg>
     <p:spTree>
@@ -1614,16 +1478,36 @@
       </p:grpSpPr>
       <p:sp>
         <p:nvSpPr>
-          <p:cNvPr id="2" name="Text 0"/>
+          <p:cNvPr id="2" name="Shape 0"/>
           <p:cNvSpPr/>
-          <p:nvPr>
-            <p:ph idx="100" type="title" hasCustomPrompt="1"/>
-          </p:nvPr>
-        </p:nvSpPr>
-        <p:spPr>
-          <a:xfrm>
-            <a:off x="548640" y="658368"/>
-            <a:ext cx="8046720" cy="566928"/>
+          <p:nvPr/>
+        </p:nvSpPr>
+        <p:spPr>
+          <a:xfrm>
+            <a:off x="6400800" y="4754880"/>
+            <a:ext cx="2423160" cy="274320"/>
+          </a:xfrm>
+          <a:prstGeom prst="rect">
+            <a:avLst>
+              <a:gd name="adj" fmla="val 50000"/>
+            </a:avLst>
+          </a:prstGeom>
+          <a:solidFill>
+            <a:srgbClr val="1A1A1A"/>
+          </a:solidFill>
+          <a:ln/>
+        </p:spPr>
+      </p:sp>
+      <p:sp>
+        <p:nvSpPr>
+          <p:cNvPr id="3" name="Text 1"/>
+          <p:cNvSpPr/>
+          <p:nvPr/>
+        </p:nvSpPr>
+        <p:spPr>
+          <a:xfrm>
+            <a:off x="6510528" y="4754880"/>
+            <a:ext cx="1828800" cy="274320"/>
           </a:xfrm>
           <a:prstGeom prst="rect">
             <a:avLst/>
@@ -1632,35 +1516,37 @@
           <a:ln/>
         </p:spPr>
         <p:txBody>
-          <a:bodyPr wrap="square" rtlCol="0"/>
-          <a:lstStyle>
-            <a:lvl1pPr algn="l" indent="0" marL="0">
-              <a:buNone/>
-              <a:defRPr lang="en-US" sz="2400" b="1" dirty="0">
-                <a:solidFill>
-                  <a:schemeClr val="tx1"/>
-                </a:solidFill>
-              </a:defRPr>
-            </a:lvl1pPr>
-          </a:lstStyle>
-          <a:p>
-            <a:pPr algn="l" indent="0" marL="0">
-              <a:buNone/>
-            </a:pPr>
-            <a:endParaRPr lang="en-US" sz="2400" dirty="0"/>
-          </a:p>
-        </p:txBody>
-      </p:sp>
-      <p:sp>
-        <p:nvSpPr>
-          <p:cNvPr id="3" name="Text 0"/>
+          <a:bodyPr wrap="square" lIns="0" tIns="0" rIns="0" bIns="0" rtlCol="0" anchor="ctr"/>
+          <a:lstStyle/>
+          <a:p>
+            <a:pPr indent="0" marL="0">
+              <a:buNone/>
+            </a:pPr>
+            <a:r>
+              <a:rPr lang="ja-JP" altLang="en-US" sz="850" b="1" dirty="0">
+                <a:solidFill>
+                  <a:srgbClr val="FFFFFF"/>
+                </a:solidFill>
+                <a:latin typeface="Noto Sans JP" pitchFamily="34" charset="0"/>
+                <a:ea typeface="Noto Sans JP" pitchFamily="34" charset="-122"/>
+                <a:cs typeface="Noto Sans JP" pitchFamily="34" charset="-120"/>
+              </a:rPr>
+              <a:t>ささエール｜OFFICE PLATA</a:t>
+            </a:r>
+            <a:endParaRPr lang="ja-JP" sz="850" dirty="0"/>
+          </a:p>
+        </p:txBody>
+      </p:sp>
+      <p:sp>
+        <p:nvSpPr>
+          <p:cNvPr id="4" name="Text 2"/>
           <p:cNvSpPr/>
           <p:nvPr/>
         </p:nvSpPr>
         <p:spPr>
           <a:xfrm>
-            <a:off x="548640" y="4773168"/>
-            <a:ext cx="6400800" cy="228600"/>
+            <a:off x="365760" y="4754880"/>
+            <a:ext cx="5852160" cy="274320"/>
           </a:xfrm>
           <a:prstGeom prst="rect">
             <a:avLst/>
@@ -1676,14 +1562,17 @@
               <a:buNone/>
             </a:pPr>
             <a:r>
-              <a:rPr lang="en-US" sz="900" dirty="0">
-                <a:solidFill>
-                  <a:schemeClr val="tx2"/>
-                </a:solidFill>
+              <a:rPr lang="ja-JP" altLang="en-US" sz="850" dirty="0">
+                <a:solidFill>
+                  <a:srgbClr val="1A1A1A"/>
+                </a:solidFill>
+                <a:latin typeface="Noto Sans JP Medium" pitchFamily="34" charset="0"/>
+                <a:ea typeface="Noto Sans JP Medium" pitchFamily="34" charset="-122"/>
+                <a:cs typeface="Noto Sans JP Medium" pitchFamily="34" charset="-120"/>
               </a:rPr>
               <a:t>マナベル　第2回　AIと話す型を身につける</a:t>
             </a:r>
-            <a:endParaRPr lang="en-US" sz="900" dirty="0"/>
+            <a:endParaRPr lang="ja-JP" sz="850" dirty="0"/>
           </a:p>
         </p:txBody>
       </p:sp>
@@ -1699,8 +1588,8 @@
         </p:nvSpPr>
         <p:spPr>
           <a:xfrm>
-            <a:off x="8229600" y="4773168"/>
-            <a:ext cx="365760" cy="228600"/>
+            <a:off x="8366760" y="4754880"/>
+            <a:ext cx="365760" cy="274320"/>
           </a:xfrm>
           <a:prstGeom prst="rect">
             <a:avLst/>
@@ -1712,169 +1601,26 @@
           </a:extLst>
         </p:spPr>
         <p:txBody>
-          <a:bodyPr/>
+          <a:bodyPr anchor="ctr"/>
           <a:lstStyle>
             <a:lvl1pPr>
-              <a:defRPr sz="900">
-                <a:solidFill>
-                  <a:srgbClr val="5A6872"/>
-                </a:solidFill>
+              <a:defRPr sz="850">
+                <a:solidFill>
+                  <a:srgbClr val="FFFFFF"/>
+                </a:solidFill>
+                <a:latin typeface="Noto Sans JP"/>
+                <a:ea typeface="Noto Sans JP"/>
+                <a:cs typeface="Noto Sans JP"/>
               </a:defRPr>
             </a:lvl1pPr>
           </a:lstStyle>
           <a:p>
             <a:pPr algn="r"/>
             <a:fld id="{F7021451-1387-4CA6-816F-3879F97B5CBC}" type="slidenum">
-              <a:rPr b="0" lang="en-US"/>
+              <a:rPr b="1" lang="en-US"/>
               <a:t>1003</a:t>
             </a:fld>
             <a:endParaRPr lang="en-US"/>
-          </a:p>
-        </p:txBody>
-      </p:sp>
-    </p:spTree>
-  </p:cSld>
-  <p:clrMapOvr>
-    <a:masterClrMapping/>
-  </p:clrMapOvr>
-</p:sldLayout>
-</file>
-
-<file path=ppt/slideLayouts/slideLayout4.xml><?xml version="1.0" encoding="utf-8"?>
-<p:sldLayout xmlns:a="http://schemas.openxmlformats.org/drawingml/2006/main" xmlns:r="http://schemas.openxmlformats.org/officeDocument/2006/relationships" xmlns:p="http://schemas.openxmlformats.org/presentationml/2006/main" preserve="1">
-  <p:cSld name="MANA_DARK">
-    <p:bg>
-      <p:bgPr>
-        <a:solidFill>
-          <a:srgbClr val="1A1A1A"/>
-        </a:solidFill>
-      </p:bgPr>
-    </p:bg>
-    <p:spTree>
-      <p:nvGrpSpPr>
-        <p:cNvPr id="1" name=""/>
-        <p:cNvGrpSpPr/>
-        <p:nvPr/>
-      </p:nvGrpSpPr>
-      <p:grpSpPr>
-        <a:xfrm>
-          <a:off x="0" y="0"/>
-          <a:ext cx="0" cy="0"/>
-          <a:chOff x="0" y="0"/>
-          <a:chExt cx="0" cy="0"/>
-        </a:xfrm>
-      </p:grpSpPr>
-      <p:sp>
-        <p:nvSpPr>
-          <p:cNvPr id="2" name="Text 0"/>
-          <p:cNvSpPr/>
-          <p:nvPr>
-            <p:ph idx="100" type="title" hasCustomPrompt="1"/>
-          </p:nvPr>
-        </p:nvSpPr>
-        <p:spPr>
-          <a:xfrm>
-            <a:off x="548640" y="1463040"/>
-            <a:ext cx="8046720" cy="1005840"/>
-          </a:xfrm>
-          <a:prstGeom prst="rect">
-            <a:avLst/>
-          </a:prstGeom>
-          <a:noFill/>
-          <a:ln/>
-        </p:spPr>
-        <p:txBody>
-          <a:bodyPr wrap="square" rtlCol="0"/>
-          <a:lstStyle>
-            <a:lvl1pPr algn="l" indent="0" marL="0">
-              <a:buNone/>
-              <a:defRPr lang="en-US" sz="3000" b="1" dirty="0">
-                <a:solidFill>
-                  <a:schemeClr val="accent1"/>
-                </a:solidFill>
-              </a:defRPr>
-            </a:lvl1pPr>
-          </a:lstStyle>
-          <a:p>
-            <a:pPr algn="l" indent="0" marL="0">
-              <a:buNone/>
-            </a:pPr>
-            <a:endParaRPr lang="en-US" sz="3000" dirty="0"/>
-          </a:p>
-        </p:txBody>
-      </p:sp>
-      <p:sp>
-        <p:nvSpPr>
-          <p:cNvPr id="3" name="Text 0"/>
-          <p:cNvSpPr/>
-          <p:nvPr>
-            <p:ph idx="101" type="body" hasCustomPrompt="1"/>
-          </p:nvPr>
-        </p:nvSpPr>
-        <p:spPr>
-          <a:xfrm>
-            <a:off x="548640" y="2606040"/>
-            <a:ext cx="8046720" cy="1097280"/>
-          </a:xfrm>
-          <a:prstGeom prst="rect">
-            <a:avLst/>
-          </a:prstGeom>
-          <a:noFill/>
-          <a:ln/>
-        </p:spPr>
-        <p:txBody>
-          <a:bodyPr wrap="square" rtlCol="0"/>
-          <a:lstStyle>
-            <a:lvl1pPr indent="0" marL="0">
-              <a:buNone/>
-              <a:defRPr lang="en-US" sz="1500" dirty="0">
-                <a:solidFill>
-                  <a:schemeClr val="bg1"/>
-                </a:solidFill>
-              </a:defRPr>
-            </a:lvl1pPr>
-          </a:lstStyle>
-          <a:p>
-            <a:pPr indent="0" marL="0">
-              <a:buNone/>
-            </a:pPr>
-            <a:endParaRPr lang="en-US" sz="1500" dirty="0"/>
-          </a:p>
-        </p:txBody>
-      </p:sp>
-      <p:sp>
-        <p:nvSpPr>
-          <p:cNvPr id="4" name="Text 0"/>
-          <p:cNvSpPr/>
-          <p:nvPr/>
-        </p:nvSpPr>
-        <p:spPr>
-          <a:xfrm>
-            <a:off x="548640" y="4526280"/>
-            <a:ext cx="5486400" cy="274320"/>
-          </a:xfrm>
-          <a:prstGeom prst="rect">
-            <a:avLst/>
-          </a:prstGeom>
-          <a:noFill/>
-          <a:ln/>
-        </p:spPr>
-        <p:txBody>
-          <a:bodyPr wrap="square" lIns="0" tIns="0" rIns="0" bIns="0" rtlCol="0" anchor="ctr"/>
-          <a:lstStyle/>
-          <a:p>
-            <a:pPr indent="0" marL="0">
-              <a:buNone/>
-            </a:pPr>
-            <a:r>
-              <a:rPr lang="en-US" sz="1000" dirty="0">
-                <a:solidFill>
-                  <a:schemeClr val="bg1"/>
-                </a:solidFill>
-              </a:rPr>
-              <a:t>マナベル｜AI×Lark 構築者育成講座</a:t>
-            </a:r>
-            <a:endParaRPr lang="en-US" sz="1000" dirty="0"/>
           </a:p>
         </p:txBody>
       </p:sp>
@@ -1915,8 +1661,8 @@
         </p:nvSpPr>
         <p:spPr>
           <a:xfrm>
-            <a:off x="8229600" y="4773168"/>
-            <a:ext cx="365760" cy="228600"/>
+            <a:off x="8366760" y="4754880"/>
+            <a:ext cx="365760" cy="274320"/>
           </a:xfrm>
           <a:prstGeom prst="rect">
             <a:avLst/>
@@ -1928,20 +1674,23 @@
           </a:extLst>
         </p:spPr>
         <p:txBody>
-          <a:bodyPr/>
+          <a:bodyPr anchor="ctr"/>
           <a:lstStyle>
             <a:lvl1pPr>
-              <a:defRPr sz="900">
-                <a:solidFill>
-                  <a:srgbClr val="5A6872"/>
-                </a:solidFill>
+              <a:defRPr sz="850">
+                <a:solidFill>
+                  <a:srgbClr val="FFFFFF"/>
+                </a:solidFill>
+                <a:latin typeface="Noto Sans JP"/>
+                <a:ea typeface="Noto Sans JP"/>
+                <a:cs typeface="Noto Sans JP"/>
               </a:defRPr>
             </a:lvl1pPr>
           </a:lstStyle>
           <a:p>
             <a:pPr algn="r"/>
             <a:fld id="{F7021451-1387-4CA6-816F-3879F97B5CBC}" type="slidenum">
-              <a:rPr b="0" lang="en-US"/>
+              <a:rPr b="1" lang="en-US"/>
               <a:t>null</a:t>
             </a:fld>
             <a:endParaRPr lang="en-US"/>
@@ -1955,7 +1704,6 @@
     <p:sldLayoutId id="2147483649" r:id="rId1"/>
     <p:sldLayoutId id="2147483650" r:id="rId2"/>
     <p:sldLayoutId id="2147483651" r:id="rId3"/>
-    <p:sldLayoutId id="2147483652" r:id="rId4"/>
   </p:sldLayoutIdLst>
   <p:hf sldNum="0" hdr="0" ftr="0" dt="0"/>
   <p:txStyles>
@@ -2228,50 +1976,92 @@
           <a:chExt cx="0" cy="0"/>
         </a:xfrm>
       </p:grpSpPr>
-      <p:sp>
-        <p:nvSpPr>
-          <p:cNvPr id="2" name="lesson-badge"/>
-          <p:cNvSpPr/>
-          <p:nvPr/>
-        </p:nvSpPr>
-        <p:spPr>
-          <a:xfrm>
-            <a:off x="548640" y="822960"/>
-            <a:ext cx="1828800" cy="566928"/>
-          </a:xfrm>
-          <a:prstGeom prst="roundRect">
-            <a:avLst>
-              <a:gd name="adj" fmla="val 50000"/>
-            </a:avLst>
+      <p:pic>
+        <p:nvPicPr>
+          <p:cNvPr id="2" name="portrait" descr="講師 笹原彰朗">    </p:cNvPr>
+          <p:cNvPicPr>
+            <a:picLocks noChangeAspect="1"/>
+          </p:cNvPicPr>
+          <p:nvPr/>
+        </p:nvPicPr>
+        <p:blipFill>
+          <a:blip r:embed="rId1"/>
+          <a:stretch>
+            <a:fillRect/>
+          </a:stretch>
+        </p:blipFill>
+        <p:spPr>
+          <a:xfrm>
+            <a:off x="6003588" y="1211580"/>
+            <a:ext cx="2866092" cy="3931920"/>
+          </a:xfrm>
+          <a:prstGeom prst="rect">
+            <a:avLst/>
+          </a:prstGeom>
+        </p:spPr>
+      </p:pic>
+      <p:sp>
+        <p:nvSpPr>
+          <p:cNvPr id="3" name="Text 0"/>
+          <p:cNvSpPr txBox="1"/>
+          <p:nvPr/>
+        </p:nvSpPr>
+        <p:spPr>
+          <a:xfrm rot="-240000">
+            <a:off x="457200" y="411480"/>
+            <a:ext cx="1600200" cy="603504"/>
+          </a:xfrm>
+          <a:prstGeom prst="rect">
+            <a:avLst/>
           </a:prstGeom>
           <a:solidFill>
             <a:srgbClr val="1A1A1A"/>
           </a:solidFill>
-          <a:ln w="12700">
+          <a:ln>
             <a:solidFill>
               <a:srgbClr val="1A1A1A"/>
             </a:solidFill>
-            <a:prstDash val="solid"/>
           </a:ln>
           <a:effectLst>
             <a:outerShdw sx="100000" sy="100000" kx="0" ky="0" algn="bl" rotWithShape="0" blurRad="101600" dist="38100" dir="2700000">
-              <a:srgbClr val="000000">
-                <a:alpha val="18000"/>
+              <a:srgbClr val="1A1A1A">
+                <a:alpha val="100000"/>
               </a:srgbClr>
             </a:outerShdw>
           </a:effectLst>
         </p:spPr>
-      </p:sp>
-      <p:sp>
-        <p:nvSpPr>
-          <p:cNvPr id="3" name="Text 1"/>
+        <p:txBody>
+          <a:bodyPr wrap="square" lIns="0" tIns="0" rIns="0" bIns="0" rtlCol="0" anchor="ctr"/>
+          <a:lstStyle/>
+          <a:p>
+            <a:pPr algn="ctr" indent="0" marL="0">
+              <a:buNone/>
+            </a:pPr>
+            <a:r>
+              <a:rPr lang="ja-JP" altLang="en-US" sz="2200" dirty="0">
+                <a:solidFill>
+                  <a:srgbClr val="FFD600"/>
+                </a:solidFill>
+                <a:latin typeface="Dela Gothic One" pitchFamily="34" charset="0"/>
+                <a:ea typeface="けいふぉんと" pitchFamily="34" charset="-122"/>
+                <a:cs typeface="Dela Gothic One" pitchFamily="34" charset="-120"/>
+              </a:rPr>
+              <a:t>第2回</a:t>
+            </a:r>
+            <a:endParaRPr lang="ja-JP" sz="2200" dirty="0"/>
+          </a:p>
+        </p:txBody>
+      </p:sp>
+      <p:sp>
+        <p:nvSpPr>
+          <p:cNvPr id="4" name="Text 1"/>
           <p:cNvSpPr txBox="1"/>
           <p:nvPr/>
         </p:nvSpPr>
         <p:spPr>
           <a:xfrm>
-            <a:off x="548640" y="822960"/>
-            <a:ext cx="1828800" cy="566928"/>
+            <a:off x="457200" y="1188720"/>
+            <a:ext cx="6035040" cy="1600200"/>
           </a:xfrm>
           <a:prstGeom prst="rect">
             <a:avLst/>
@@ -2280,6 +2070,63 @@
           <a:ln/>
         </p:spPr>
         <p:txBody>
+          <a:bodyPr wrap="square" lIns="0" tIns="0" rIns="0" bIns="0" rtlCol="0" anchor="ctr">
+            <a:normAutofit/>
+          </a:bodyPr>
+          <a:lstStyle/>
+          <a:p>
+            <a:pPr indent="0" marL="0">
+              <a:lnSpc>
+                <a:spcPct val="105000"/>
+              </a:lnSpc>
+              <a:buNone/>
+            </a:pPr>
+            <a:r>
+              <a:rPr lang="ja-JP" altLang="en-US" sz="3800" dirty="0">
+                <a:solidFill>
+                  <a:srgbClr val="1A1A1A"/>
+                </a:solidFill>
+                <a:latin typeface="Dela Gothic One" pitchFamily="34" charset="0"/>
+                <a:ea typeface="けいふぉんと" pitchFamily="34" charset="-122"/>
+                <a:cs typeface="Dela Gothic One" pitchFamily="34" charset="-120"/>
+              </a:rPr>
+              <a:t>AIと話す型を身につける</a:t>
+            </a:r>
+            <a:endParaRPr lang="ja-JP" sz="3800" dirty="0"/>
+          </a:p>
+        </p:txBody>
+      </p:sp>
+      <p:sp>
+        <p:nvSpPr>
+          <p:cNvPr id="5" name="Text 2"/>
+          <p:cNvSpPr txBox="1"/>
+          <p:nvPr/>
+        </p:nvSpPr>
+        <p:spPr>
+          <a:xfrm rot="-120000">
+            <a:off x="457200" y="2971800"/>
+            <a:ext cx="4937760" cy="502920"/>
+          </a:xfrm>
+          <a:prstGeom prst="rect">
+            <a:avLst/>
+          </a:prstGeom>
+          <a:solidFill>
+            <a:srgbClr val="DD6420"/>
+          </a:solidFill>
+          <a:ln w="19050">
+            <a:solidFill>
+              <a:srgbClr val="1A1A1A"/>
+            </a:solidFill>
+          </a:ln>
+          <a:effectLst>
+            <a:outerShdw sx="100000" sy="100000" kx="0" ky="0" algn="bl" rotWithShape="0" blurRad="101600" dist="38100" dir="2700000">
+              <a:srgbClr val="1A1A1A">
+                <a:alpha val="100000"/>
+              </a:srgbClr>
+            </a:outerShdw>
+          </a:effectLst>
+        </p:spPr>
+        <p:txBody>
           <a:bodyPr wrap="square" lIns="0" tIns="0" rIns="0" bIns="0" rtlCol="0" anchor="ctr"/>
           <a:lstStyle/>
           <a:p>
@@ -2287,109 +2134,38 @@
               <a:buNone/>
             </a:pPr>
             <a:r>
-              <a:rPr lang="en-US" sz="2200" b="1" dirty="0">
-                <a:solidFill>
-                  <a:schemeClr val="accent1"/>
-                </a:solidFill>
-              </a:rPr>
-              <a:t>第2回</a:t>
-            </a:r>
-            <a:endParaRPr lang="en-US" sz="2200" dirty="0"/>
-          </a:p>
-        </p:txBody>
-      </p:sp>
-      <p:sp>
-        <p:nvSpPr>
-          <p:cNvPr id="4" name="Text 0"/>
+              <a:rPr lang="ja-JP" altLang="en-US" sz="1600" b="1" dirty="0">
+                <a:solidFill>
+                  <a:srgbClr val="FFFFFF"/>
+                </a:solidFill>
+                <a:latin typeface="Noto Sans JP" pitchFamily="34" charset="0"/>
+                <a:ea typeface="Noto Sans JP" pitchFamily="34" charset="-122"/>
+                <a:cs typeface="Noto Sans JP" pitchFamily="34" charset="-120"/>
+              </a:rPr>
+              <a:t>フェーズ1 土台をつくる｜第1週</a:t>
+            </a:r>
+            <a:endParaRPr lang="ja-JP" sz="1600" dirty="0"/>
+          </a:p>
+        </p:txBody>
+      </p:sp>
+      <p:sp>
+        <p:nvSpPr>
+          <p:cNvPr id="6" name="card"/>
           <p:cNvSpPr/>
-          <p:nvPr>
-            <p:ph idx="100" type="title" hasCustomPrompt="1"/>
-          </p:nvPr>
-        </p:nvSpPr>
-        <p:spPr>
-          <a:xfrm>
-            <a:off x="548640" y="1691640"/>
-            <a:ext cx="5852160" cy="1371600"/>
-          </a:xfrm>
-          <a:prstGeom prst="rect">
-            <a:avLst/>
-          </a:prstGeom>
-          <a:noFill/>
-          <a:ln/>
-        </p:spPr>
-        <p:txBody>
-          <a:bodyPr wrap="square" lIns="0" tIns="0" rIns="0" bIns="0" rtlCol="0" anchor="t"/>
-          <a:lstStyle/>
-          <a:p>
-            <a:pPr algn="l" indent="0" marL="0">
-              <a:buNone/>
-            </a:pPr>
-            <a:r>
-              <a:rPr lang="en-US" sz="3200" b="1" dirty="0">
-                <a:solidFill>
-                  <a:schemeClr val="tx1"/>
-                </a:solidFill>
-              </a:rPr>
-              <a:t>AIと話す型を身につける</a:t>
-            </a:r>
-            <a:endParaRPr lang="en-US" sz="3200" dirty="0"/>
-          </a:p>
-        </p:txBody>
-      </p:sp>
-      <p:sp>
-        <p:nvSpPr>
-          <p:cNvPr id="5" name="Text 0"/>
-          <p:cNvSpPr/>
-          <p:nvPr>
-            <p:ph idx="101" type="body" hasCustomPrompt="1"/>
-          </p:nvPr>
-        </p:nvSpPr>
-        <p:spPr>
-          <a:xfrm>
-            <a:off x="548640" y="3246120"/>
-            <a:ext cx="5852160" cy="457200"/>
-          </a:xfrm>
-          <a:prstGeom prst="rect">
-            <a:avLst/>
-          </a:prstGeom>
-          <a:noFill/>
-          <a:ln/>
-        </p:spPr>
-        <p:txBody>
-          <a:bodyPr wrap="square" lIns="0" tIns="0" rIns="0" bIns="0" rtlCol="0"/>
-          <a:lstStyle/>
-          <a:p>
-            <a:pPr indent="0" marL="0">
-              <a:buNone/>
-            </a:pPr>
-            <a:r>
-              <a:rPr lang="en-US" sz="1400" dirty="0">
-                <a:solidFill>
-                  <a:schemeClr val="tx1"/>
-                </a:solidFill>
-              </a:rPr>
-              <a:t>フェーズ1 土台をつくる　｜　第1週</a:t>
-            </a:r>
-            <a:endParaRPr lang="en-US" sz="1400" dirty="0"/>
-          </a:p>
-        </p:txBody>
-      </p:sp>
-      <p:sp>
-        <p:nvSpPr>
-          <p:cNvPr id="6" name="title-circle"/>
-          <p:cNvSpPr/>
-          <p:nvPr/>
-        </p:nvSpPr>
-        <p:spPr>
-          <a:xfrm>
-            <a:off x="6537960" y="1188720"/>
-            <a:ext cx="2103120" cy="2103120"/>
-          </a:xfrm>
-          <a:prstGeom prst="ellipse">
-            <a:avLst/>
-          </a:prstGeom>
-          <a:solidFill>
-            <a:schemeClr val="bg1"/>
+          <p:nvPr/>
+        </p:nvSpPr>
+        <p:spPr>
+          <a:xfrm>
+            <a:off x="457200" y="3730752"/>
+            <a:ext cx="4937760" cy="896112"/>
+          </a:xfrm>
+          <a:prstGeom prst="roundRect">
+            <a:avLst>
+              <a:gd name="adj" fmla="val 10204"/>
+            </a:avLst>
+          </a:prstGeom>
+          <a:solidFill>
+            <a:srgbClr val="FFFFFF"/>
           </a:solidFill>
           <a:ln w="25400">
             <a:solidFill>
@@ -2398,38 +2174,76 @@
             <a:prstDash val="solid"/>
           </a:ln>
           <a:effectLst>
-            <a:outerShdw sx="100000" sy="100000" kx="0" ky="0" algn="bl" rotWithShape="0" blurRad="101600" dist="38100" dir="2700000">
-              <a:srgbClr val="000000">
-                <a:alpha val="18000"/>
+            <a:outerShdw sx="100000" sy="100000" kx="0" ky="0" algn="bl" rotWithShape="0" blurRad="101600" dist="50800" dir="2700000">
+              <a:srgbClr val="1A1A1A">
+                <a:alpha val="100000"/>
               </a:srgbClr>
             </a:outerShdw>
           </a:effectLst>
         </p:spPr>
       </p:sp>
-      <p:pic>
-        <p:nvPicPr>
-          <p:cNvPr id="7" name="title-icon" descr="preencoded.png">    </p:cNvPr>
-          <p:cNvPicPr>
-            <a:picLocks noChangeAspect="1"/>
-          </p:cNvPicPr>
-          <p:nvPr/>
-        </p:nvPicPr>
-        <p:blipFill>
-          <a:blip r:embed="rId1"/>
-          <a:stretch>
-            <a:fillRect/>
-          </a:stretch>
-        </p:blipFill>
-        <p:spPr>
-          <a:xfrm>
-            <a:off x="7086600" y="1737360"/>
-            <a:ext cx="1005840" cy="1005840"/>
-          </a:xfrm>
-          <a:prstGeom prst="rect">
-            <a:avLst/>
-          </a:prstGeom>
-        </p:spPr>
-      </p:pic>
+      <p:sp>
+        <p:nvSpPr>
+          <p:cNvPr id="7" name="Text 4"/>
+          <p:cNvSpPr txBox="1"/>
+          <p:nvPr/>
+        </p:nvSpPr>
+        <p:spPr>
+          <a:xfrm>
+            <a:off x="658368" y="3767328"/>
+            <a:ext cx="4572000" cy="822960"/>
+          </a:xfrm>
+          <a:prstGeom prst="rect">
+            <a:avLst/>
+          </a:prstGeom>
+          <a:noFill/>
+          <a:ln/>
+        </p:spPr>
+        <p:txBody>
+          <a:bodyPr wrap="square" lIns="0" tIns="0" rIns="0" bIns="0" rtlCol="0" anchor="ctr"/>
+          <a:lstStyle/>
+          <a:p>
+            <a:pPr indent="0" marL="0">
+              <a:spcAft>
+                <a:spcPts val="200"/>
+              </a:spcAft>
+              <a:buNone/>
+            </a:pPr>
+            <a:r>
+              <a:rPr lang="ja-JP" altLang="en-US" sz="1500" b="1" dirty="0">
+                <a:solidFill>
+                  <a:srgbClr val="1A1A1A"/>
+                </a:solidFill>
+                <a:latin typeface="Noto Sans JP" pitchFamily="34" charset="0"/>
+                <a:ea typeface="Noto Sans JP" pitchFamily="34" charset="-122"/>
+                <a:cs typeface="Noto Sans JP" pitchFamily="34" charset="-120"/>
+              </a:rPr>
+              <a:t>マナベル｜AI×Lark 構築者育成講座</a:t>
+            </a:r>
+            <a:endParaRPr lang="ja-JP" sz="1500" dirty="0"/>
+          </a:p>
+          <a:p>
+            <a:pPr indent="0" marL="0">
+              <a:spcAft>
+                <a:spcPts val="200"/>
+              </a:spcAft>
+              <a:buNone/>
+            </a:pPr>
+            <a:r>
+              <a:rPr lang="ja-JP" altLang="en-US" sz="1150" b="1" dirty="0">
+                <a:solidFill>
+                  <a:srgbClr val="DD6420"/>
+                </a:solidFill>
+                <a:latin typeface="Noto Sans JP" pitchFamily="34" charset="0"/>
+                <a:ea typeface="Noto Sans JP" pitchFamily="34" charset="-122"/>
+                <a:cs typeface="Noto Sans JP" pitchFamily="34" charset="-120"/>
+              </a:rPr>
+              <a:t>ささエール ／ OFFICE PLATA　笹原 彰朗</a:t>
+            </a:r>
+            <a:endParaRPr lang="ja-JP" sz="1500" dirty="0"/>
+          </a:p>
+        </p:txBody>
+      </p:sp>
     </p:spTree>
   </p:cSld>
   <p:clrMapOvr>
@@ -2455,18 +2269,92 @@
           <a:chExt cx="0" cy="0"/>
         </a:xfrm>
       </p:grpSpPr>
-      <p:sp>
-        <p:nvSpPr>
-          <p:cNvPr id="2" name="Text 0"/>
-          <p:cNvSpPr/>
-          <p:nvPr>
-            <p:ph idx="100" type="title" hasCustomPrompt="1"/>
-          </p:nvPr>
-        </p:nvSpPr>
-        <p:spPr>
-          <a:xfrm>
-            <a:off x="548640" y="1463040"/>
-            <a:ext cx="8046720" cy="1005840"/>
+      <p:pic>
+        <p:nvPicPr>
+          <p:cNvPr id="2" name="portrait" descr="講師 笹原彰朗">    </p:cNvPr>
+          <p:cNvPicPr>
+            <a:picLocks noChangeAspect="1"/>
+          </p:cNvPicPr>
+          <p:nvPr/>
+        </p:nvPicPr>
+        <p:blipFill>
+          <a:blip r:embed="rId1"/>
+          <a:stretch>
+            <a:fillRect/>
+          </a:stretch>
+        </p:blipFill>
+        <p:spPr>
+          <a:xfrm>
+            <a:off x="6003588" y="1211580"/>
+            <a:ext cx="2866092" cy="3931920"/>
+          </a:xfrm>
+          <a:prstGeom prst="rect">
+            <a:avLst/>
+          </a:prstGeom>
+        </p:spPr>
+      </p:pic>
+      <p:sp>
+        <p:nvSpPr>
+          <p:cNvPr id="3" name="Text 0"/>
+          <p:cNvSpPr txBox="1"/>
+          <p:nvPr/>
+        </p:nvSpPr>
+        <p:spPr>
+          <a:xfrm rot="-240000">
+            <a:off x="457200" y="548640"/>
+            <a:ext cx="1280160" cy="548640"/>
+          </a:xfrm>
+          <a:prstGeom prst="rect">
+            <a:avLst/>
+          </a:prstGeom>
+          <a:solidFill>
+            <a:srgbClr val="1A1A1A"/>
+          </a:solidFill>
+          <a:ln>
+            <a:solidFill>
+              <a:srgbClr val="1A1A1A"/>
+            </a:solidFill>
+          </a:ln>
+          <a:effectLst>
+            <a:outerShdw sx="100000" sy="100000" kx="0" ky="0" algn="bl" rotWithShape="0" blurRad="101600" dist="38100" dir="2700000">
+              <a:srgbClr val="1A1A1A">
+                <a:alpha val="100000"/>
+              </a:srgbClr>
+            </a:outerShdw>
+          </a:effectLst>
+        </p:spPr>
+        <p:txBody>
+          <a:bodyPr wrap="square" lIns="0" tIns="0" rIns="0" bIns="0" rtlCol="0" anchor="ctr"/>
+          <a:lstStyle/>
+          <a:p>
+            <a:pPr algn="ctr" indent="0" marL="0">
+              <a:buNone/>
+            </a:pPr>
+            <a:r>
+              <a:rPr lang="ja-JP" altLang="en-US" sz="2000" dirty="0">
+                <a:solidFill>
+                  <a:srgbClr val="FFD600"/>
+                </a:solidFill>
+                <a:latin typeface="Dela Gothic One" pitchFamily="34" charset="0"/>
+                <a:ea typeface="けいふぉんと" pitchFamily="34" charset="-122"/>
+                <a:cs typeface="Dela Gothic One" pitchFamily="34" charset="-120"/>
+              </a:rPr>
+              <a:t>次回</a:t>
+            </a:r>
+            <a:endParaRPr lang="ja-JP" sz="2000" dirty="0"/>
+          </a:p>
+        </p:txBody>
+      </p:sp>
+      <p:sp>
+        <p:nvSpPr>
+          <p:cNvPr id="4" name="Text 1"/>
+          <p:cNvSpPr txBox="1"/>
+          <p:nvPr/>
+        </p:nvSpPr>
+        <p:spPr>
+          <a:xfrm>
+            <a:off x="457200" y="1280160"/>
+            <a:ext cx="5852160" cy="1554480"/>
           </a:xfrm>
           <a:prstGeom prst="rect">
             <a:avLst/>
@@ -2475,36 +2363,90 @@
           <a:ln/>
         </p:spPr>
         <p:txBody>
-          <a:bodyPr wrap="square" lIns="0" tIns="0" rIns="0" bIns="0" rtlCol="0" anchor="t"/>
-          <a:lstStyle/>
-          <a:p>
-            <a:pPr algn="l" indent="0" marL="0">
-              <a:buNone/>
-            </a:pPr>
-            <a:r>
-              <a:rPr lang="en-US" sz="3000" b="1" dirty="0">
-                <a:solidFill>
-                  <a:schemeClr val="accent1"/>
-                </a:solidFill>
-              </a:rPr>
-              <a:t>次回：第3回 Larkの基本を使いこなす</a:t>
-            </a:r>
-            <a:endParaRPr lang="en-US" sz="3000" dirty="0"/>
-          </a:p>
-        </p:txBody>
-      </p:sp>
-      <p:sp>
-        <p:nvSpPr>
-          <p:cNvPr id="3" name="Text 0"/>
+          <a:bodyPr wrap="square" lIns="0" tIns="0" rIns="0" bIns="0" rtlCol="0" anchor="ctr">
+            <a:normAutofit/>
+          </a:bodyPr>
+          <a:lstStyle/>
+          <a:p>
+            <a:pPr indent="0" marL="0">
+              <a:buNone/>
+            </a:pPr>
+            <a:r>
+              <a:rPr lang="ja-JP" altLang="en-US" sz="3200" dirty="0">
+                <a:solidFill>
+                  <a:srgbClr val="1A1A1A"/>
+                </a:solidFill>
+                <a:latin typeface="Dela Gothic One" pitchFamily="34" charset="0"/>
+                <a:ea typeface="けいふぉんと" pitchFamily="34" charset="-122"/>
+                <a:cs typeface="Dela Gothic One" pitchFamily="34" charset="-120"/>
+              </a:rPr>
+              <a:t>第3回</a:t>
+            </a:r>
+            <a:endParaRPr lang="ja-JP" sz="3200" dirty="0"/>
+          </a:p>
+          <a:p>
+            <a:pPr indent="0" marL="0">
+              <a:buNone/>
+            </a:pPr>
+            <a:r>
+              <a:rPr lang="ja-JP" altLang="en-US" sz="3200" dirty="0">
+                <a:solidFill>
+                  <a:srgbClr val="1A1A1A"/>
+                </a:solidFill>
+                <a:latin typeface="Dela Gothic One" pitchFamily="34" charset="0"/>
+                <a:ea typeface="けいふぉんと" pitchFamily="34" charset="-122"/>
+                <a:cs typeface="Dela Gothic One" pitchFamily="34" charset="-120"/>
+              </a:rPr>
+              <a:t>Larkの基本を使いこなす</a:t>
+            </a:r>
+            <a:endParaRPr lang="ja-JP" sz="3200" dirty="0"/>
+          </a:p>
+        </p:txBody>
+      </p:sp>
+      <p:sp>
+        <p:nvSpPr>
+          <p:cNvPr id="5" name="card"/>
           <p:cNvSpPr/>
-          <p:nvPr>
-            <p:ph idx="101" type="body" hasCustomPrompt="1"/>
-          </p:nvPr>
-        </p:nvSpPr>
-        <p:spPr>
-          <a:xfrm>
-            <a:off x="548640" y="2606040"/>
-            <a:ext cx="8046720" cy="1097280"/>
+          <p:nvPr/>
+        </p:nvSpPr>
+        <p:spPr>
+          <a:xfrm>
+            <a:off x="457200" y="3108960"/>
+            <a:ext cx="5394960" cy="1325880"/>
+          </a:xfrm>
+          <a:prstGeom prst="roundRect">
+            <a:avLst>
+              <a:gd name="adj" fmla="val 6897"/>
+            </a:avLst>
+          </a:prstGeom>
+          <a:solidFill>
+            <a:srgbClr val="FFFFFF"/>
+          </a:solidFill>
+          <a:ln w="25400">
+            <a:solidFill>
+              <a:srgbClr val="1A1A1A"/>
+            </a:solidFill>
+            <a:prstDash val="solid"/>
+          </a:ln>
+          <a:effectLst>
+            <a:outerShdw sx="100000" sy="100000" kx="0" ky="0" algn="bl" rotWithShape="0" blurRad="101600" dist="50800" dir="2700000">
+              <a:srgbClr val="1A1A1A">
+                <a:alpha val="100000"/>
+              </a:srgbClr>
+            </a:outerShdw>
+          </a:effectLst>
+        </p:spPr>
+      </p:sp>
+      <p:sp>
+        <p:nvSpPr>
+          <p:cNvPr id="6" name="Text 3"/>
+          <p:cNvSpPr txBox="1"/>
+          <p:nvPr/>
+        </p:nvSpPr>
+        <p:spPr>
+          <a:xfrm>
+            <a:off x="685800" y="3200400"/>
+            <a:ext cx="4937760" cy="1143000"/>
           </a:xfrm>
           <a:prstGeom prst="rect">
             <a:avLst/>
@@ -2513,35 +2455,49 @@
           <a:ln/>
         </p:spPr>
         <p:txBody>
-          <a:bodyPr wrap="square" lIns="0" tIns="0" rIns="0" bIns="0" rtlCol="0" anchor="t"/>
+          <a:bodyPr wrap="square" lIns="0" tIns="0" rIns="0" bIns="0" rtlCol="0" anchor="ctr">
+            <a:normAutofit/>
+          </a:bodyPr>
           <a:lstStyle/>
           <a:p>
             <a:pPr indent="0" marL="0">
-              <a:buNone/>
-            </a:pPr>
-            <a:r>
-              <a:rPr lang="en-US" sz="1500" dirty="0">
-                <a:solidFill>
-                  <a:schemeClr val="bg1"/>
-                </a:solidFill>
+              <a:spcAft>
+                <a:spcPts val="400"/>
+              </a:spcAft>
+              <a:buNone/>
+            </a:pPr>
+            <a:r>
+              <a:rPr lang="ja-JP" altLang="en-US" sz="1400" b="1" dirty="0">
+                <a:solidFill>
+                  <a:srgbClr val="1A1A1A"/>
+                </a:solidFill>
+                <a:latin typeface="Noto Sans JP" pitchFamily="34" charset="0"/>
+                <a:ea typeface="Noto Sans JP" pitchFamily="34" charset="-122"/>
+                <a:cs typeface="Noto Sans JP" pitchFamily="34" charset="-120"/>
               </a:rPr>
               <a:t>わからないところは、講座グループでいつでも質問してください。</a:t>
             </a:r>
-            <a:endParaRPr lang="en-US" sz="1500" dirty="0"/>
+            <a:endParaRPr lang="ja-JP" sz="1400" dirty="0"/>
           </a:p>
           <a:p>
             <a:pPr indent="0" marL="0">
-              <a:buNone/>
-            </a:pPr>
-            <a:r>
-              <a:rPr lang="en-US" sz="1500" dirty="0">
-                <a:solidFill>
-                  <a:schemeClr val="bg1"/>
-                </a:solidFill>
+              <a:spcAft>
+                <a:spcPts val="400"/>
+              </a:spcAft>
+              <a:buNone/>
+            </a:pPr>
+            <a:r>
+              <a:rPr lang="ja-JP" altLang="en-US" sz="1400" b="1" dirty="0">
+                <a:solidFill>
+                  <a:srgbClr val="1A1A1A"/>
+                </a:solidFill>
+                <a:latin typeface="Noto Sans JP" pitchFamily="34" charset="0"/>
+                <a:ea typeface="Noto Sans JP" pitchFamily="34" charset="-122"/>
+                <a:cs typeface="Noto Sans JP" pitchFamily="34" charset="-120"/>
               </a:rPr>
               <a:t>APIキーやパスワードは送らないでください。</a:t>
             </a:r>
-            <a:endParaRPr lang="en-US" sz="1500" dirty="0"/>
+            <a:endParaRPr lang="ja-JP" sz="1400" dirty="0"/>
           </a:p>
         </p:txBody>
       </p:sp>
@@ -2573,15 +2529,58 @@
       <p:sp>
         <p:nvSpPr>
           <p:cNvPr id="2" name="Text 0"/>
-          <p:cNvSpPr/>
-          <p:nvPr>
-            <p:ph idx="100" type="title" hasCustomPrompt="1"/>
-          </p:nvPr>
-        </p:nvSpPr>
-        <p:spPr>
-          <a:xfrm>
-            <a:off x="548640" y="658368"/>
-            <a:ext cx="8046720" cy="566928"/>
+          <p:cNvSpPr txBox="1"/>
+          <p:nvPr/>
+        </p:nvSpPr>
+        <p:spPr>
+          <a:xfrm rot="-180000">
+            <a:off x="411480" y="201168"/>
+            <a:ext cx="1040587" cy="352044"/>
+          </a:xfrm>
+          <a:prstGeom prst="rect">
+            <a:avLst/>
+          </a:prstGeom>
+          <a:solidFill>
+            <a:srgbClr val="1A1A1A"/>
+          </a:solidFill>
+          <a:ln>
+            <a:solidFill>
+              <a:srgbClr val="1A1A1A"/>
+            </a:solidFill>
+          </a:ln>
+        </p:spPr>
+        <p:txBody>
+          <a:bodyPr wrap="square" lIns="0" tIns="0" rIns="0" bIns="0" rtlCol="0" anchor="ctr"/>
+          <a:lstStyle/>
+          <a:p>
+            <a:pPr algn="ctr" indent="0" marL="0">
+              <a:buNone/>
+            </a:pPr>
+            <a:r>
+              <a:rPr lang="ja-JP" altLang="en-US" sz="1100" dirty="0">
+                <a:solidFill>
+                  <a:srgbClr val="FFFFFF"/>
+                </a:solidFill>
+                <a:latin typeface="Dela Gothic One" pitchFamily="34" charset="0"/>
+                <a:ea typeface="けいふぉんと" pitchFamily="34" charset="-122"/>
+                <a:cs typeface="Dela Gothic One" pitchFamily="34" charset="-120"/>
+              </a:rPr>
+              <a:t>はじめに</a:t>
+            </a:r>
+            <a:endParaRPr lang="ja-JP" sz="1100" dirty="0"/>
+          </a:p>
+        </p:txBody>
+      </p:sp>
+      <p:sp>
+        <p:nvSpPr>
+          <p:cNvPr id="3" name="Text 1"/>
+          <p:cNvSpPr txBox="1"/>
+          <p:nvPr/>
+        </p:nvSpPr>
+        <p:spPr>
+          <a:xfrm>
+            <a:off x="411480" y="502920"/>
+            <a:ext cx="8321040" cy="685800"/>
           </a:xfrm>
           <a:prstGeom prst="rect">
             <a:avLst/>
@@ -2590,105 +2589,79 @@
           <a:ln/>
         </p:spPr>
         <p:txBody>
-          <a:bodyPr wrap="square" lIns="0" tIns="0" rIns="0" bIns="0" rtlCol="0" anchor="ctr"/>
-          <a:lstStyle/>
-          <a:p>
-            <a:pPr algn="l" indent="0" marL="0">
-              <a:buNone/>
-            </a:pPr>
-            <a:r>
-              <a:rPr lang="en-US" sz="2400" b="1" dirty="0">
-                <a:solidFill>
-                  <a:schemeClr val="tx1"/>
-                </a:solidFill>
+          <a:bodyPr wrap="square" lIns="0" tIns="0" rIns="0" bIns="0" rtlCol="0" anchor="ctr">
+            <a:normAutofit/>
+          </a:bodyPr>
+          <a:lstStyle/>
+          <a:p>
+            <a:pPr indent="0" marL="0">
+              <a:buNone/>
+            </a:pPr>
+            <a:r>
+              <a:rPr lang="ja-JP" altLang="en-US" sz="2600" dirty="0">
+                <a:solidFill>
+                  <a:srgbClr val="1A1A1A"/>
+                </a:solidFill>
+                <a:latin typeface="Dela Gothic One" pitchFamily="34" charset="0"/>
+                <a:ea typeface="けいふぉんと" pitchFamily="34" charset="-122"/>
+                <a:cs typeface="Dela Gothic One" pitchFamily="34" charset="-120"/>
               </a:rPr>
               <a:t>今日のゴールと流れ</a:t>
             </a:r>
-            <a:endParaRPr lang="en-US" sz="2400" dirty="0"/>
-          </a:p>
-        </p:txBody>
-      </p:sp>
-      <p:sp>
-        <p:nvSpPr>
-          <p:cNvPr id="3" name="chip"/>
+            <a:endParaRPr lang="ja-JP" sz="2600" dirty="0"/>
+          </a:p>
+        </p:txBody>
+      </p:sp>
+      <p:sp>
+        <p:nvSpPr>
+          <p:cNvPr id="4" name="card"/>
           <p:cNvSpPr/>
           <p:nvPr/>
         </p:nvSpPr>
         <p:spPr>
           <a:xfrm>
-            <a:off x="548640" y="292608"/>
-            <a:ext cx="932688" cy="292608"/>
+            <a:off x="502920" y="1371600"/>
+            <a:ext cx="3941064" cy="1280160"/>
           </a:xfrm>
           <a:prstGeom prst="roundRect">
             <a:avLst>
-              <a:gd name="adj" fmla="val 50000"/>
+              <a:gd name="adj" fmla="val 7143"/>
             </a:avLst>
           </a:prstGeom>
           <a:solidFill>
-            <a:schemeClr val="tx1"/>
-          </a:solidFill>
-          <a:ln w="12700">
+            <a:srgbClr val="FFFFFF"/>
+          </a:solidFill>
+          <a:ln w="25400">
             <a:solidFill>
-              <a:schemeClr val="tx1"/>
+              <a:srgbClr val="1A1A1A"/>
             </a:solidFill>
             <a:prstDash val="solid"/>
           </a:ln>
-        </p:spPr>
-      </p:sp>
-      <p:sp>
-        <p:nvSpPr>
-          <p:cNvPr id="4" name="chip-text"/>
-          <p:cNvSpPr txBox="1"/>
-          <p:nvPr/>
-        </p:nvSpPr>
-        <p:spPr>
-          <a:xfrm>
-            <a:off x="548640" y="292608"/>
-            <a:ext cx="932688" cy="292608"/>
-          </a:xfrm>
-          <a:prstGeom prst="rect">
-            <a:avLst/>
-          </a:prstGeom>
-          <a:noFill/>
-          <a:ln/>
-        </p:spPr>
-        <p:txBody>
-          <a:bodyPr wrap="square" lIns="0" tIns="0" rIns="0" bIns="0" rtlCol="0" anchor="ctr"/>
-          <a:lstStyle/>
-          <a:p>
-            <a:pPr algn="ctr" indent="0" marL="0">
-              <a:buNone/>
-            </a:pPr>
-            <a:r>
-              <a:rPr lang="en-US" sz="1100" b="1" dirty="0">
-                <a:solidFill>
-                  <a:schemeClr val="accent1"/>
-                </a:solidFill>
-              </a:rPr>
-              <a:t>はじめに</a:t>
-            </a:r>
-            <a:endParaRPr lang="en-US" sz="1100" dirty="0"/>
-          </a:p>
-        </p:txBody>
-      </p:sp>
-      <p:sp>
-        <p:nvSpPr>
-          <p:cNvPr id="5" name="card"/>
+          <a:effectLst>
+            <a:outerShdw sx="100000" sy="100000" kx="0" ky="0" algn="bl" rotWithShape="0" blurRad="101600" dist="50800" dir="2700000">
+              <a:srgbClr val="1A1A1A">
+                <a:alpha val="100000"/>
+              </a:srgbClr>
+            </a:outerShdw>
+          </a:effectLst>
+        </p:spPr>
+      </p:sp>
+      <p:sp>
+        <p:nvSpPr>
+          <p:cNvPr id="5" name="icon-circle"/>
           <p:cNvSpPr/>
           <p:nvPr/>
         </p:nvSpPr>
         <p:spPr>
           <a:xfrm>
-            <a:off x="548640" y="1417320"/>
-            <a:ext cx="3909060" cy="1280160"/>
-          </a:xfrm>
-          <a:prstGeom prst="roundRect">
-            <a:avLst>
-              <a:gd name="adj" fmla="val 8571"/>
-            </a:avLst>
-          </a:prstGeom>
-          <a:solidFill>
-            <a:schemeClr val="bg2"/>
+            <a:off x="685800" y="1572768"/>
+            <a:ext cx="438912" cy="438912"/>
+          </a:xfrm>
+          <a:prstGeom prst="ellipse">
+            <a:avLst/>
+          </a:prstGeom>
+          <a:solidFill>
+            <a:srgbClr val="DD6420"/>
           </a:solidFill>
           <a:ln w="19050">
             <a:solidFill>
@@ -2696,43 +2669,11 @@
             </a:solidFill>
             <a:prstDash val="solid"/>
           </a:ln>
-          <a:effectLst>
-            <a:outerShdw sx="100000" sy="100000" kx="0" ky="0" algn="bl" rotWithShape="0" blurRad="101600" dist="38100" dir="2700000">
-              <a:srgbClr val="000000">
-                <a:alpha val="18000"/>
-              </a:srgbClr>
-            </a:outerShdw>
-          </a:effectLst>
-        </p:spPr>
-      </p:sp>
-      <p:sp>
-        <p:nvSpPr>
-          <p:cNvPr id="6" name="icon-circle"/>
-          <p:cNvSpPr/>
-          <p:nvPr/>
-        </p:nvSpPr>
-        <p:spPr>
-          <a:xfrm>
-            <a:off x="731520" y="1600200"/>
-            <a:ext cx="411480" cy="411480"/>
-          </a:xfrm>
-          <a:prstGeom prst="ellipse">
-            <a:avLst/>
-          </a:prstGeom>
-          <a:solidFill>
-            <a:schemeClr val="accent1"/>
-          </a:solidFill>
-          <a:ln w="15875">
-            <a:solidFill>
-              <a:srgbClr val="1A1A1A"/>
-            </a:solidFill>
-            <a:prstDash val="solid"/>
-          </a:ln>
         </p:spPr>
       </p:sp>
       <p:pic>
         <p:nvPicPr>
-          <p:cNvPr id="7" name="icon" descr="preencoded.png">    </p:cNvPr>
+          <p:cNvPr id="6" name="icon" descr="preencoded.png">    </p:cNvPr>
           <p:cNvPicPr>
             <a:picLocks noChangeAspect="1"/>
           </p:cNvPicPr>
@@ -2746,8 +2687,8 @@
         </p:blipFill>
         <p:spPr>
           <a:xfrm>
-            <a:off x="838505" y="1707185"/>
-            <a:ext cx="197510" cy="197510"/>
+            <a:off x="795528" y="1682496"/>
+            <a:ext cx="219456" cy="219456"/>
           </a:xfrm>
           <a:prstGeom prst="rect">
             <a:avLst/>
@@ -2756,14 +2697,14 @@
       </p:pic>
       <p:sp>
         <p:nvSpPr>
-          <p:cNvPr id="8" name="goal"/>
+          <p:cNvPr id="7" name="goal"/>
           <p:cNvSpPr txBox="1"/>
           <p:nvPr/>
         </p:nvSpPr>
         <p:spPr>
           <a:xfrm>
-            <a:off x="1280160" y="1508760"/>
-            <a:ext cx="2994660" cy="1097280"/>
+            <a:off x="1252728" y="1463040"/>
+            <a:ext cx="3026664" cy="1097280"/>
           </a:xfrm>
           <a:prstGeom prst="rect">
             <a:avLst/>
@@ -2772,42 +2713,79 @@
           <a:ln/>
         </p:spPr>
         <p:txBody>
-          <a:bodyPr wrap="square" lIns="0" tIns="0" rIns="0" bIns="0" rtlCol="0" anchor="ctr"/>
+          <a:bodyPr wrap="square" lIns="0" tIns="0" rIns="0" bIns="0" rtlCol="0" anchor="ctr">
+            <a:normAutofit/>
+          </a:bodyPr>
           <a:lstStyle/>
           <a:p>
             <a:pPr indent="0" marL="0">
               <a:buNone/>
             </a:pPr>
             <a:r>
-              <a:rPr lang="en-US" sz="1400" b="1" dirty="0">
-                <a:solidFill>
-                  <a:schemeClr val="tx1"/>
-                </a:solidFill>
+              <a:rPr lang="ja-JP" altLang="en-US" sz="1400" b="1" dirty="0">
+                <a:solidFill>
+                  <a:srgbClr val="1A1A1A"/>
+                </a:solidFill>
+                <a:latin typeface="Noto Sans JP" pitchFamily="34" charset="0"/>
+                <a:ea typeface="Noto Sans JP" pitchFamily="34" charset="-122"/>
+                <a:cs typeface="Noto Sans JP" pitchFamily="34" charset="-120"/>
               </a:rPr>
               <a:t>頼み方の「型」で、欲しい答えを引き出せる</a:t>
             </a:r>
-            <a:endParaRPr lang="en-US" sz="1400" dirty="0"/>
-          </a:p>
-        </p:txBody>
-      </p:sp>
-      <p:sp>
-        <p:nvSpPr>
-          <p:cNvPr id="9" name="card"/>
+            <a:endParaRPr lang="ja-JP" sz="1400" dirty="0"/>
+          </a:p>
+        </p:txBody>
+      </p:sp>
+      <p:sp>
+        <p:nvSpPr>
+          <p:cNvPr id="8" name="card"/>
           <p:cNvSpPr/>
           <p:nvPr/>
         </p:nvSpPr>
         <p:spPr>
           <a:xfrm>
-            <a:off x="4686300" y="1417320"/>
-            <a:ext cx="3909060" cy="1280160"/>
+            <a:off x="4700016" y="1371600"/>
+            <a:ext cx="3941064" cy="1280160"/>
           </a:xfrm>
           <a:prstGeom prst="roundRect">
             <a:avLst>
-              <a:gd name="adj" fmla="val 8571"/>
+              <a:gd name="adj" fmla="val 7143"/>
             </a:avLst>
           </a:prstGeom>
           <a:solidFill>
-            <a:schemeClr val="bg2"/>
+            <a:srgbClr val="FFFFFF"/>
+          </a:solidFill>
+          <a:ln w="25400">
+            <a:solidFill>
+              <a:srgbClr val="1A1A1A"/>
+            </a:solidFill>
+            <a:prstDash val="solid"/>
+          </a:ln>
+          <a:effectLst>
+            <a:outerShdw sx="100000" sy="100000" kx="0" ky="0" algn="bl" rotWithShape="0" blurRad="101600" dist="50800" dir="2700000">
+              <a:srgbClr val="1A1A1A">
+                <a:alpha val="100000"/>
+              </a:srgbClr>
+            </a:outerShdw>
+          </a:effectLst>
+        </p:spPr>
+      </p:sp>
+      <p:sp>
+        <p:nvSpPr>
+          <p:cNvPr id="9" name="icon-circle"/>
+          <p:cNvSpPr/>
+          <p:nvPr/>
+        </p:nvSpPr>
+        <p:spPr>
+          <a:xfrm>
+            <a:off x="4882896" y="1572768"/>
+            <a:ext cx="438912" cy="438912"/>
+          </a:xfrm>
+          <a:prstGeom prst="ellipse">
+            <a:avLst/>
+          </a:prstGeom>
+          <a:solidFill>
+            <a:srgbClr val="DD6420"/>
           </a:solidFill>
           <a:ln w="19050">
             <a:solidFill>
@@ -2815,43 +2793,11 @@
             </a:solidFill>
             <a:prstDash val="solid"/>
           </a:ln>
-          <a:effectLst>
-            <a:outerShdw sx="100000" sy="100000" kx="0" ky="0" algn="bl" rotWithShape="0" blurRad="101600" dist="38100" dir="2700000">
-              <a:srgbClr val="000000">
-                <a:alpha val="18000"/>
-              </a:srgbClr>
-            </a:outerShdw>
-          </a:effectLst>
-        </p:spPr>
-      </p:sp>
-      <p:sp>
-        <p:nvSpPr>
-          <p:cNvPr id="10" name="icon-circle"/>
-          <p:cNvSpPr/>
-          <p:nvPr/>
-        </p:nvSpPr>
-        <p:spPr>
-          <a:xfrm>
-            <a:off x="4869180" y="1600200"/>
-            <a:ext cx="411480" cy="411480"/>
-          </a:xfrm>
-          <a:prstGeom prst="ellipse">
-            <a:avLst/>
-          </a:prstGeom>
-          <a:solidFill>
-            <a:schemeClr val="accent1"/>
-          </a:solidFill>
-          <a:ln w="15875">
-            <a:solidFill>
-              <a:srgbClr val="1A1A1A"/>
-            </a:solidFill>
-            <a:prstDash val="solid"/>
-          </a:ln>
         </p:spPr>
       </p:sp>
       <p:pic>
         <p:nvPicPr>
-          <p:cNvPr id="11" name="icon" descr="preencoded.png">    </p:cNvPr>
+          <p:cNvPr id="10" name="icon" descr="preencoded.png">    </p:cNvPr>
           <p:cNvPicPr>
             <a:picLocks noChangeAspect="1"/>
           </p:cNvPicPr>
@@ -2865,8 +2811,8 @@
         </p:blipFill>
         <p:spPr>
           <a:xfrm>
-            <a:off x="4976165" y="1707185"/>
-            <a:ext cx="197510" cy="197510"/>
+            <a:off x="4992624" y="1682496"/>
+            <a:ext cx="219456" cy="219456"/>
           </a:xfrm>
           <a:prstGeom prst="rect">
             <a:avLst/>
@@ -2875,14 +2821,14 @@
       </p:pic>
       <p:sp>
         <p:nvSpPr>
-          <p:cNvPr id="12" name="goal"/>
+          <p:cNvPr id="11" name="goal"/>
           <p:cNvSpPr txBox="1"/>
           <p:nvPr/>
         </p:nvSpPr>
         <p:spPr>
           <a:xfrm>
-            <a:off x="5417820" y="1508760"/>
-            <a:ext cx="2994660" cy="1097280"/>
+            <a:off x="5449824" y="1463040"/>
+            <a:ext cx="3026664" cy="1097280"/>
           </a:xfrm>
           <a:prstGeom prst="rect">
             <a:avLst/>
@@ -2891,59 +2837,105 @@
           <a:ln/>
         </p:spPr>
         <p:txBody>
+          <a:bodyPr wrap="square" lIns="0" tIns="0" rIns="0" bIns="0" rtlCol="0" anchor="ctr">
+            <a:normAutofit/>
+          </a:bodyPr>
+          <a:lstStyle/>
+          <a:p>
+            <a:pPr indent="0" marL="0">
+              <a:buNone/>
+            </a:pPr>
+            <a:r>
+              <a:rPr lang="ja-JP" altLang="en-US" sz="1400" b="1" dirty="0">
+                <a:solidFill>
+                  <a:srgbClr val="1A1A1A"/>
+                </a:solidFill>
+                <a:latin typeface="Noto Sans JP" pitchFamily="34" charset="0"/>
+                <a:ea typeface="Noto Sans JP" pitchFamily="34" charset="-122"/>
+                <a:cs typeface="Noto Sans JP" pitchFamily="34" charset="-120"/>
+              </a:rPr>
+              <a:t>AIと壁打ちして「作りたいもの設計シート」を完成させる</a:t>
+            </a:r>
+            <a:endParaRPr lang="ja-JP" sz="1400" dirty="0"/>
+          </a:p>
+        </p:txBody>
+      </p:sp>
+      <p:sp>
+        <p:nvSpPr>
+          <p:cNvPr id="12" name="Text 8"/>
+          <p:cNvSpPr txBox="1"/>
+          <p:nvPr/>
+        </p:nvSpPr>
+        <p:spPr>
+          <a:xfrm rot="-120000">
+            <a:off x="457200" y="2907792"/>
+            <a:ext cx="1915668" cy="352044"/>
+          </a:xfrm>
+          <a:prstGeom prst="rect">
+            <a:avLst/>
+          </a:prstGeom>
+          <a:solidFill>
+            <a:srgbClr val="1A1A1A"/>
+          </a:solidFill>
+          <a:ln>
+            <a:solidFill>
+              <a:srgbClr val="1A1A1A"/>
+            </a:solidFill>
+          </a:ln>
+        </p:spPr>
+        <p:txBody>
           <a:bodyPr wrap="square" lIns="0" tIns="0" rIns="0" bIns="0" rtlCol="0" anchor="ctr"/>
           <a:lstStyle/>
           <a:p>
-            <a:pPr indent="0" marL="0">
-              <a:buNone/>
-            </a:pPr>
-            <a:r>
-              <a:rPr lang="en-US" sz="1400" b="1" dirty="0">
-                <a:solidFill>
-                  <a:schemeClr val="tx1"/>
-                </a:solidFill>
-              </a:rPr>
-              <a:t>AIと壁打ちして「作りたいもの設計シート」を完成させる</a:t>
-            </a:r>
-            <a:endParaRPr lang="en-US" sz="1400" dirty="0"/>
-          </a:p>
-        </p:txBody>
-      </p:sp>
-      <p:sp>
-        <p:nvSpPr>
-          <p:cNvPr id="13" name="Text 9"/>
-          <p:cNvSpPr txBox="1"/>
-          <p:nvPr/>
-        </p:nvSpPr>
-        <p:spPr>
-          <a:xfrm>
-            <a:off x="548640" y="2971800"/>
-            <a:ext cx="3657600" cy="320040"/>
-          </a:xfrm>
-          <a:prstGeom prst="rect">
-            <a:avLst/>
-          </a:prstGeom>
-          <a:noFill/>
-          <a:ln/>
-        </p:spPr>
-        <p:txBody>
-          <a:bodyPr wrap="square" lIns="0" tIns="0" rIns="0" bIns="0" rtlCol="0" anchor="ctr"/>
-          <a:lstStyle/>
-          <a:p>
-            <a:pPr indent="0" marL="0">
-              <a:buNone/>
-            </a:pPr>
-            <a:r>
-              <a:rPr lang="en-US" sz="1300" b="1" dirty="0">
-                <a:solidFill>
-                  <a:schemeClr val="tx1"/>
-                </a:solidFill>
+            <a:pPr algn="ctr" indent="0" marL="0">
+              <a:buNone/>
+            </a:pPr>
+            <a:r>
+              <a:rPr lang="ja-JP" altLang="en-US" sz="1100" dirty="0">
+                <a:solidFill>
+                  <a:srgbClr val="FFFFFF"/>
+                </a:solidFill>
+                <a:latin typeface="Dela Gothic One" pitchFamily="34" charset="0"/>
+                <a:ea typeface="けいふぉんと" pitchFamily="34" charset="-122"/>
+                <a:cs typeface="Dela Gothic One" pitchFamily="34" charset="-120"/>
               </a:rPr>
               <a:t>今日の流れ（90分）</a:t>
             </a:r>
-            <a:endParaRPr lang="en-US" sz="1300" dirty="0"/>
-          </a:p>
-        </p:txBody>
+            <a:endParaRPr lang="ja-JP" sz="1100" dirty="0"/>
+          </a:p>
+        </p:txBody>
+      </p:sp>
+      <p:sp>
+        <p:nvSpPr>
+          <p:cNvPr id="13" name="Shape 9"/>
+          <p:cNvSpPr/>
+          <p:nvPr/>
+        </p:nvSpPr>
+        <p:spPr>
+          <a:xfrm>
+            <a:off x="502920" y="3364992"/>
+            <a:ext cx="8138160" cy="685800"/>
+          </a:xfrm>
+          <a:prstGeom prst="rect">
+            <a:avLst/>
+          </a:prstGeom>
+          <a:solidFill>
+            <a:srgbClr val="FFFFFF"/>
+          </a:solidFill>
+          <a:ln w="25400">
+            <a:solidFill>
+              <a:srgbClr val="1A1A1A"/>
+            </a:solidFill>
+            <a:prstDash val="solid"/>
+          </a:ln>
+          <a:effectLst>
+            <a:outerShdw sx="100000" sy="100000" kx="0" ky="0" algn="bl" rotWithShape="0" blurRad="101600" dist="50800" dir="2700000">
+              <a:srgbClr val="1A1A1A">
+                <a:alpha val="100000"/>
+              </a:srgbClr>
+            </a:outerShdw>
+          </a:effectLst>
+        </p:spPr>
       </p:sp>
       <p:sp>
         <p:nvSpPr>
@@ -2953,8 +2945,8 @@
         </p:nvSpPr>
         <p:spPr>
           <a:xfrm>
-            <a:off x="548640" y="3383280"/>
-            <a:ext cx="894080" cy="685800"/>
+            <a:off x="502920" y="3364992"/>
+            <a:ext cx="904240" cy="685800"/>
           </a:xfrm>
           <a:prstGeom prst="rect">
             <a:avLst/>
@@ -2978,8 +2970,8 @@
         </p:nvSpPr>
         <p:spPr>
           <a:xfrm>
-            <a:off x="548640" y="3383280"/>
-            <a:ext cx="894080" cy="685800"/>
+            <a:off x="502920" y="3364992"/>
+            <a:ext cx="904240" cy="685800"/>
           </a:xfrm>
           <a:prstGeom prst="rect">
             <a:avLst/>
@@ -2995,28 +2987,34 @@
               <a:buNone/>
             </a:pPr>
             <a:r>
-              <a:rPr lang="en-US" sz="1050" b="1" dirty="0">
+              <a:rPr lang="ja-JP" altLang="en-US" sz="1050" b="1" dirty="0">
                 <a:solidFill>
                   <a:srgbClr val="FFD600"/>
                 </a:solidFill>
+                <a:latin typeface="Noto Sans JP" pitchFamily="34" charset="0"/>
+                <a:ea typeface="Noto Sans JP" pitchFamily="34" charset="-122"/>
+                <a:cs typeface="Noto Sans JP" pitchFamily="34" charset="-120"/>
               </a:rPr>
               <a:t>ふりかえり</a:t>
             </a:r>
-            <a:endParaRPr lang="en-US" sz="1050" dirty="0"/>
+            <a:endParaRPr lang="ja-JP" sz="1050" dirty="0"/>
           </a:p>
           <a:p>
             <a:pPr algn="ctr" indent="0" marL="0">
               <a:buNone/>
             </a:pPr>
             <a:r>
-              <a:rPr lang="en-US" sz="900" b="1" dirty="0">
+              <a:rPr lang="ja-JP" altLang="en-US" sz="900" b="1" dirty="0">
                 <a:solidFill>
                   <a:srgbClr val="FFD600"/>
                 </a:solidFill>
+                <a:latin typeface="Noto Sans JP" pitchFamily="34" charset="0"/>
+                <a:ea typeface="Noto Sans JP" pitchFamily="34" charset="-122"/>
+                <a:cs typeface="Noto Sans JP" pitchFamily="34" charset="-120"/>
               </a:rPr>
               <a:t>10分</a:t>
             </a:r>
-            <a:endParaRPr lang="en-US" sz="1050" dirty="0"/>
+            <a:endParaRPr lang="ja-JP" sz="1050" dirty="0"/>
           </a:p>
         </p:txBody>
       </p:sp>
@@ -3028,8 +3026,8 @@
         </p:nvSpPr>
         <p:spPr>
           <a:xfrm>
-            <a:off x="1442720" y="3383280"/>
-            <a:ext cx="894080" cy="685800"/>
+            <a:off x="1407160" y="3364992"/>
+            <a:ext cx="904240" cy="685800"/>
           </a:xfrm>
           <a:prstGeom prst="rect">
             <a:avLst/>
@@ -3053,8 +3051,8 @@
         </p:nvSpPr>
         <p:spPr>
           <a:xfrm>
-            <a:off x="1442720" y="3383280"/>
-            <a:ext cx="894080" cy="685800"/>
+            <a:off x="1407160" y="3364992"/>
+            <a:ext cx="904240" cy="685800"/>
           </a:xfrm>
           <a:prstGeom prst="rect">
             <a:avLst/>
@@ -3070,28 +3068,34 @@
               <a:buNone/>
             </a:pPr>
             <a:r>
-              <a:rPr lang="en-US" sz="1050" b="1" dirty="0">
+              <a:rPr lang="ja-JP" altLang="en-US" sz="1050" b="1" dirty="0">
                 <a:solidFill>
                   <a:srgbClr val="FFD600"/>
                 </a:solidFill>
+                <a:latin typeface="Noto Sans JP" pitchFamily="34" charset="0"/>
+                <a:ea typeface="Noto Sans JP" pitchFamily="34" charset="-122"/>
+                <a:cs typeface="Noto Sans JP" pitchFamily="34" charset="-120"/>
               </a:rPr>
               <a:t>説明①</a:t>
             </a:r>
-            <a:endParaRPr lang="en-US" sz="1050" dirty="0"/>
+            <a:endParaRPr lang="ja-JP" sz="1050" dirty="0"/>
           </a:p>
           <a:p>
             <a:pPr algn="ctr" indent="0" marL="0">
               <a:buNone/>
             </a:pPr>
             <a:r>
-              <a:rPr lang="en-US" sz="900" b="1" dirty="0">
+              <a:rPr lang="ja-JP" altLang="en-US" sz="900" b="1" dirty="0">
                 <a:solidFill>
                   <a:srgbClr val="FFD600"/>
                 </a:solidFill>
+                <a:latin typeface="Noto Sans JP" pitchFamily="34" charset="0"/>
+                <a:ea typeface="Noto Sans JP" pitchFamily="34" charset="-122"/>
+                <a:cs typeface="Noto Sans JP" pitchFamily="34" charset="-120"/>
               </a:rPr>
               <a:t>10分</a:t>
             </a:r>
-            <a:endParaRPr lang="en-US" sz="1050" dirty="0"/>
+            <a:endParaRPr lang="ja-JP" sz="1050" dirty="0"/>
           </a:p>
         </p:txBody>
       </p:sp>
@@ -3103,8 +3107,8 @@
         </p:nvSpPr>
         <p:spPr>
           <a:xfrm>
-            <a:off x="2336800" y="3383280"/>
-            <a:ext cx="1788160" cy="685800"/>
+            <a:off x="2311400" y="3364992"/>
+            <a:ext cx="1808480" cy="685800"/>
           </a:xfrm>
           <a:prstGeom prst="rect">
             <a:avLst/>
@@ -3128,8 +3132,8 @@
         </p:nvSpPr>
         <p:spPr>
           <a:xfrm>
-            <a:off x="2336800" y="3383280"/>
-            <a:ext cx="1788160" cy="685800"/>
+            <a:off x="2311400" y="3364992"/>
+            <a:ext cx="1808480" cy="685800"/>
           </a:xfrm>
           <a:prstGeom prst="rect">
             <a:avLst/>
@@ -3145,28 +3149,34 @@
               <a:buNone/>
             </a:pPr>
             <a:r>
-              <a:rPr lang="en-US" sz="1050" b="1" dirty="0">
+              <a:rPr lang="ja-JP" altLang="en-US" sz="1050" b="1" dirty="0">
                 <a:solidFill>
                   <a:srgbClr val="FFFFFF"/>
                 </a:solidFill>
+                <a:latin typeface="Noto Sans JP" pitchFamily="34" charset="0"/>
+                <a:ea typeface="Noto Sans JP" pitchFamily="34" charset="-122"/>
+                <a:cs typeface="Noto Sans JP" pitchFamily="34" charset="-120"/>
               </a:rPr>
               <a:t>ハンズオン①</a:t>
             </a:r>
-            <a:endParaRPr lang="en-US" sz="1050" dirty="0"/>
+            <a:endParaRPr lang="ja-JP" sz="1050" dirty="0"/>
           </a:p>
           <a:p>
             <a:pPr algn="ctr" indent="0" marL="0">
               <a:buNone/>
             </a:pPr>
             <a:r>
-              <a:rPr lang="en-US" sz="900" b="1" dirty="0">
+              <a:rPr lang="ja-JP" altLang="en-US" sz="900" b="1" dirty="0">
                 <a:solidFill>
                   <a:srgbClr val="FFFFFF"/>
                 </a:solidFill>
+                <a:latin typeface="Noto Sans JP" pitchFamily="34" charset="0"/>
+                <a:ea typeface="Noto Sans JP" pitchFamily="34" charset="-122"/>
+                <a:cs typeface="Noto Sans JP" pitchFamily="34" charset="-120"/>
               </a:rPr>
               <a:t>20分</a:t>
             </a:r>
-            <a:endParaRPr lang="en-US" sz="1050" dirty="0"/>
+            <a:endParaRPr lang="ja-JP" sz="1050" dirty="0"/>
           </a:p>
         </p:txBody>
       </p:sp>
@@ -3178,8 +3188,8 @@
         </p:nvSpPr>
         <p:spPr>
           <a:xfrm>
-            <a:off x="4124960" y="3383280"/>
-            <a:ext cx="894080" cy="685800"/>
+            <a:off x="4119880" y="3364992"/>
+            <a:ext cx="904240" cy="685800"/>
           </a:xfrm>
           <a:prstGeom prst="rect">
             <a:avLst/>
@@ -3203,8 +3213,8 @@
         </p:nvSpPr>
         <p:spPr>
           <a:xfrm>
-            <a:off x="4124960" y="3383280"/>
-            <a:ext cx="894080" cy="685800"/>
+            <a:off x="4119880" y="3364992"/>
+            <a:ext cx="904240" cy="685800"/>
           </a:xfrm>
           <a:prstGeom prst="rect">
             <a:avLst/>
@@ -3220,28 +3230,34 @@
               <a:buNone/>
             </a:pPr>
             <a:r>
-              <a:rPr lang="en-US" sz="1050" b="1" dirty="0">
+              <a:rPr lang="ja-JP" altLang="en-US" sz="1050" b="1" dirty="0">
                 <a:solidFill>
                   <a:srgbClr val="FFD600"/>
                 </a:solidFill>
+                <a:latin typeface="Noto Sans JP" pitchFamily="34" charset="0"/>
+                <a:ea typeface="Noto Sans JP" pitchFamily="34" charset="-122"/>
+                <a:cs typeface="Noto Sans JP" pitchFamily="34" charset="-120"/>
               </a:rPr>
               <a:t>説明②</a:t>
             </a:r>
-            <a:endParaRPr lang="en-US" sz="1050" dirty="0"/>
+            <a:endParaRPr lang="ja-JP" sz="1050" dirty="0"/>
           </a:p>
           <a:p>
             <a:pPr algn="ctr" indent="0" marL="0">
               <a:buNone/>
             </a:pPr>
             <a:r>
-              <a:rPr lang="en-US" sz="900" b="1" dirty="0">
+              <a:rPr lang="ja-JP" altLang="en-US" sz="900" b="1" dirty="0">
                 <a:solidFill>
                   <a:srgbClr val="FFD600"/>
                 </a:solidFill>
+                <a:latin typeface="Noto Sans JP" pitchFamily="34" charset="0"/>
+                <a:ea typeface="Noto Sans JP" pitchFamily="34" charset="-122"/>
+                <a:cs typeface="Noto Sans JP" pitchFamily="34" charset="-120"/>
               </a:rPr>
               <a:t>10分</a:t>
             </a:r>
-            <a:endParaRPr lang="en-US" sz="1050" dirty="0"/>
+            <a:endParaRPr lang="ja-JP" sz="1050" dirty="0"/>
           </a:p>
         </p:txBody>
       </p:sp>
@@ -3253,8 +3269,8 @@
         </p:nvSpPr>
         <p:spPr>
           <a:xfrm>
-            <a:off x="5019040" y="3383280"/>
-            <a:ext cx="1788160" cy="685800"/>
+            <a:off x="5024120" y="3364992"/>
+            <a:ext cx="1808480" cy="685800"/>
           </a:xfrm>
           <a:prstGeom prst="rect">
             <a:avLst/>
@@ -3278,8 +3294,8 @@
         </p:nvSpPr>
         <p:spPr>
           <a:xfrm>
-            <a:off x="5019040" y="3383280"/>
-            <a:ext cx="1788160" cy="685800"/>
+            <a:off x="5024120" y="3364992"/>
+            <a:ext cx="1808480" cy="685800"/>
           </a:xfrm>
           <a:prstGeom prst="rect">
             <a:avLst/>
@@ -3295,28 +3311,34 @@
               <a:buNone/>
             </a:pPr>
             <a:r>
-              <a:rPr lang="en-US" sz="1050" b="1" dirty="0">
+              <a:rPr lang="ja-JP" altLang="en-US" sz="1050" b="1" dirty="0">
                 <a:solidFill>
                   <a:srgbClr val="FFFFFF"/>
                 </a:solidFill>
+                <a:latin typeface="Noto Sans JP" pitchFamily="34" charset="0"/>
+                <a:ea typeface="Noto Sans JP" pitchFamily="34" charset="-122"/>
+                <a:cs typeface="Noto Sans JP" pitchFamily="34" charset="-120"/>
               </a:rPr>
               <a:t>ハンズオン②</a:t>
             </a:r>
-            <a:endParaRPr lang="en-US" sz="1050" dirty="0"/>
+            <a:endParaRPr lang="ja-JP" sz="1050" dirty="0"/>
           </a:p>
           <a:p>
             <a:pPr algn="ctr" indent="0" marL="0">
               <a:buNone/>
             </a:pPr>
             <a:r>
-              <a:rPr lang="en-US" sz="900" b="1" dirty="0">
+              <a:rPr lang="ja-JP" altLang="en-US" sz="900" b="1" dirty="0">
                 <a:solidFill>
                   <a:srgbClr val="FFFFFF"/>
                 </a:solidFill>
+                <a:latin typeface="Noto Sans JP" pitchFamily="34" charset="0"/>
+                <a:ea typeface="Noto Sans JP" pitchFamily="34" charset="-122"/>
+                <a:cs typeface="Noto Sans JP" pitchFamily="34" charset="-120"/>
               </a:rPr>
               <a:t>20分</a:t>
             </a:r>
-            <a:endParaRPr lang="en-US" sz="1050" dirty="0"/>
+            <a:endParaRPr lang="ja-JP" sz="1050" dirty="0"/>
           </a:p>
         </p:txBody>
       </p:sp>
@@ -3328,8 +3350,8 @@
         </p:nvSpPr>
         <p:spPr>
           <a:xfrm>
-            <a:off x="6807200" y="3383280"/>
-            <a:ext cx="1341120" cy="685800"/>
+            <a:off x="6832600" y="3364992"/>
+            <a:ext cx="1356360" cy="685800"/>
           </a:xfrm>
           <a:prstGeom prst="rect">
             <a:avLst/>
@@ -3353,8 +3375,8 @@
         </p:nvSpPr>
         <p:spPr>
           <a:xfrm>
-            <a:off x="6807200" y="3383280"/>
-            <a:ext cx="1341120" cy="685800"/>
+            <a:off x="6832600" y="3364992"/>
+            <a:ext cx="1356360" cy="685800"/>
           </a:xfrm>
           <a:prstGeom prst="rect">
             <a:avLst/>
@@ -3370,28 +3392,34 @@
               <a:buNone/>
             </a:pPr>
             <a:r>
-              <a:rPr lang="en-US" sz="1050" b="1" dirty="0">
+              <a:rPr lang="ja-JP" altLang="en-US" sz="1050" b="1" dirty="0">
                 <a:solidFill>
                   <a:srgbClr val="FFD600"/>
                 </a:solidFill>
+                <a:latin typeface="Noto Sans JP" pitchFamily="34" charset="0"/>
+                <a:ea typeface="Noto Sans JP" pitchFamily="34" charset="-122"/>
+                <a:cs typeface="Noto Sans JP" pitchFamily="34" charset="-120"/>
               </a:rPr>
               <a:t>質問・共有</a:t>
             </a:r>
-            <a:endParaRPr lang="en-US" sz="1050" dirty="0"/>
+            <a:endParaRPr lang="ja-JP" sz="1050" dirty="0"/>
           </a:p>
           <a:p>
             <a:pPr algn="ctr" indent="0" marL="0">
               <a:buNone/>
             </a:pPr>
             <a:r>
-              <a:rPr lang="en-US" sz="900" b="1" dirty="0">
+              <a:rPr lang="ja-JP" altLang="en-US" sz="900" b="1" dirty="0">
                 <a:solidFill>
                   <a:srgbClr val="FFD600"/>
                 </a:solidFill>
+                <a:latin typeface="Noto Sans JP" pitchFamily="34" charset="0"/>
+                <a:ea typeface="Noto Sans JP" pitchFamily="34" charset="-122"/>
+                <a:cs typeface="Noto Sans JP" pitchFamily="34" charset="-120"/>
               </a:rPr>
               <a:t>15分</a:t>
             </a:r>
-            <a:endParaRPr lang="en-US" sz="1050" dirty="0"/>
+            <a:endParaRPr lang="ja-JP" sz="1050" dirty="0"/>
           </a:p>
         </p:txBody>
       </p:sp>
@@ -3403,8 +3431,8 @@
         </p:nvSpPr>
         <p:spPr>
           <a:xfrm>
-            <a:off x="8148320" y="3383280"/>
-            <a:ext cx="447040" cy="685800"/>
+            <a:off x="8188960" y="3364992"/>
+            <a:ext cx="452120" cy="685800"/>
           </a:xfrm>
           <a:prstGeom prst="rect">
             <a:avLst/>
@@ -3428,8 +3456,8 @@
         </p:nvSpPr>
         <p:spPr>
           <a:xfrm>
-            <a:off x="8148320" y="3383280"/>
-            <a:ext cx="447040" cy="685800"/>
+            <a:off x="8188960" y="3364992"/>
+            <a:ext cx="452120" cy="685800"/>
           </a:xfrm>
           <a:prstGeom prst="rect">
             <a:avLst/>
@@ -3445,28 +3473,34 @@
               <a:buNone/>
             </a:pPr>
             <a:r>
-              <a:rPr lang="en-US" sz="850" b="1" dirty="0">
+              <a:rPr lang="ja-JP" altLang="en-US" sz="850" b="1" dirty="0">
                 <a:solidFill>
                   <a:srgbClr val="FFD600"/>
                 </a:solidFill>
+                <a:latin typeface="Noto Sans JP" pitchFamily="34" charset="0"/>
+                <a:ea typeface="Noto Sans JP" pitchFamily="34" charset="-122"/>
+                <a:cs typeface="Noto Sans JP" pitchFamily="34" charset="-120"/>
               </a:rPr>
               <a:t>宿題</a:t>
             </a:r>
-            <a:endParaRPr lang="en-US" sz="850" dirty="0"/>
+            <a:endParaRPr lang="ja-JP" sz="850" dirty="0"/>
           </a:p>
           <a:p>
             <a:pPr algn="ctr" indent="0" marL="0">
               <a:buNone/>
             </a:pPr>
             <a:r>
-              <a:rPr lang="en-US" sz="900" b="1" dirty="0">
+              <a:rPr lang="ja-JP" altLang="en-US" sz="900" b="1" dirty="0">
                 <a:solidFill>
                   <a:srgbClr val="FFD600"/>
                 </a:solidFill>
+                <a:latin typeface="Noto Sans JP" pitchFamily="34" charset="0"/>
+                <a:ea typeface="Noto Sans JP" pitchFamily="34" charset="-122"/>
+                <a:cs typeface="Noto Sans JP" pitchFamily="34" charset="-120"/>
               </a:rPr>
               <a:t>5分</a:t>
             </a:r>
-            <a:endParaRPr lang="en-US" sz="850" dirty="0"/>
+            <a:endParaRPr lang="ja-JP" sz="850" dirty="0"/>
           </a:p>
         </p:txBody>
       </p:sp>
@@ -3478,7 +3512,7 @@
         </p:nvSpPr>
         <p:spPr>
           <a:xfrm>
-            <a:off x="548640" y="4160520"/>
+            <a:off x="502920" y="4187952"/>
             <a:ext cx="3657600" cy="274320"/>
           </a:xfrm>
           <a:prstGeom prst="rect">
@@ -3495,10 +3529,13 @@
               <a:buNone/>
             </a:pPr>
             <a:r>
-              <a:rPr lang="en-US" sz="1000" dirty="0">
+              <a:rPr lang="ja-JP" altLang="en-US" sz="1050" b="1" dirty="0">
                 <a:solidFill>
                   <a:srgbClr val="1A1A1A"/>
                 </a:solidFill>
+                <a:latin typeface="Noto Sans JP" pitchFamily="34" charset="0"/>
+                <a:ea typeface="Noto Sans JP" pitchFamily="34" charset="-122"/>
+                <a:cs typeface="Noto Sans JP" pitchFamily="34" charset="-120"/>
               </a:rPr>
               <a:t>■ </a:t>
             </a:r>
@@ -3506,10 +3543,13 @@
               <a:buNone/>
             </a:pPr>
             <a:r>
-              <a:rPr lang="en-US" sz="1000" dirty="0">
-                <a:solidFill>
-                  <a:schemeClr val="tx2"/>
-                </a:solidFill>
+              <a:rPr lang="ja-JP" altLang="en-US" sz="1050" b="1" dirty="0">
+                <a:solidFill>
+                  <a:srgbClr val="1A1A1A"/>
+                </a:solidFill>
+                <a:latin typeface="Noto Sans JP" pitchFamily="34" charset="0"/>
+                <a:ea typeface="Noto Sans JP" pitchFamily="34" charset="-122"/>
+                <a:cs typeface="Noto Sans JP" pitchFamily="34" charset="-120"/>
               </a:rPr>
               <a:t>聞く　</a:t>
             </a:r>
@@ -3517,10 +3557,13 @@
               <a:buNone/>
             </a:pPr>
             <a:r>
-              <a:rPr lang="en-US" sz="1000" dirty="0">
+              <a:rPr lang="ja-JP" altLang="en-US" sz="1050" b="1" dirty="0">
                 <a:solidFill>
                   <a:srgbClr val="DD6420"/>
                 </a:solidFill>
+                <a:latin typeface="Noto Sans JP" pitchFamily="34" charset="0"/>
+                <a:ea typeface="Noto Sans JP" pitchFamily="34" charset="-122"/>
+                <a:cs typeface="Noto Sans JP" pitchFamily="34" charset="-120"/>
               </a:rPr>
               <a:t>■ </a:t>
             </a:r>
@@ -3528,14 +3571,17 @@
               <a:buNone/>
             </a:pPr>
             <a:r>
-              <a:rPr lang="en-US" sz="1000" dirty="0">
-                <a:solidFill>
-                  <a:schemeClr val="tx2"/>
-                </a:solidFill>
+              <a:rPr lang="ja-JP" altLang="en-US" sz="1050" b="1" dirty="0">
+                <a:solidFill>
+                  <a:srgbClr val="1A1A1A"/>
+                </a:solidFill>
+                <a:latin typeface="Noto Sans JP" pitchFamily="34" charset="0"/>
+                <a:ea typeface="Noto Sans JP" pitchFamily="34" charset="-122"/>
+                <a:cs typeface="Noto Sans JP" pitchFamily="34" charset="-120"/>
               </a:rPr>
               <a:t>手を動かす</a:t>
             </a:r>
-            <a:endParaRPr lang="en-US" sz="1000" dirty="0"/>
+            <a:endParaRPr lang="ja-JP" sz="1050" dirty="0"/>
           </a:p>
         </p:txBody>
       </p:sp>
@@ -3551,8 +3597,8 @@
         </p:nvSpPr>
         <p:spPr>
           <a:xfrm>
-            <a:off x="8229600" y="4773168"/>
-            <a:ext cx="365760" cy="228600"/>
+            <a:off x="8366760" y="4754880"/>
+            <a:ext cx="365760" cy="274320"/>
           </a:xfrm>
           <a:prstGeom prst="rect">
             <a:avLst/>
@@ -3564,20 +3610,23 @@
           </a:extLst>
         </p:spPr>
         <p:txBody>
-          <a:bodyPr/>
+          <a:bodyPr anchor="ctr"/>
           <a:lstStyle>
             <a:lvl1pPr>
-              <a:defRPr sz="900">
-                <a:solidFill>
-                  <a:srgbClr val="5A6872"/>
-                </a:solidFill>
+              <a:defRPr sz="850">
+                <a:solidFill>
+                  <a:srgbClr val="FFFFFF"/>
+                </a:solidFill>
+                <a:latin typeface="Noto Sans JP"/>
+                <a:ea typeface="Noto Sans JP"/>
+                <a:cs typeface="Noto Sans JP"/>
               </a:defRPr>
             </a:lvl1pPr>
           </a:lstStyle>
           <a:p>
             <a:pPr algn="r"/>
             <a:fld id="{F7021451-1387-4CA6-816F-3879F97B5CBC}" type="slidenum">
-              <a:rPr b="0" lang="en-US"/>
+              <a:rPr b="1" lang="en-US"/>
               <a:t>2</a:t>
             </a:fld>
             <a:endParaRPr lang="en-US"/>
@@ -3612,15 +3661,58 @@
       <p:sp>
         <p:nvSpPr>
           <p:cNvPr id="2" name="Text 0"/>
-          <p:cNvSpPr/>
-          <p:nvPr>
-            <p:ph idx="100" type="title" hasCustomPrompt="1"/>
-          </p:nvPr>
-        </p:nvSpPr>
-        <p:spPr>
-          <a:xfrm>
-            <a:off x="548640" y="658368"/>
-            <a:ext cx="8046720" cy="566928"/>
+          <p:cNvSpPr txBox="1"/>
+          <p:nvPr/>
+        </p:nvSpPr>
+        <p:spPr>
+          <a:xfrm rot="-180000">
+            <a:off x="411480" y="201168"/>
+            <a:ext cx="1478128" cy="352044"/>
+          </a:xfrm>
+          <a:prstGeom prst="rect">
+            <a:avLst/>
+          </a:prstGeom>
+          <a:solidFill>
+            <a:srgbClr val="1A1A1A"/>
+          </a:solidFill>
+          <a:ln>
+            <a:solidFill>
+              <a:srgbClr val="1A1A1A"/>
+            </a:solidFill>
+          </a:ln>
+        </p:spPr>
+        <p:txBody>
+          <a:bodyPr wrap="square" lIns="0" tIns="0" rIns="0" bIns="0" rtlCol="0" anchor="ctr"/>
+          <a:lstStyle/>
+          <a:p>
+            <a:pPr algn="ctr" indent="0" marL="0">
+              <a:buNone/>
+            </a:pPr>
+            <a:r>
+              <a:rPr lang="ja-JP" altLang="en-US" sz="1100" dirty="0">
+                <a:solidFill>
+                  <a:srgbClr val="FFFFFF"/>
+                </a:solidFill>
+                <a:latin typeface="Dela Gothic One" pitchFamily="34" charset="0"/>
+                <a:ea typeface="けいふぉんと" pitchFamily="34" charset="-122"/>
+                <a:cs typeface="Dela Gothic One" pitchFamily="34" charset="-120"/>
+              </a:rPr>
+              <a:t>説明① 10分</a:t>
+            </a:r>
+            <a:endParaRPr lang="ja-JP" sz="1100" dirty="0"/>
+          </a:p>
+        </p:txBody>
+      </p:sp>
+      <p:sp>
+        <p:nvSpPr>
+          <p:cNvPr id="3" name="Text 1"/>
+          <p:cNvSpPr txBox="1"/>
+          <p:nvPr/>
+        </p:nvSpPr>
+        <p:spPr>
+          <a:xfrm>
+            <a:off x="411480" y="502920"/>
+            <a:ext cx="8321040" cy="685800"/>
           </a:xfrm>
           <a:prstGeom prst="rect">
             <a:avLst/>
@@ -3629,61 +3721,136 @@
           <a:ln/>
         </p:spPr>
         <p:txBody>
-          <a:bodyPr wrap="square" lIns="0" tIns="0" rIns="0" bIns="0" rtlCol="0" anchor="ctr"/>
-          <a:lstStyle/>
-          <a:p>
-            <a:pPr algn="l" indent="0" marL="0">
-              <a:buNone/>
-            </a:pPr>
-            <a:r>
-              <a:rPr lang="en-US" sz="2400" b="1" dirty="0">
-                <a:solidFill>
-                  <a:schemeClr val="tx1"/>
-                </a:solidFill>
-              </a:rPr>
-              <a:t>AIは「優秀な新人」</a:t>
-            </a:r>
-            <a:endParaRPr lang="en-US" sz="2400" dirty="0"/>
-          </a:p>
-        </p:txBody>
-      </p:sp>
-      <p:sp>
-        <p:nvSpPr>
-          <p:cNvPr id="3" name="chip"/>
+          <a:bodyPr wrap="square" lIns="0" tIns="0" rIns="0" bIns="0" rtlCol="0" anchor="ctr">
+            <a:normAutofit/>
+          </a:bodyPr>
+          <a:lstStyle/>
+          <a:p>
+            <a:pPr indent="0" marL="0">
+              <a:buNone/>
+            </a:pPr>
+            <a:r>
+              <a:rPr lang="ja-JP" altLang="en-US" sz="2600" dirty="0">
+                <a:solidFill>
+                  <a:srgbClr val="1A1A1A"/>
+                </a:solidFill>
+                <a:latin typeface="Dela Gothic One" pitchFamily="34" charset="0"/>
+                <a:ea typeface="けいふぉんと" pitchFamily="34" charset="-122"/>
+                <a:cs typeface="Dela Gothic One" pitchFamily="34" charset="-120"/>
+              </a:rPr>
+              <a:t>AIは</a:t>
+            </a:r>
+            <a:pPr indent="0" marL="0">
+              <a:buNone/>
+            </a:pPr>
+            <a:r>
+              <a:rPr lang="ja-JP" altLang="en-US" sz="2600" dirty="0">
+                <a:solidFill>
+                  <a:srgbClr val="DD6420"/>
+                </a:solidFill>
+                <a:latin typeface="Dela Gothic One" pitchFamily="34" charset="0"/>
+                <a:ea typeface="けいふぉんと" pitchFamily="34" charset="-122"/>
+                <a:cs typeface="Dela Gothic One" pitchFamily="34" charset="-120"/>
+              </a:rPr>
+              <a:t>「優秀な新人」</a:t>
+            </a:r>
+            <a:endParaRPr lang="ja-JP" sz="2600" dirty="0"/>
+          </a:p>
+        </p:txBody>
+      </p:sp>
+      <p:sp>
+        <p:nvSpPr>
+          <p:cNvPr id="5" name="card"/>
           <p:cNvSpPr/>
           <p:nvPr/>
         </p:nvSpPr>
         <p:spPr>
           <a:xfrm>
-            <a:off x="548640" y="292608"/>
-            <a:ext cx="1344168" cy="292608"/>
+            <a:off x="502920" y="1417320"/>
+            <a:ext cx="3611880" cy="2423160"/>
           </a:xfrm>
           <a:prstGeom prst="roundRect">
             <a:avLst>
-              <a:gd name="adj" fmla="val 50000"/>
+              <a:gd name="adj" fmla="val 3774"/>
             </a:avLst>
           </a:prstGeom>
           <a:solidFill>
-            <a:schemeClr val="tx1"/>
-          </a:solidFill>
-          <a:ln w="12700">
+            <a:srgbClr val="FFFFFF"/>
+          </a:solidFill>
+          <a:ln w="25400">
             <a:solidFill>
-              <a:schemeClr val="tx1"/>
+              <a:srgbClr val="1A1A1A"/>
             </a:solidFill>
             <a:prstDash val="solid"/>
           </a:ln>
-        </p:spPr>
-      </p:sp>
-      <p:sp>
-        <p:nvSpPr>
-          <p:cNvPr id="4" name="chip-text"/>
+          <a:effectLst>
+            <a:outerShdw sx="100000" sy="100000" kx="0" ky="0" algn="bl" rotWithShape="0" blurRad="101600" dist="50800" dir="2700000">
+              <a:srgbClr val="1A1A1A">
+                <a:alpha val="100000"/>
+              </a:srgbClr>
+            </a:outerShdw>
+          </a:effectLst>
+        </p:spPr>
+      </p:sp>
+      <p:sp>
+        <p:nvSpPr>
+          <p:cNvPr id="6" name="Text 3"/>
           <p:cNvSpPr txBox="1"/>
           <p:nvPr/>
         </p:nvSpPr>
         <p:spPr>
           <a:xfrm>
-            <a:off x="548640" y="292608"/>
-            <a:ext cx="1344168" cy="292608"/>
+            <a:off x="704088" y="1618488"/>
+            <a:ext cx="1197864" cy="329184"/>
+          </a:xfrm>
+          <a:prstGeom prst="roundRect">
+            <a:avLst>
+              <a:gd name="adj" fmla="val 16667"/>
+            </a:avLst>
+          </a:prstGeom>
+          <a:solidFill>
+            <a:srgbClr val="1A1A1A"/>
+          </a:solidFill>
+          <a:ln>
+            <a:solidFill>
+              <a:srgbClr val="1A1A1A"/>
+            </a:solidFill>
+          </a:ln>
+        </p:spPr>
+        <p:txBody>
+          <a:bodyPr wrap="square" lIns="0" tIns="0" rIns="0" bIns="0" rtlCol="0" anchor="ctr">
+            <a:normAutofit/>
+          </a:bodyPr>
+          <a:lstStyle/>
+          <a:p>
+            <a:pPr algn="ctr" indent="0" marL="0">
+              <a:buNone/>
+            </a:pPr>
+            <a:r>
+              <a:rPr lang="ja-JP" altLang="en-US" sz="1300" b="1" dirty="0">
+                <a:solidFill>
+                  <a:srgbClr val="FFFFFF"/>
+                </a:solidFill>
+                <a:latin typeface="Noto Sans JP" pitchFamily="34" charset="0"/>
+                <a:ea typeface="Noto Sans JP" pitchFamily="34" charset="-122"/>
+                <a:cs typeface="Noto Sans JP" pitchFamily="34" charset="-120"/>
+              </a:rPr>
+              <a:t>得意なこと</a:t>
+            </a:r>
+            <a:endParaRPr lang="ja-JP" sz="1300" dirty="0"/>
+          </a:p>
+        </p:txBody>
+      </p:sp>
+      <p:sp>
+        <p:nvSpPr>
+          <p:cNvPr id="7" name="Text 4"/>
+          <p:cNvSpPr txBox="1"/>
+          <p:nvPr/>
+        </p:nvSpPr>
+        <p:spPr>
+          <a:xfrm>
+            <a:off x="731520" y="2130552"/>
+            <a:ext cx="3154680" cy="1554480"/>
           </a:xfrm>
           <a:prstGeom prst="rect">
             <a:avLst/>
@@ -3692,42 +3859,261 @@
           <a:ln/>
         </p:spPr>
         <p:txBody>
-          <a:bodyPr wrap="square" lIns="0" tIns="0" rIns="0" bIns="0" rtlCol="0" anchor="ctr"/>
-          <a:lstStyle/>
-          <a:p>
-            <a:pPr algn="ctr" indent="0" marL="0">
-              <a:buNone/>
-            </a:pPr>
-            <a:r>
-              <a:rPr lang="en-US" sz="1100" b="1" dirty="0">
-                <a:solidFill>
-                  <a:schemeClr val="accent1"/>
-                </a:solidFill>
-              </a:rPr>
-              <a:t>説明① 10分</a:t>
-            </a:r>
-            <a:endParaRPr lang="en-US" sz="1100" dirty="0"/>
-          </a:p>
-        </p:txBody>
-      </p:sp>
-      <p:sp>
-        <p:nvSpPr>
-          <p:cNvPr id="6" name="card"/>
+          <a:bodyPr wrap="square" lIns="0" tIns="0" rIns="0" bIns="0" rtlCol="0" anchor="t">
+            <a:normAutofit/>
+          </a:bodyPr>
+          <a:lstStyle/>
+          <a:p>
+            <a:pPr marL="342900" indent="-342900">
+              <a:spcAft>
+                <a:spcPts val="800"/>
+              </a:spcAft>
+              <a:buSzPct val="100000"/>
+              <a:buChar char="●"/>
+            </a:pPr>
+            <a:r>
+              <a:rPr lang="ja-JP" altLang="en-US" sz="1350" b="1" dirty="0">
+                <a:solidFill>
+                  <a:srgbClr val="1A1A1A"/>
+                </a:solidFill>
+                <a:latin typeface="Noto Sans JP" pitchFamily="34" charset="0"/>
+                <a:ea typeface="Noto Sans JP" pitchFamily="34" charset="-122"/>
+                <a:cs typeface="Noto Sans JP" pitchFamily="34" charset="-120"/>
+              </a:rPr>
+              <a:t>文章の下書き・整理・要約</a:t>
+            </a:r>
+            <a:endParaRPr lang="ja-JP" sz="1350" dirty="0"/>
+          </a:p>
+          <a:p>
+            <a:pPr marL="342900" indent="-342900">
+              <a:spcAft>
+                <a:spcPts val="800"/>
+              </a:spcAft>
+              <a:buSzPct val="100000"/>
+              <a:buChar char="●"/>
+            </a:pPr>
+            <a:r>
+              <a:rPr lang="ja-JP" altLang="en-US" sz="1350" b="1" dirty="0">
+                <a:solidFill>
+                  <a:srgbClr val="1A1A1A"/>
+                </a:solidFill>
+                <a:latin typeface="Noto Sans JP" pitchFamily="34" charset="0"/>
+                <a:ea typeface="Noto Sans JP" pitchFamily="34" charset="-122"/>
+                <a:cs typeface="Noto Sans JP" pitchFamily="34" charset="-120"/>
+              </a:rPr>
+              <a:t>案出し・言い換え</a:t>
+            </a:r>
+            <a:endParaRPr lang="ja-JP" sz="1350" dirty="0"/>
+          </a:p>
+          <a:p>
+            <a:pPr marL="342900" indent="-342900">
+              <a:spcAft>
+                <a:spcPts val="800"/>
+              </a:spcAft>
+              <a:buSzPct val="100000"/>
+              <a:buChar char="●"/>
+            </a:pPr>
+            <a:r>
+              <a:rPr lang="ja-JP" altLang="en-US" sz="1350" b="1" dirty="0">
+                <a:solidFill>
+                  <a:srgbClr val="1A1A1A"/>
+                </a:solidFill>
+                <a:latin typeface="Noto Sans JP" pitchFamily="34" charset="0"/>
+                <a:ea typeface="Noto Sans JP" pitchFamily="34" charset="-122"/>
+                <a:cs typeface="Noto Sans JP" pitchFamily="34" charset="-120"/>
+              </a:rPr>
+              <a:t>コードを書くこと</a:t>
+            </a:r>
+            <a:endParaRPr lang="ja-JP" sz="1350" dirty="0"/>
+          </a:p>
+        </p:txBody>
+      </p:sp>
+      <p:sp>
+        <p:nvSpPr>
+          <p:cNvPr id="8" name="card"/>
           <p:cNvSpPr/>
           <p:nvPr/>
         </p:nvSpPr>
         <p:spPr>
           <a:xfrm>
-            <a:off x="548640" y="1463040"/>
-            <a:ext cx="3611880" cy="2468880"/>
+            <a:off x="5029200" y="1417320"/>
+            <a:ext cx="3611880" cy="2423160"/>
           </a:xfrm>
           <a:prstGeom prst="roundRect">
             <a:avLst>
-              <a:gd name="adj" fmla="val 4444"/>
+              <a:gd name="adj" fmla="val 3774"/>
             </a:avLst>
           </a:prstGeom>
           <a:solidFill>
-            <a:srgbClr val="F4F4F4"/>
+            <a:srgbClr val="FFFFFF"/>
+          </a:solidFill>
+          <a:ln w="25400">
+            <a:solidFill>
+              <a:srgbClr val="1A1A1A"/>
+            </a:solidFill>
+            <a:prstDash val="solid"/>
+          </a:ln>
+          <a:effectLst>
+            <a:outerShdw sx="100000" sy="100000" kx="0" ky="0" algn="bl" rotWithShape="0" blurRad="101600" dist="50800" dir="2700000">
+              <a:srgbClr val="1A1A1A">
+                <a:alpha val="100000"/>
+              </a:srgbClr>
+            </a:outerShdw>
+          </a:effectLst>
+        </p:spPr>
+      </p:sp>
+      <p:sp>
+        <p:nvSpPr>
+          <p:cNvPr id="9" name="Text 6"/>
+          <p:cNvSpPr txBox="1"/>
+          <p:nvPr/>
+        </p:nvSpPr>
+        <p:spPr>
+          <a:xfrm>
+            <a:off x="5230368" y="1618488"/>
+            <a:ext cx="1197864" cy="329184"/>
+          </a:xfrm>
+          <a:prstGeom prst="roundRect">
+            <a:avLst>
+              <a:gd name="adj" fmla="val 16667"/>
+            </a:avLst>
+          </a:prstGeom>
+          <a:solidFill>
+            <a:srgbClr val="DD6420"/>
+          </a:solidFill>
+          <a:ln>
+            <a:solidFill>
+              <a:srgbClr val="DD6420"/>
+            </a:solidFill>
+          </a:ln>
+        </p:spPr>
+        <p:txBody>
+          <a:bodyPr wrap="square" lIns="0" tIns="0" rIns="0" bIns="0" rtlCol="0" anchor="ctr">
+            <a:normAutofit/>
+          </a:bodyPr>
+          <a:lstStyle/>
+          <a:p>
+            <a:pPr algn="ctr" indent="0" marL="0">
+              <a:buNone/>
+            </a:pPr>
+            <a:r>
+              <a:rPr lang="ja-JP" altLang="en-US" sz="1300" b="1" dirty="0">
+                <a:solidFill>
+                  <a:srgbClr val="FFFFFF"/>
+                </a:solidFill>
+                <a:latin typeface="Noto Sans JP" pitchFamily="34" charset="0"/>
+                <a:ea typeface="Noto Sans JP" pitchFamily="34" charset="-122"/>
+                <a:cs typeface="Noto Sans JP" pitchFamily="34" charset="-120"/>
+              </a:rPr>
+              <a:t>苦手なこと</a:t>
+            </a:r>
+            <a:endParaRPr lang="ja-JP" sz="1300" dirty="0"/>
+          </a:p>
+        </p:txBody>
+      </p:sp>
+      <p:sp>
+        <p:nvSpPr>
+          <p:cNvPr id="10" name="Text 7"/>
+          <p:cNvSpPr txBox="1"/>
+          <p:nvPr/>
+        </p:nvSpPr>
+        <p:spPr>
+          <a:xfrm>
+            <a:off x="5257800" y="2130552"/>
+            <a:ext cx="3154680" cy="1554480"/>
+          </a:xfrm>
+          <a:prstGeom prst="rect">
+            <a:avLst/>
+          </a:prstGeom>
+          <a:noFill/>
+          <a:ln/>
+        </p:spPr>
+        <p:txBody>
+          <a:bodyPr wrap="square" lIns="0" tIns="0" rIns="0" bIns="0" rtlCol="0" anchor="t">
+            <a:normAutofit/>
+          </a:bodyPr>
+          <a:lstStyle/>
+          <a:p>
+            <a:pPr marL="342900" indent="-342900">
+              <a:spcAft>
+                <a:spcPts val="800"/>
+              </a:spcAft>
+              <a:buSzPct val="100000"/>
+              <a:buChar char="●"/>
+            </a:pPr>
+            <a:r>
+              <a:rPr lang="ja-JP" altLang="en-US" sz="1350" b="1" dirty="0">
+                <a:solidFill>
+                  <a:srgbClr val="1A1A1A"/>
+                </a:solidFill>
+                <a:latin typeface="Noto Sans JP" pitchFamily="34" charset="0"/>
+                <a:ea typeface="Noto Sans JP" pitchFamily="34" charset="-122"/>
+                <a:cs typeface="Noto Sans JP" pitchFamily="34" charset="-120"/>
+              </a:rPr>
+              <a:t>自社の事情（教えないと知らない）</a:t>
+            </a:r>
+            <a:endParaRPr lang="ja-JP" sz="1350" dirty="0"/>
+          </a:p>
+          <a:p>
+            <a:pPr marL="342900" indent="-342900">
+              <a:spcAft>
+                <a:spcPts val="800"/>
+              </a:spcAft>
+              <a:buSzPct val="100000"/>
+              <a:buChar char="●"/>
+            </a:pPr>
+            <a:r>
+              <a:rPr lang="ja-JP" altLang="en-US" sz="1350" b="1" dirty="0">
+                <a:solidFill>
+                  <a:srgbClr val="1A1A1A"/>
+                </a:solidFill>
+                <a:latin typeface="Noto Sans JP" pitchFamily="34" charset="0"/>
+                <a:ea typeface="Noto Sans JP" pitchFamily="34" charset="-122"/>
+                <a:cs typeface="Noto Sans JP" pitchFamily="34" charset="-120"/>
+              </a:rPr>
+              <a:t>最新の情報</a:t>
+            </a:r>
+            <a:endParaRPr lang="ja-JP" sz="1350" dirty="0"/>
+          </a:p>
+          <a:p>
+            <a:pPr marL="342900" indent="-342900">
+              <a:spcAft>
+                <a:spcPts val="800"/>
+              </a:spcAft>
+              <a:buSzPct val="100000"/>
+              <a:buChar char="●"/>
+            </a:pPr>
+            <a:r>
+              <a:rPr lang="ja-JP" altLang="en-US" sz="1350" b="1" dirty="0">
+                <a:solidFill>
+                  <a:srgbClr val="1A1A1A"/>
+                </a:solidFill>
+                <a:latin typeface="Noto Sans JP" pitchFamily="34" charset="0"/>
+                <a:ea typeface="Noto Sans JP" pitchFamily="34" charset="-122"/>
+                <a:cs typeface="Noto Sans JP" pitchFamily="34" charset="-120"/>
+              </a:rPr>
+              <a:t>正確な数字（もっともらしく間違える）</a:t>
+            </a:r>
+            <a:endParaRPr lang="ja-JP" sz="1350" dirty="0"/>
+          </a:p>
+        </p:txBody>
+      </p:sp>
+      <p:sp>
+        <p:nvSpPr>
+          <p:cNvPr id="11" name="icon-circle"/>
+          <p:cNvSpPr/>
+          <p:nvPr/>
+        </p:nvSpPr>
+        <p:spPr>
+          <a:xfrm>
+            <a:off x="4325112" y="2382012"/>
+            <a:ext cx="493776" cy="493776"/>
+          </a:xfrm>
+          <a:prstGeom prst="ellipse">
+            <a:avLst/>
+          </a:prstGeom>
+          <a:solidFill>
+            <a:srgbClr val="DD6420"/>
           </a:solidFill>
           <a:ln w="19050">
             <a:solidFill>
@@ -3735,301 +4121,11 @@
             </a:solidFill>
             <a:prstDash val="solid"/>
           </a:ln>
-          <a:effectLst>
-            <a:outerShdw sx="100000" sy="100000" kx="0" ky="0" algn="bl" rotWithShape="0" blurRad="101600" dist="38100" dir="2700000">
-              <a:srgbClr val="000000">
-                <a:alpha val="18000"/>
-              </a:srgbClr>
-            </a:outerShdw>
-          </a:effectLst>
-        </p:spPr>
-      </p:sp>
-      <p:sp>
-        <p:nvSpPr>
-          <p:cNvPr id="7" name="Text 4"/>
-          <p:cNvSpPr txBox="1"/>
-          <p:nvPr/>
-        </p:nvSpPr>
-        <p:spPr>
-          <a:xfrm>
-            <a:off x="777240" y="1645920"/>
-            <a:ext cx="3154680" cy="411480"/>
-          </a:xfrm>
-          <a:prstGeom prst="rect">
-            <a:avLst/>
-          </a:prstGeom>
-          <a:noFill/>
-          <a:ln/>
-        </p:spPr>
-        <p:txBody>
-          <a:bodyPr wrap="square" lIns="0" tIns="0" rIns="0" bIns="0" rtlCol="0" anchor="ctr"/>
-          <a:lstStyle/>
-          <a:p>
-            <a:pPr indent="0" marL="0">
-              <a:buNone/>
-            </a:pPr>
-            <a:r>
-              <a:rPr lang="en-US" sz="1600" b="1" dirty="0">
-                <a:solidFill>
-                  <a:schemeClr val="tx1"/>
-                </a:solidFill>
-              </a:rPr>
-              <a:t>得意なこと</a:t>
-            </a:r>
-            <a:endParaRPr lang="en-US" sz="1600" dirty="0"/>
-          </a:p>
-        </p:txBody>
-      </p:sp>
-      <p:sp>
-        <p:nvSpPr>
-          <p:cNvPr id="8" name="Text 5"/>
-          <p:cNvSpPr txBox="1"/>
-          <p:nvPr/>
-        </p:nvSpPr>
-        <p:spPr>
-          <a:xfrm>
-            <a:off x="777240" y="2194560"/>
-            <a:ext cx="3154680" cy="1554480"/>
-          </a:xfrm>
-          <a:prstGeom prst="rect">
-            <a:avLst/>
-          </a:prstGeom>
-          <a:noFill/>
-          <a:ln/>
-        </p:spPr>
-        <p:txBody>
-          <a:bodyPr wrap="square" lIns="0" tIns="0" rIns="0" bIns="0" rtlCol="0" anchor="t"/>
-          <a:lstStyle/>
-          <a:p>
-            <a:pPr marL="342900" indent="-342900">
-              <a:spcAft>
-                <a:spcPts val="800"/>
-              </a:spcAft>
-              <a:buSzPct val="100000"/>
-              <a:buChar char="•"/>
-            </a:pPr>
-            <a:r>
-              <a:rPr lang="en-US" sz="1300" dirty="0">
-                <a:solidFill>
-                  <a:schemeClr val="tx1"/>
-                </a:solidFill>
-              </a:rPr>
-              <a:t>文章の下書き・整理・要約</a:t>
-            </a:r>
-            <a:endParaRPr lang="en-US" sz="1300" dirty="0"/>
-          </a:p>
-          <a:p>
-            <a:pPr marL="342900" indent="-342900">
-              <a:spcAft>
-                <a:spcPts val="800"/>
-              </a:spcAft>
-              <a:buSzPct val="100000"/>
-              <a:buChar char="•"/>
-            </a:pPr>
-            <a:r>
-              <a:rPr lang="en-US" sz="1300" dirty="0">
-                <a:solidFill>
-                  <a:schemeClr val="tx1"/>
-                </a:solidFill>
-              </a:rPr>
-              <a:t>案出し・言い換え</a:t>
-            </a:r>
-            <a:endParaRPr lang="en-US" sz="1300" dirty="0"/>
-          </a:p>
-          <a:p>
-            <a:pPr marL="342900" indent="-342900">
-              <a:spcAft>
-                <a:spcPts val="800"/>
-              </a:spcAft>
-              <a:buSzPct val="100000"/>
-              <a:buChar char="•"/>
-            </a:pPr>
-            <a:r>
-              <a:rPr lang="en-US" sz="1300" dirty="0">
-                <a:solidFill>
-                  <a:schemeClr val="tx1"/>
-                </a:solidFill>
-              </a:rPr>
-              <a:t>コードを書くこと</a:t>
-            </a:r>
-            <a:endParaRPr lang="en-US" sz="1300" dirty="0"/>
-          </a:p>
-        </p:txBody>
-      </p:sp>
-      <p:sp>
-        <p:nvSpPr>
-          <p:cNvPr id="9" name="card"/>
-          <p:cNvSpPr/>
-          <p:nvPr/>
-        </p:nvSpPr>
-        <p:spPr>
-          <a:xfrm>
-            <a:off x="4983480" y="1463040"/>
-            <a:ext cx="3611880" cy="2468880"/>
-          </a:xfrm>
-          <a:prstGeom prst="roundRect">
-            <a:avLst>
-              <a:gd name="adj" fmla="val 4444"/>
-            </a:avLst>
-          </a:prstGeom>
-          <a:solidFill>
-            <a:schemeClr val="bg2"/>
-          </a:solidFill>
-          <a:ln w="19050">
-            <a:solidFill>
-              <a:srgbClr val="DD6420"/>
-            </a:solidFill>
-            <a:prstDash val="solid"/>
-          </a:ln>
-          <a:effectLst>
-            <a:outerShdw sx="100000" sy="100000" kx="0" ky="0" algn="bl" rotWithShape="0" blurRad="101600" dist="38100" dir="2700000">
-              <a:srgbClr val="000000">
-                <a:alpha val="18000"/>
-              </a:srgbClr>
-            </a:outerShdw>
-          </a:effectLst>
-        </p:spPr>
-      </p:sp>
-      <p:sp>
-        <p:nvSpPr>
-          <p:cNvPr id="10" name="Text 7"/>
-          <p:cNvSpPr txBox="1"/>
-          <p:nvPr/>
-        </p:nvSpPr>
-        <p:spPr>
-          <a:xfrm>
-            <a:off x="5212080" y="1645920"/>
-            <a:ext cx="3154680" cy="411480"/>
-          </a:xfrm>
-          <a:prstGeom prst="rect">
-            <a:avLst/>
-          </a:prstGeom>
-          <a:noFill/>
-          <a:ln/>
-        </p:spPr>
-        <p:txBody>
-          <a:bodyPr wrap="square" lIns="0" tIns="0" rIns="0" bIns="0" rtlCol="0" anchor="ctr"/>
-          <a:lstStyle/>
-          <a:p>
-            <a:pPr indent="0" marL="0">
-              <a:buNone/>
-            </a:pPr>
-            <a:r>
-              <a:rPr lang="en-US" sz="1600" b="1" dirty="0">
-                <a:solidFill>
-                  <a:schemeClr val="accent2"/>
-                </a:solidFill>
-              </a:rPr>
-              <a:t>苦手なこと</a:t>
-            </a:r>
-            <a:endParaRPr lang="en-US" sz="1600" dirty="0"/>
-          </a:p>
-        </p:txBody>
-      </p:sp>
-      <p:sp>
-        <p:nvSpPr>
-          <p:cNvPr id="11" name="Text 8"/>
-          <p:cNvSpPr txBox="1"/>
-          <p:nvPr/>
-        </p:nvSpPr>
-        <p:spPr>
-          <a:xfrm>
-            <a:off x="5212080" y="2194560"/>
-            <a:ext cx="3154680" cy="1554480"/>
-          </a:xfrm>
-          <a:prstGeom prst="rect">
-            <a:avLst/>
-          </a:prstGeom>
-          <a:noFill/>
-          <a:ln/>
-        </p:spPr>
-        <p:txBody>
-          <a:bodyPr wrap="square" lIns="0" tIns="0" rIns="0" bIns="0" rtlCol="0" anchor="t"/>
-          <a:lstStyle/>
-          <a:p>
-            <a:pPr marL="342900" indent="-342900">
-              <a:spcAft>
-                <a:spcPts val="800"/>
-              </a:spcAft>
-              <a:buSzPct val="100000"/>
-              <a:buChar char="•"/>
-            </a:pPr>
-            <a:r>
-              <a:rPr lang="en-US" sz="1300" dirty="0">
-                <a:solidFill>
-                  <a:schemeClr val="tx1"/>
-                </a:solidFill>
-              </a:rPr>
-              <a:t>自社の事情（教えないと知らない）</a:t>
-            </a:r>
-            <a:endParaRPr lang="en-US" sz="1300" dirty="0"/>
-          </a:p>
-          <a:p>
-            <a:pPr marL="342900" indent="-342900">
-              <a:spcAft>
-                <a:spcPts val="800"/>
-              </a:spcAft>
-              <a:buSzPct val="100000"/>
-              <a:buChar char="•"/>
-            </a:pPr>
-            <a:r>
-              <a:rPr lang="en-US" sz="1300" dirty="0">
-                <a:solidFill>
-                  <a:schemeClr val="tx1"/>
-                </a:solidFill>
-              </a:rPr>
-              <a:t>最新の情報</a:t>
-            </a:r>
-            <a:endParaRPr lang="en-US" sz="1300" dirty="0"/>
-          </a:p>
-          <a:p>
-            <a:pPr marL="342900" indent="-342900">
-              <a:spcAft>
-                <a:spcPts val="800"/>
-              </a:spcAft>
-              <a:buSzPct val="100000"/>
-              <a:buChar char="•"/>
-            </a:pPr>
-            <a:r>
-              <a:rPr lang="en-US" sz="1300" dirty="0">
-                <a:solidFill>
-                  <a:schemeClr val="tx1"/>
-                </a:solidFill>
-              </a:rPr>
-              <a:t>正確な数字（もっともらしく間違える）</a:t>
-            </a:r>
-            <a:endParaRPr lang="en-US" sz="1300" dirty="0"/>
-          </a:p>
-        </p:txBody>
-      </p:sp>
-      <p:sp>
-        <p:nvSpPr>
-          <p:cNvPr id="12" name="icon-circle"/>
-          <p:cNvSpPr/>
-          <p:nvPr/>
-        </p:nvSpPr>
-        <p:spPr>
-          <a:xfrm>
-            <a:off x="4325112" y="2450592"/>
-            <a:ext cx="493776" cy="493776"/>
-          </a:xfrm>
-          <a:prstGeom prst="ellipse">
-            <a:avLst/>
-          </a:prstGeom>
-          <a:solidFill>
-            <a:schemeClr val="accent2"/>
-          </a:solidFill>
-          <a:ln w="15875">
-            <a:solidFill>
-              <a:srgbClr val="1A1A1A"/>
-            </a:solidFill>
-            <a:prstDash val="solid"/>
-          </a:ln>
         </p:spPr>
       </p:sp>
       <p:pic>
         <p:nvPicPr>
-          <p:cNvPr id="13" name="icon" descr="preencoded.png">    </p:cNvPr>
+          <p:cNvPr id="12" name="icon" descr="preencoded.png">    </p:cNvPr>
           <p:cNvPicPr>
             <a:picLocks noChangeAspect="1"/>
           </p:cNvPicPr>
@@ -4043,8 +4139,8 @@
         </p:blipFill>
         <p:spPr>
           <a:xfrm>
-            <a:off x="4453494" y="2578974"/>
-            <a:ext cx="237012" cy="237012"/>
+            <a:off x="4448556" y="2505456"/>
+            <a:ext cx="246888" cy="246888"/>
           </a:xfrm>
           <a:prstGeom prst="rect">
             <a:avLst/>
@@ -4053,88 +4149,83 @@
       </p:pic>
       <p:sp>
         <p:nvSpPr>
-          <p:cNvPr id="14" name="foot-box"/>
-          <p:cNvSpPr/>
-          <p:nvPr/>
-        </p:nvSpPr>
-        <p:spPr>
-          <a:xfrm>
-            <a:off x="548640" y="4114800"/>
-            <a:ext cx="8046720" cy="502920"/>
-          </a:xfrm>
-          <a:prstGeom prst="roundRect">
-            <a:avLst>
-              <a:gd name="adj" fmla="val 18182"/>
-            </a:avLst>
-          </a:prstGeom>
-          <a:solidFill>
-            <a:schemeClr val="bg2"/>
-          </a:solidFill>
-          <a:ln w="12700">
+          <p:cNvPr id="13" name="Text 9"/>
+          <p:cNvSpPr txBox="1"/>
+          <p:nvPr/>
+        </p:nvSpPr>
+        <p:spPr>
+          <a:xfrm rot="-60000">
+            <a:off x="502920" y="4114800"/>
+            <a:ext cx="8138160" cy="502920"/>
+          </a:xfrm>
+          <a:prstGeom prst="rect">
+            <a:avLst/>
+          </a:prstGeom>
+          <a:solidFill>
+            <a:srgbClr val="DD6420"/>
+          </a:solidFill>
+          <a:ln w="19050">
             <a:solidFill>
-              <a:schemeClr val="bg2"/>
+              <a:srgbClr val="1A1A1A"/>
             </a:solidFill>
-            <a:prstDash val="solid"/>
           </a:ln>
-        </p:spPr>
-      </p:sp>
-      <p:pic>
-        <p:nvPicPr>
-          <p:cNvPr id="15" name="foot-icon" descr="preencoded.png">    </p:cNvPr>
-          <p:cNvPicPr>
-            <a:picLocks noChangeAspect="1"/>
-          </p:cNvPicPr>
-          <p:nvPr/>
-        </p:nvPicPr>
-        <p:blipFill>
-          <a:blip r:embed="rId2"/>
-          <a:stretch>
-            <a:fillRect/>
-          </a:stretch>
-        </p:blipFill>
-        <p:spPr>
-          <a:xfrm>
-            <a:off x="685800" y="4242816"/>
-            <a:ext cx="246888" cy="246888"/>
-          </a:xfrm>
-          <a:prstGeom prst="rect">
-            <a:avLst/>
-          </a:prstGeom>
-        </p:spPr>
-      </p:pic>
-      <p:sp>
-        <p:nvSpPr>
-          <p:cNvPr id="16" name="foot-text"/>
-          <p:cNvSpPr txBox="1"/>
-          <p:nvPr/>
-        </p:nvSpPr>
-        <p:spPr>
-          <a:xfrm>
-            <a:off x="1051560" y="4114800"/>
-            <a:ext cx="7406640" cy="502920"/>
-          </a:xfrm>
-          <a:prstGeom prst="rect">
-            <a:avLst/>
-          </a:prstGeom>
-          <a:noFill/>
-          <a:ln/>
-        </p:spPr>
-        <p:txBody>
-          <a:bodyPr wrap="square" lIns="0" tIns="0" rIns="0" bIns="0" rtlCol="0" anchor="ctr"/>
-          <a:lstStyle/>
-          <a:p>
-            <a:pPr indent="0" marL="0">
-              <a:buNone/>
-            </a:pPr>
-            <a:r>
-              <a:rPr lang="en-US" sz="1150" dirty="0">
-                <a:solidFill>
-                  <a:schemeClr val="tx1"/>
-                </a:solidFill>
-              </a:rPr>
-              <a:t>基本は「材料を渡す」「出てきたものを人が確かめる」</a:t>
-            </a:r>
-            <a:endParaRPr lang="en-US" sz="1150" dirty="0"/>
+          <a:effectLst>
+            <a:outerShdw sx="100000" sy="100000" kx="0" ky="0" algn="bl" rotWithShape="0" blurRad="101600" dist="38100" dir="2700000">
+              <a:srgbClr val="1A1A1A">
+                <a:alpha val="100000"/>
+              </a:srgbClr>
+            </a:outerShdw>
+          </a:effectLst>
+        </p:spPr>
+        <p:txBody>
+          <a:bodyPr wrap="square" lIns="0" tIns="1905" rIns="1905" bIns="0" rtlCol="0" anchor="ctr">
+            <a:normAutofit/>
+          </a:bodyPr>
+          <a:lstStyle/>
+          <a:p>
+            <a:pPr algn="ctr" indent="0" marL="0">
+              <a:buNone/>
+            </a:pPr>
+            <a:r>
+              <a:rPr lang="ja-JP" altLang="en-US" sz="1300" b="1" dirty="0">
+                <a:solidFill>
+                  <a:srgbClr val="FFFFFF"/>
+                </a:solidFill>
+                <a:latin typeface="Noto Sans JP" pitchFamily="34" charset="0"/>
+                <a:ea typeface="Noto Sans JP" pitchFamily="34" charset="-122"/>
+                <a:cs typeface="Noto Sans JP" pitchFamily="34" charset="-120"/>
+              </a:rPr>
+              <a:t>基本は</a:t>
+            </a:r>
+            <a:pPr algn="ctr" indent="0" marL="0">
+              <a:buNone/>
+            </a:pPr>
+            <a:r>
+              <a:rPr lang="ja-JP" altLang="en-US" sz="1300" b="1" dirty="0">
+                <a:solidFill>
+                  <a:srgbClr val="FFD600"/>
+                </a:solidFill>
+                <a:latin typeface="Noto Sans JP" pitchFamily="34" charset="0"/>
+                <a:ea typeface="Noto Sans JP" pitchFamily="34" charset="-122"/>
+                <a:cs typeface="Noto Sans JP" pitchFamily="34" charset="-120"/>
+              </a:rPr>
+              <a:t>「材料を渡す」</a:t>
+            </a:r>
+            <a:pPr algn="ctr" indent="0" marL="0">
+              <a:buNone/>
+            </a:pPr>
+            <a:r>
+              <a:rPr lang="ja-JP" altLang="en-US" sz="1300" b="1" dirty="0">
+                <a:solidFill>
+                  <a:srgbClr val="FFD600"/>
+                </a:solidFill>
+                <a:latin typeface="Noto Sans JP" pitchFamily="34" charset="0"/>
+                <a:ea typeface="Noto Sans JP" pitchFamily="34" charset="-122"/>
+                <a:cs typeface="Noto Sans JP" pitchFamily="34" charset="-120"/>
+              </a:rPr>
+              <a:t>「出てきたものを人が確かめる」</a:t>
+            </a:r>
+            <a:endParaRPr lang="ja-JP" sz="1300" dirty="0"/>
           </a:p>
         </p:txBody>
       </p:sp>
@@ -4150,8 +4241,8 @@
         </p:nvSpPr>
         <p:spPr>
           <a:xfrm>
-            <a:off x="8229600" y="4773168"/>
-            <a:ext cx="365760" cy="228600"/>
+            <a:off x="8366760" y="4754880"/>
+            <a:ext cx="365760" cy="274320"/>
           </a:xfrm>
           <a:prstGeom prst="rect">
             <a:avLst/>
@@ -4163,20 +4254,23 @@
           </a:extLst>
         </p:spPr>
         <p:txBody>
-          <a:bodyPr/>
+          <a:bodyPr anchor="ctr"/>
           <a:lstStyle>
             <a:lvl1pPr>
-              <a:defRPr sz="900">
-                <a:solidFill>
-                  <a:srgbClr val="5A6872"/>
-                </a:solidFill>
+              <a:defRPr sz="850">
+                <a:solidFill>
+                  <a:srgbClr val="FFFFFF"/>
+                </a:solidFill>
+                <a:latin typeface="Noto Sans JP"/>
+                <a:ea typeface="Noto Sans JP"/>
+                <a:cs typeface="Noto Sans JP"/>
               </a:defRPr>
             </a:lvl1pPr>
           </a:lstStyle>
           <a:p>
             <a:pPr algn="r"/>
             <a:fld id="{F7021451-1387-4CA6-816F-3879F97B5CBC}" type="slidenum">
-              <a:rPr b="0" lang="en-US"/>
+              <a:rPr b="1" lang="en-US"/>
               <a:t>3</a:t>
             </a:fld>
             <a:endParaRPr lang="en-US"/>
@@ -4211,15 +4305,58 @@
       <p:sp>
         <p:nvSpPr>
           <p:cNvPr id="2" name="Text 0"/>
-          <p:cNvSpPr/>
-          <p:nvPr>
-            <p:ph idx="100" type="title" hasCustomPrompt="1"/>
-          </p:nvPr>
-        </p:nvSpPr>
-        <p:spPr>
-          <a:xfrm>
-            <a:off x="548640" y="658368"/>
-            <a:ext cx="8046720" cy="566928"/>
+          <p:cNvSpPr txBox="1"/>
+          <p:nvPr/>
+        </p:nvSpPr>
+        <p:spPr>
+          <a:xfrm rot="-180000">
+            <a:off x="411480" y="201168"/>
+            <a:ext cx="1478128" cy="352044"/>
+          </a:xfrm>
+          <a:prstGeom prst="rect">
+            <a:avLst/>
+          </a:prstGeom>
+          <a:solidFill>
+            <a:srgbClr val="1A1A1A"/>
+          </a:solidFill>
+          <a:ln>
+            <a:solidFill>
+              <a:srgbClr val="1A1A1A"/>
+            </a:solidFill>
+          </a:ln>
+        </p:spPr>
+        <p:txBody>
+          <a:bodyPr wrap="square" lIns="0" tIns="0" rIns="0" bIns="0" rtlCol="0" anchor="ctr"/>
+          <a:lstStyle/>
+          <a:p>
+            <a:pPr algn="ctr" indent="0" marL="0">
+              <a:buNone/>
+            </a:pPr>
+            <a:r>
+              <a:rPr lang="ja-JP" altLang="en-US" sz="1100" dirty="0">
+                <a:solidFill>
+                  <a:srgbClr val="FFFFFF"/>
+                </a:solidFill>
+                <a:latin typeface="Dela Gothic One" pitchFamily="34" charset="0"/>
+                <a:ea typeface="けいふぉんと" pitchFamily="34" charset="-122"/>
+                <a:cs typeface="Dela Gothic One" pitchFamily="34" charset="-120"/>
+              </a:rPr>
+              <a:t>説明① 10分</a:t>
+            </a:r>
+            <a:endParaRPr lang="ja-JP" sz="1100" dirty="0"/>
+          </a:p>
+        </p:txBody>
+      </p:sp>
+      <p:sp>
+        <p:nvSpPr>
+          <p:cNvPr id="3" name="Text 1"/>
+          <p:cNvSpPr txBox="1"/>
+          <p:nvPr/>
+        </p:nvSpPr>
+        <p:spPr>
+          <a:xfrm>
+            <a:off x="411480" y="502920"/>
+            <a:ext cx="8321040" cy="685800"/>
           </a:xfrm>
           <a:prstGeom prst="rect">
             <a:avLst/>
@@ -4228,116 +4365,72 @@
           <a:ln/>
         </p:spPr>
         <p:txBody>
-          <a:bodyPr wrap="square" lIns="0" tIns="0" rIns="0" bIns="0" rtlCol="0" anchor="ctr"/>
-          <a:lstStyle/>
-          <a:p>
-            <a:pPr algn="l" indent="0" marL="0">
-              <a:buNone/>
-            </a:pPr>
-            <a:r>
-              <a:rPr lang="en-US" sz="2400" b="1" dirty="0">
-                <a:solidFill>
-                  <a:schemeClr val="tx1"/>
-                </a:solidFill>
-              </a:rPr>
-              <a:t>頼み方の型「や・も・ざ・か」</a:t>
-            </a:r>
-            <a:endParaRPr lang="en-US" sz="2400" dirty="0"/>
-          </a:p>
-        </p:txBody>
-      </p:sp>
-      <p:sp>
-        <p:nvSpPr>
-          <p:cNvPr id="3" name="chip"/>
+          <a:bodyPr wrap="square" lIns="0" tIns="0" rIns="0" bIns="0" rtlCol="0" anchor="ctr">
+            <a:normAutofit/>
+          </a:bodyPr>
+          <a:lstStyle/>
+          <a:p>
+            <a:pPr indent="0" marL="0">
+              <a:buNone/>
+            </a:pPr>
+            <a:r>
+              <a:rPr lang="ja-JP" altLang="en-US" sz="2600" dirty="0">
+                <a:solidFill>
+                  <a:srgbClr val="1A1A1A"/>
+                </a:solidFill>
+                <a:latin typeface="Dela Gothic One" pitchFamily="34" charset="0"/>
+                <a:ea typeface="けいふぉんと" pitchFamily="34" charset="-122"/>
+                <a:cs typeface="Dela Gothic One" pitchFamily="34" charset="-120"/>
+              </a:rPr>
+              <a:t>頼み方の型</a:t>
+            </a:r>
+            <a:pPr indent="0" marL="0">
+              <a:buNone/>
+            </a:pPr>
+            <a:r>
+              <a:rPr lang="ja-JP" altLang="en-US" sz="2600" dirty="0">
+                <a:solidFill>
+                  <a:srgbClr val="DD6420"/>
+                </a:solidFill>
+                <a:latin typeface="Dela Gothic One" pitchFamily="34" charset="0"/>
+                <a:ea typeface="けいふぉんと" pitchFamily="34" charset="-122"/>
+                <a:cs typeface="Dela Gothic One" pitchFamily="34" charset="-120"/>
+              </a:rPr>
+              <a:t>「や・も・ざ・か」</a:t>
+            </a:r>
+            <a:endParaRPr lang="ja-JP" sz="2600" dirty="0"/>
+          </a:p>
+        </p:txBody>
+      </p:sp>
+      <p:sp>
+        <p:nvSpPr>
+          <p:cNvPr id="5" name="card"/>
           <p:cNvSpPr/>
           <p:nvPr/>
         </p:nvSpPr>
         <p:spPr>
           <a:xfrm>
-            <a:off x="548640" y="292608"/>
-            <a:ext cx="1344168" cy="292608"/>
+            <a:off x="502920" y="1417320"/>
+            <a:ext cx="1842516" cy="2331720"/>
           </a:xfrm>
           <a:prstGeom prst="roundRect">
             <a:avLst>
-              <a:gd name="adj" fmla="val 50000"/>
+              <a:gd name="adj" fmla="val 4963"/>
             </a:avLst>
           </a:prstGeom>
           <a:solidFill>
-            <a:schemeClr val="tx1"/>
-          </a:solidFill>
-          <a:ln w="12700">
-            <a:solidFill>
-              <a:schemeClr val="tx1"/>
-            </a:solidFill>
-            <a:prstDash val="solid"/>
-          </a:ln>
-        </p:spPr>
-      </p:sp>
-      <p:sp>
-        <p:nvSpPr>
-          <p:cNvPr id="4" name="chip-text"/>
-          <p:cNvSpPr txBox="1"/>
-          <p:nvPr/>
-        </p:nvSpPr>
-        <p:spPr>
-          <a:xfrm>
-            <a:off x="548640" y="292608"/>
-            <a:ext cx="1344168" cy="292608"/>
-          </a:xfrm>
-          <a:prstGeom prst="rect">
-            <a:avLst/>
-          </a:prstGeom>
-          <a:noFill/>
-          <a:ln/>
-        </p:spPr>
-        <p:txBody>
-          <a:bodyPr wrap="square" lIns="0" tIns="0" rIns="0" bIns="0" rtlCol="0" anchor="ctr"/>
-          <a:lstStyle/>
-          <a:p>
-            <a:pPr algn="ctr" indent="0" marL="0">
-              <a:buNone/>
-            </a:pPr>
-            <a:r>
-              <a:rPr lang="en-US" sz="1100" b="1" dirty="0">
-                <a:solidFill>
-                  <a:schemeClr val="accent1"/>
-                </a:solidFill>
-              </a:rPr>
-              <a:t>説明① 10分</a:t>
-            </a:r>
-            <a:endParaRPr lang="en-US" sz="1100" dirty="0"/>
-          </a:p>
-        </p:txBody>
-      </p:sp>
-      <p:sp>
-        <p:nvSpPr>
-          <p:cNvPr id="6" name="card"/>
-          <p:cNvSpPr/>
-          <p:nvPr/>
-        </p:nvSpPr>
-        <p:spPr>
-          <a:xfrm>
-            <a:off x="548640" y="1463040"/>
-            <a:ext cx="1840230" cy="2286000"/>
-          </a:xfrm>
-          <a:prstGeom prst="roundRect">
-            <a:avLst>
-              <a:gd name="adj" fmla="val 5963"/>
-            </a:avLst>
-          </a:prstGeom>
-          <a:solidFill>
-            <a:schemeClr val="bg1"/>
-          </a:solidFill>
-          <a:ln w="19050">
+            <a:srgbClr val="FFFFFF"/>
+          </a:solidFill>
+          <a:ln w="25400">
             <a:solidFill>
               <a:srgbClr val="1A1A1A"/>
             </a:solidFill>
             <a:prstDash val="solid"/>
           </a:ln>
           <a:effectLst>
-            <a:outerShdw sx="100000" sy="100000" kx="0" ky="0" algn="bl" rotWithShape="0" blurRad="101600" dist="38100" dir="2700000">
-              <a:srgbClr val="000000">
-                <a:alpha val="18000"/>
+            <a:outerShdw sx="100000" sy="100000" kx="0" ky="0" algn="bl" rotWithShape="0" blurRad="101600" dist="50800" dir="2700000">
+              <a:srgbClr val="1A1A1A">
+                <a:alpha val="100000"/>
               </a:srgbClr>
             </a:outerShdw>
           </a:effectLst>
@@ -4345,14 +4438,63 @@
       </p:sp>
       <p:sp>
         <p:nvSpPr>
-          <p:cNvPr id="7" name="card-head"/>
+          <p:cNvPr id="6" name="Text 3"/>
           <p:cNvSpPr txBox="1"/>
           <p:nvPr/>
         </p:nvSpPr>
         <p:spPr>
           <a:xfrm>
-            <a:off x="731520" y="1645920"/>
-            <a:ext cx="1474470" cy="384048"/>
+            <a:off x="685800" y="1600200"/>
+            <a:ext cx="1024128" cy="329184"/>
+          </a:xfrm>
+          <a:prstGeom prst="roundRect">
+            <a:avLst>
+              <a:gd name="adj" fmla="val 16667"/>
+            </a:avLst>
+          </a:prstGeom>
+          <a:solidFill>
+            <a:srgbClr val="DD6420"/>
+          </a:solidFill>
+          <a:ln>
+            <a:solidFill>
+              <a:srgbClr val="DD6420"/>
+            </a:solidFill>
+          </a:ln>
+        </p:spPr>
+        <p:txBody>
+          <a:bodyPr wrap="square" lIns="0" tIns="0" rIns="0" bIns="0" rtlCol="0" anchor="ctr">
+            <a:normAutofit/>
+          </a:bodyPr>
+          <a:lstStyle/>
+          <a:p>
+            <a:pPr algn="ctr" indent="0" marL="0">
+              <a:buNone/>
+            </a:pPr>
+            <a:r>
+              <a:rPr lang="ja-JP" altLang="en-US" sz="1300" b="1" dirty="0">
+                <a:solidFill>
+                  <a:srgbClr val="FFFFFF"/>
+                </a:solidFill>
+                <a:latin typeface="Noto Sans JP" pitchFamily="34" charset="0"/>
+                <a:ea typeface="Noto Sans JP" pitchFamily="34" charset="-122"/>
+                <a:cs typeface="Noto Sans JP" pitchFamily="34" charset="-120"/>
+              </a:rPr>
+              <a:t>や｜役割</a:t>
+            </a:r>
+            <a:endParaRPr lang="ja-JP" sz="1300" dirty="0"/>
+          </a:p>
+        </p:txBody>
+      </p:sp>
+      <p:sp>
+        <p:nvSpPr>
+          <p:cNvPr id="7" name="card-body"/>
+          <p:cNvSpPr txBox="1"/>
+          <p:nvPr/>
+        </p:nvSpPr>
+        <p:spPr>
+          <a:xfrm>
+            <a:off x="704088" y="2075688"/>
+            <a:ext cx="1440180" cy="1536192"/>
           </a:xfrm>
           <a:prstGeom prst="rect">
             <a:avLst/>
@@ -4361,43 +4503,9 @@
           <a:ln/>
         </p:spPr>
         <p:txBody>
-          <a:bodyPr wrap="square" lIns="0" tIns="0" rIns="0" bIns="0" rtlCol="0" anchor="ctr"/>
-          <a:lstStyle/>
-          <a:p>
-            <a:pPr indent="0" marL="0">
-              <a:buNone/>
-            </a:pPr>
-            <a:r>
-              <a:rPr lang="en-US" sz="1700" b="1" dirty="0">
-                <a:solidFill>
-                  <a:schemeClr val="tx1"/>
-                </a:solidFill>
-              </a:rPr>
-              <a:t>や｜役割</a:t>
-            </a:r>
-            <a:endParaRPr lang="en-US" sz="1700" dirty="0"/>
-          </a:p>
-        </p:txBody>
-      </p:sp>
-      <p:sp>
-        <p:nvSpPr>
-          <p:cNvPr id="8" name="card-body"/>
-          <p:cNvSpPr txBox="1"/>
-          <p:nvPr/>
-        </p:nvSpPr>
-        <p:spPr>
-          <a:xfrm>
-            <a:off x="731520" y="2103120"/>
-            <a:ext cx="1474470" cy="1508760"/>
-          </a:xfrm>
-          <a:prstGeom prst="rect">
-            <a:avLst/>
-          </a:prstGeom>
-          <a:noFill/>
-          <a:ln/>
-        </p:spPr>
-        <p:txBody>
-          <a:bodyPr wrap="square" lIns="0" tIns="0" rIns="0" bIns="0" rtlCol="0" anchor="t"/>
+          <a:bodyPr wrap="square" lIns="0" tIns="0" rIns="0" bIns="0" rtlCol="0" anchor="t">
+            <a:normAutofit/>
+          </a:bodyPr>
           <a:lstStyle/>
           <a:p>
             <a:pPr indent="0" marL="0">
@@ -4407,14 +4515,17 @@
               <a:buNone/>
             </a:pPr>
             <a:r>
-              <a:rPr lang="en-US" sz="1300" dirty="0">
-                <a:solidFill>
-                  <a:schemeClr val="tx1"/>
-                </a:solidFill>
+              <a:rPr lang="ja-JP" altLang="en-US" sz="1250" b="1" dirty="0">
+                <a:solidFill>
+                  <a:srgbClr val="1A1A1A"/>
+                </a:solidFill>
+                <a:latin typeface="Noto Sans JP" pitchFamily="34" charset="0"/>
+                <a:ea typeface="Noto Sans JP" pitchFamily="34" charset="-122"/>
+                <a:cs typeface="Noto Sans JP" pitchFamily="34" charset="-120"/>
               </a:rPr>
               <a:t>何者として答えるか</a:t>
             </a:r>
-            <a:endParaRPr lang="en-US" sz="1300" dirty="0"/>
+            <a:endParaRPr lang="ja-JP" sz="1250" dirty="0"/>
           </a:p>
           <a:p>
             <a:pPr indent="0" marL="0">
@@ -4424,46 +4535,49 @@
               <a:buNone/>
             </a:pPr>
             <a:r>
-              <a:rPr lang="en-US" sz="1300" dirty="0">
-                <a:solidFill>
-                  <a:schemeClr val="tx1"/>
-                </a:solidFill>
+              <a:rPr lang="ja-JP" altLang="en-US" sz="1250" b="1" dirty="0">
+                <a:solidFill>
+                  <a:srgbClr val="1A1A1A"/>
+                </a:solidFill>
+                <a:latin typeface="Noto Sans JP" pitchFamily="34" charset="0"/>
+                <a:ea typeface="Noto Sans JP" pitchFamily="34" charset="-122"/>
+                <a:cs typeface="Noto Sans JP" pitchFamily="34" charset="-120"/>
               </a:rPr>
               <a:t>例：飲食店の業務改善コンサルタント</a:t>
             </a:r>
-            <a:endParaRPr lang="en-US" sz="1300" dirty="0"/>
-          </a:p>
-        </p:txBody>
-      </p:sp>
-      <p:sp>
-        <p:nvSpPr>
-          <p:cNvPr id="9" name="card"/>
+            <a:endParaRPr lang="ja-JP" sz="1250" dirty="0"/>
+          </a:p>
+        </p:txBody>
+      </p:sp>
+      <p:sp>
+        <p:nvSpPr>
+          <p:cNvPr id="8" name="card"/>
           <p:cNvSpPr/>
           <p:nvPr/>
         </p:nvSpPr>
         <p:spPr>
           <a:xfrm>
-            <a:off x="2617470" y="1463040"/>
-            <a:ext cx="1840230" cy="2286000"/>
+            <a:off x="2601468" y="1417320"/>
+            <a:ext cx="1842516" cy="2331720"/>
           </a:xfrm>
           <a:prstGeom prst="roundRect">
             <a:avLst>
-              <a:gd name="adj" fmla="val 5963"/>
+              <a:gd name="adj" fmla="val 4963"/>
             </a:avLst>
           </a:prstGeom>
           <a:solidFill>
-            <a:schemeClr val="bg1"/>
-          </a:solidFill>
-          <a:ln w="19050">
+            <a:srgbClr val="FFFFFF"/>
+          </a:solidFill>
+          <a:ln w="25400">
             <a:solidFill>
               <a:srgbClr val="1A1A1A"/>
             </a:solidFill>
             <a:prstDash val="solid"/>
           </a:ln>
           <a:effectLst>
-            <a:outerShdw sx="100000" sy="100000" kx="0" ky="0" algn="bl" rotWithShape="0" blurRad="101600" dist="38100" dir="2700000">
-              <a:srgbClr val="000000">
-                <a:alpha val="18000"/>
+            <a:outerShdw sx="100000" sy="100000" kx="0" ky="0" algn="bl" rotWithShape="0" blurRad="101600" dist="50800" dir="2700000">
+              <a:srgbClr val="1A1A1A">
+                <a:alpha val="100000"/>
               </a:srgbClr>
             </a:outerShdw>
           </a:effectLst>
@@ -4471,14 +4585,63 @@
       </p:sp>
       <p:sp>
         <p:nvSpPr>
-          <p:cNvPr id="10" name="card-head"/>
+          <p:cNvPr id="9" name="Text 6"/>
           <p:cNvSpPr txBox="1"/>
           <p:nvPr/>
         </p:nvSpPr>
         <p:spPr>
           <a:xfrm>
-            <a:off x="2800350" y="1645920"/>
-            <a:ext cx="1474470" cy="384048"/>
+            <a:off x="2784348" y="1600200"/>
+            <a:ext cx="1024128" cy="329184"/>
+          </a:xfrm>
+          <a:prstGeom prst="roundRect">
+            <a:avLst>
+              <a:gd name="adj" fmla="val 16667"/>
+            </a:avLst>
+          </a:prstGeom>
+          <a:solidFill>
+            <a:srgbClr val="DD6420"/>
+          </a:solidFill>
+          <a:ln>
+            <a:solidFill>
+              <a:srgbClr val="DD6420"/>
+            </a:solidFill>
+          </a:ln>
+        </p:spPr>
+        <p:txBody>
+          <a:bodyPr wrap="square" lIns="0" tIns="0" rIns="0" bIns="0" rtlCol="0" anchor="ctr">
+            <a:normAutofit/>
+          </a:bodyPr>
+          <a:lstStyle/>
+          <a:p>
+            <a:pPr algn="ctr" indent="0" marL="0">
+              <a:buNone/>
+            </a:pPr>
+            <a:r>
+              <a:rPr lang="ja-JP" altLang="en-US" sz="1300" b="1" dirty="0">
+                <a:solidFill>
+                  <a:srgbClr val="FFFFFF"/>
+                </a:solidFill>
+                <a:latin typeface="Noto Sans JP" pitchFamily="34" charset="0"/>
+                <a:ea typeface="Noto Sans JP" pitchFamily="34" charset="-122"/>
+                <a:cs typeface="Noto Sans JP" pitchFamily="34" charset="-120"/>
+              </a:rPr>
+              <a:t>も｜目的</a:t>
+            </a:r>
+            <a:endParaRPr lang="ja-JP" sz="1300" dirty="0"/>
+          </a:p>
+        </p:txBody>
+      </p:sp>
+      <p:sp>
+        <p:nvSpPr>
+          <p:cNvPr id="10" name="card-body"/>
+          <p:cNvSpPr txBox="1"/>
+          <p:nvPr/>
+        </p:nvSpPr>
+        <p:spPr>
+          <a:xfrm>
+            <a:off x="2802636" y="2075688"/>
+            <a:ext cx="1440180" cy="1536192"/>
           </a:xfrm>
           <a:prstGeom prst="rect">
             <a:avLst/>
@@ -4487,43 +4650,9 @@
           <a:ln/>
         </p:spPr>
         <p:txBody>
-          <a:bodyPr wrap="square" lIns="0" tIns="0" rIns="0" bIns="0" rtlCol="0" anchor="ctr"/>
-          <a:lstStyle/>
-          <a:p>
-            <a:pPr indent="0" marL="0">
-              <a:buNone/>
-            </a:pPr>
-            <a:r>
-              <a:rPr lang="en-US" sz="1700" b="1" dirty="0">
-                <a:solidFill>
-                  <a:schemeClr val="tx1"/>
-                </a:solidFill>
-              </a:rPr>
-              <a:t>も｜目的</a:t>
-            </a:r>
-            <a:endParaRPr lang="en-US" sz="1700" dirty="0"/>
-          </a:p>
-        </p:txBody>
-      </p:sp>
-      <p:sp>
-        <p:nvSpPr>
-          <p:cNvPr id="11" name="card-body"/>
-          <p:cNvSpPr txBox="1"/>
-          <p:nvPr/>
-        </p:nvSpPr>
-        <p:spPr>
-          <a:xfrm>
-            <a:off x="2800350" y="2103120"/>
-            <a:ext cx="1474470" cy="1508760"/>
-          </a:xfrm>
-          <a:prstGeom prst="rect">
-            <a:avLst/>
-          </a:prstGeom>
-          <a:noFill/>
-          <a:ln/>
-        </p:spPr>
-        <p:txBody>
-          <a:bodyPr wrap="square" lIns="0" tIns="0" rIns="0" bIns="0" rtlCol="0" anchor="t"/>
+          <a:bodyPr wrap="square" lIns="0" tIns="0" rIns="0" bIns="0" rtlCol="0" anchor="t">
+            <a:normAutofit/>
+          </a:bodyPr>
           <a:lstStyle/>
           <a:p>
             <a:pPr indent="0" marL="0">
@@ -4533,14 +4662,17 @@
               <a:buNone/>
             </a:pPr>
             <a:r>
-              <a:rPr lang="en-US" sz="1300" dirty="0">
-                <a:solidFill>
-                  <a:schemeClr val="tx1"/>
-                </a:solidFill>
+              <a:rPr lang="ja-JP" altLang="en-US" sz="1250" b="1" dirty="0">
+                <a:solidFill>
+                  <a:srgbClr val="1A1A1A"/>
+                </a:solidFill>
+                <a:latin typeface="Noto Sans JP" pitchFamily="34" charset="0"/>
+                <a:ea typeface="Noto Sans JP" pitchFamily="34" charset="-122"/>
+                <a:cs typeface="Noto Sans JP" pitchFamily="34" charset="-120"/>
               </a:rPr>
               <a:t>何のため・誰向けか</a:t>
             </a:r>
-            <a:endParaRPr lang="en-US" sz="1300" dirty="0"/>
+            <a:endParaRPr lang="ja-JP" sz="1250" dirty="0"/>
           </a:p>
           <a:p>
             <a:pPr indent="0" marL="0">
@@ -4550,46 +4682,49 @@
               <a:buNone/>
             </a:pPr>
             <a:r>
-              <a:rPr lang="en-US" sz="1300" dirty="0">
-                <a:solidFill>
-                  <a:schemeClr val="tx1"/>
-                </a:solidFill>
+              <a:rPr lang="ja-JP" altLang="en-US" sz="1250" b="1" dirty="0">
+                <a:solidFill>
+                  <a:srgbClr val="1A1A1A"/>
+                </a:solidFill>
+                <a:latin typeface="Noto Sans JP" pitchFamily="34" charset="0"/>
+                <a:ea typeface="Noto Sans JP" pitchFamily="34" charset="-122"/>
+                <a:cs typeface="Noto Sans JP" pitchFamily="34" charset="-120"/>
               </a:rPr>
               <a:t>例：スタッフ3名向けの受付ルール</a:t>
             </a:r>
-            <a:endParaRPr lang="en-US" sz="1300" dirty="0"/>
-          </a:p>
-        </p:txBody>
-      </p:sp>
-      <p:sp>
-        <p:nvSpPr>
-          <p:cNvPr id="12" name="card"/>
+            <a:endParaRPr lang="ja-JP" sz="1250" dirty="0"/>
+          </a:p>
+        </p:txBody>
+      </p:sp>
+      <p:sp>
+        <p:nvSpPr>
+          <p:cNvPr id="11" name="card"/>
           <p:cNvSpPr/>
           <p:nvPr/>
         </p:nvSpPr>
         <p:spPr>
           <a:xfrm>
-            <a:off x="4686300" y="1463040"/>
-            <a:ext cx="1840230" cy="2286000"/>
+            <a:off x="4700016" y="1417320"/>
+            <a:ext cx="1842516" cy="2331720"/>
           </a:xfrm>
           <a:prstGeom prst="roundRect">
             <a:avLst>
-              <a:gd name="adj" fmla="val 5963"/>
+              <a:gd name="adj" fmla="val 4963"/>
             </a:avLst>
           </a:prstGeom>
           <a:solidFill>
-            <a:schemeClr val="bg1"/>
-          </a:solidFill>
-          <a:ln w="19050">
+            <a:srgbClr val="FFFFFF"/>
+          </a:solidFill>
+          <a:ln w="25400">
             <a:solidFill>
               <a:srgbClr val="1A1A1A"/>
             </a:solidFill>
             <a:prstDash val="solid"/>
           </a:ln>
           <a:effectLst>
-            <a:outerShdw sx="100000" sy="100000" kx="0" ky="0" algn="bl" rotWithShape="0" blurRad="101600" dist="38100" dir="2700000">
-              <a:srgbClr val="000000">
-                <a:alpha val="18000"/>
+            <a:outerShdw sx="100000" sy="100000" kx="0" ky="0" algn="bl" rotWithShape="0" blurRad="101600" dist="50800" dir="2700000">
+              <a:srgbClr val="1A1A1A">
+                <a:alpha val="100000"/>
               </a:srgbClr>
             </a:outerShdw>
           </a:effectLst>
@@ -4597,14 +4732,63 @@
       </p:sp>
       <p:sp>
         <p:nvSpPr>
-          <p:cNvPr id="13" name="card-head"/>
+          <p:cNvPr id="12" name="Text 9"/>
           <p:cNvSpPr txBox="1"/>
           <p:nvPr/>
         </p:nvSpPr>
         <p:spPr>
           <a:xfrm>
-            <a:off x="4869180" y="1645920"/>
-            <a:ext cx="1474470" cy="384048"/>
+            <a:off x="4882896" y="1600200"/>
+            <a:ext cx="1024128" cy="329184"/>
+          </a:xfrm>
+          <a:prstGeom prst="roundRect">
+            <a:avLst>
+              <a:gd name="adj" fmla="val 16667"/>
+            </a:avLst>
+          </a:prstGeom>
+          <a:solidFill>
+            <a:srgbClr val="DD6420"/>
+          </a:solidFill>
+          <a:ln>
+            <a:solidFill>
+              <a:srgbClr val="DD6420"/>
+            </a:solidFill>
+          </a:ln>
+        </p:spPr>
+        <p:txBody>
+          <a:bodyPr wrap="square" lIns="0" tIns="0" rIns="0" bIns="0" rtlCol="0" anchor="ctr">
+            <a:normAutofit/>
+          </a:bodyPr>
+          <a:lstStyle/>
+          <a:p>
+            <a:pPr algn="ctr" indent="0" marL="0">
+              <a:buNone/>
+            </a:pPr>
+            <a:r>
+              <a:rPr lang="ja-JP" altLang="en-US" sz="1300" b="1" dirty="0">
+                <a:solidFill>
+                  <a:srgbClr val="FFFFFF"/>
+                </a:solidFill>
+                <a:latin typeface="Noto Sans JP" pitchFamily="34" charset="0"/>
+                <a:ea typeface="Noto Sans JP" pitchFamily="34" charset="-122"/>
+                <a:cs typeface="Noto Sans JP" pitchFamily="34" charset="-120"/>
+              </a:rPr>
+              <a:t>ざ｜材料</a:t>
+            </a:r>
+            <a:endParaRPr lang="ja-JP" sz="1300" dirty="0"/>
+          </a:p>
+        </p:txBody>
+      </p:sp>
+      <p:sp>
+        <p:nvSpPr>
+          <p:cNvPr id="13" name="card-body"/>
+          <p:cNvSpPr txBox="1"/>
+          <p:nvPr/>
+        </p:nvSpPr>
+        <p:spPr>
+          <a:xfrm>
+            <a:off x="4901184" y="2075688"/>
+            <a:ext cx="1440180" cy="1536192"/>
           </a:xfrm>
           <a:prstGeom prst="rect">
             <a:avLst/>
@@ -4613,43 +4797,9 @@
           <a:ln/>
         </p:spPr>
         <p:txBody>
-          <a:bodyPr wrap="square" lIns="0" tIns="0" rIns="0" bIns="0" rtlCol="0" anchor="ctr"/>
-          <a:lstStyle/>
-          <a:p>
-            <a:pPr indent="0" marL="0">
-              <a:buNone/>
-            </a:pPr>
-            <a:r>
-              <a:rPr lang="en-US" sz="1700" b="1" dirty="0">
-                <a:solidFill>
-                  <a:schemeClr val="tx1"/>
-                </a:solidFill>
-              </a:rPr>
-              <a:t>ざ｜材料</a:t>
-            </a:r>
-            <a:endParaRPr lang="en-US" sz="1700" dirty="0"/>
-          </a:p>
-        </p:txBody>
-      </p:sp>
-      <p:sp>
-        <p:nvSpPr>
-          <p:cNvPr id="14" name="card-body"/>
-          <p:cNvSpPr txBox="1"/>
-          <p:nvPr/>
-        </p:nvSpPr>
-        <p:spPr>
-          <a:xfrm>
-            <a:off x="4869180" y="2103120"/>
-            <a:ext cx="1474470" cy="1508760"/>
-          </a:xfrm>
-          <a:prstGeom prst="rect">
-            <a:avLst/>
-          </a:prstGeom>
-          <a:noFill/>
-          <a:ln/>
-        </p:spPr>
-        <p:txBody>
-          <a:bodyPr wrap="square" lIns="0" tIns="0" rIns="0" bIns="0" rtlCol="0" anchor="t"/>
+          <a:bodyPr wrap="square" lIns="0" tIns="0" rIns="0" bIns="0" rtlCol="0" anchor="t">
+            <a:normAutofit/>
+          </a:bodyPr>
           <a:lstStyle/>
           <a:p>
             <a:pPr indent="0" marL="0">
@@ -4659,14 +4809,17 @@
               <a:buNone/>
             </a:pPr>
             <a:r>
-              <a:rPr lang="en-US" sz="1300" dirty="0">
-                <a:solidFill>
-                  <a:schemeClr val="tx1"/>
-                </a:solidFill>
+              <a:rPr lang="ja-JP" altLang="en-US" sz="1250" b="1" dirty="0">
+                <a:solidFill>
+                  <a:srgbClr val="1A1A1A"/>
+                </a:solidFill>
+                <a:latin typeface="Noto Sans JP" pitchFamily="34" charset="0"/>
+                <a:ea typeface="Noto Sans JP" pitchFamily="34" charset="-122"/>
+                <a:cs typeface="Noto Sans JP" pitchFamily="34" charset="-120"/>
               </a:rPr>
               <a:t>判断に必要な情報</a:t>
             </a:r>
-            <a:endParaRPr lang="en-US" sz="1300" dirty="0"/>
+            <a:endParaRPr lang="ja-JP" sz="1250" dirty="0"/>
           </a:p>
           <a:p>
             <a:pPr indent="0" marL="0">
@@ -4676,46 +4829,49 @@
               <a:buNone/>
             </a:pPr>
             <a:r>
-              <a:rPr lang="en-US" sz="1300" dirty="0">
-                <a:solidFill>
-                  <a:schemeClr val="tx1"/>
-                </a:solidFill>
+              <a:rPr lang="ja-JP" altLang="en-US" sz="1250" b="1" dirty="0">
+                <a:solidFill>
+                  <a:srgbClr val="1A1A1A"/>
+                </a:solidFill>
+                <a:latin typeface="Noto Sans JP" pitchFamily="34" charset="0"/>
+                <a:ea typeface="Noto Sans JP" pitchFamily="34" charset="-122"/>
+                <a:cs typeface="Noto Sans JP" pitchFamily="34" charset="-120"/>
               </a:rPr>
               <a:t>例：今のやり方・困りごと</a:t>
             </a:r>
-            <a:endParaRPr lang="en-US" sz="1300" dirty="0"/>
-          </a:p>
-        </p:txBody>
-      </p:sp>
-      <p:sp>
-        <p:nvSpPr>
-          <p:cNvPr id="15" name="card"/>
+            <a:endParaRPr lang="ja-JP" sz="1250" dirty="0"/>
+          </a:p>
+        </p:txBody>
+      </p:sp>
+      <p:sp>
+        <p:nvSpPr>
+          <p:cNvPr id="14" name="card"/>
           <p:cNvSpPr/>
           <p:nvPr/>
         </p:nvSpPr>
         <p:spPr>
           <a:xfrm>
-            <a:off x="6755130" y="1463040"/>
-            <a:ext cx="1840230" cy="2286000"/>
+            <a:off x="6798564" y="1417320"/>
+            <a:ext cx="1842516" cy="2331720"/>
           </a:xfrm>
           <a:prstGeom prst="roundRect">
             <a:avLst>
-              <a:gd name="adj" fmla="val 5963"/>
+              <a:gd name="adj" fmla="val 4963"/>
             </a:avLst>
           </a:prstGeom>
           <a:solidFill>
-            <a:schemeClr val="bg1"/>
-          </a:solidFill>
-          <a:ln w="19050">
+            <a:srgbClr val="FFFFFF"/>
+          </a:solidFill>
+          <a:ln w="25400">
             <a:solidFill>
               <a:srgbClr val="1A1A1A"/>
             </a:solidFill>
             <a:prstDash val="solid"/>
           </a:ln>
           <a:effectLst>
-            <a:outerShdw sx="100000" sy="100000" kx="0" ky="0" algn="bl" rotWithShape="0" blurRad="101600" dist="38100" dir="2700000">
-              <a:srgbClr val="000000">
-                <a:alpha val="18000"/>
+            <a:outerShdw sx="100000" sy="100000" kx="0" ky="0" algn="bl" rotWithShape="0" blurRad="101600" dist="50800" dir="2700000">
+              <a:srgbClr val="1A1A1A">
+                <a:alpha val="100000"/>
               </a:srgbClr>
             </a:outerShdw>
           </a:effectLst>
@@ -4723,14 +4879,63 @@
       </p:sp>
       <p:sp>
         <p:nvSpPr>
-          <p:cNvPr id="16" name="card-head"/>
+          <p:cNvPr id="15" name="Text 12"/>
           <p:cNvSpPr txBox="1"/>
           <p:nvPr/>
         </p:nvSpPr>
         <p:spPr>
           <a:xfrm>
-            <a:off x="6938010" y="1645920"/>
-            <a:ext cx="1474470" cy="384048"/>
+            <a:off x="6981444" y="1600200"/>
+            <a:ext cx="850392" cy="329184"/>
+          </a:xfrm>
+          <a:prstGeom prst="roundRect">
+            <a:avLst>
+              <a:gd name="adj" fmla="val 16667"/>
+            </a:avLst>
+          </a:prstGeom>
+          <a:solidFill>
+            <a:srgbClr val="DD6420"/>
+          </a:solidFill>
+          <a:ln>
+            <a:solidFill>
+              <a:srgbClr val="DD6420"/>
+            </a:solidFill>
+          </a:ln>
+        </p:spPr>
+        <p:txBody>
+          <a:bodyPr wrap="square" lIns="0" tIns="0" rIns="0" bIns="0" rtlCol="0" anchor="ctr">
+            <a:normAutofit/>
+          </a:bodyPr>
+          <a:lstStyle/>
+          <a:p>
+            <a:pPr algn="ctr" indent="0" marL="0">
+              <a:buNone/>
+            </a:pPr>
+            <a:r>
+              <a:rPr lang="ja-JP" altLang="en-US" sz="1300" b="1" dirty="0">
+                <a:solidFill>
+                  <a:srgbClr val="FFFFFF"/>
+                </a:solidFill>
+                <a:latin typeface="Noto Sans JP" pitchFamily="34" charset="0"/>
+                <a:ea typeface="Noto Sans JP" pitchFamily="34" charset="-122"/>
+                <a:cs typeface="Noto Sans JP" pitchFamily="34" charset="-120"/>
+              </a:rPr>
+              <a:t>か｜形</a:t>
+            </a:r>
+            <a:endParaRPr lang="ja-JP" sz="1300" dirty="0"/>
+          </a:p>
+        </p:txBody>
+      </p:sp>
+      <p:sp>
+        <p:nvSpPr>
+          <p:cNvPr id="16" name="card-body"/>
+          <p:cNvSpPr txBox="1"/>
+          <p:nvPr/>
+        </p:nvSpPr>
+        <p:spPr>
+          <a:xfrm>
+            <a:off x="6999732" y="2075688"/>
+            <a:ext cx="1440180" cy="1536192"/>
           </a:xfrm>
           <a:prstGeom prst="rect">
             <a:avLst/>
@@ -4739,43 +4944,9 @@
           <a:ln/>
         </p:spPr>
         <p:txBody>
-          <a:bodyPr wrap="square" lIns="0" tIns="0" rIns="0" bIns="0" rtlCol="0" anchor="ctr"/>
-          <a:lstStyle/>
-          <a:p>
-            <a:pPr indent="0" marL="0">
-              <a:buNone/>
-            </a:pPr>
-            <a:r>
-              <a:rPr lang="en-US" sz="1700" b="1" dirty="0">
-                <a:solidFill>
-                  <a:schemeClr val="tx1"/>
-                </a:solidFill>
-              </a:rPr>
-              <a:t>か｜形</a:t>
-            </a:r>
-            <a:endParaRPr lang="en-US" sz="1700" dirty="0"/>
-          </a:p>
-        </p:txBody>
-      </p:sp>
-      <p:sp>
-        <p:nvSpPr>
-          <p:cNvPr id="17" name="card-body"/>
-          <p:cNvSpPr txBox="1"/>
-          <p:nvPr/>
-        </p:nvSpPr>
-        <p:spPr>
-          <a:xfrm>
-            <a:off x="6938010" y="2103120"/>
-            <a:ext cx="1474470" cy="1508760"/>
-          </a:xfrm>
-          <a:prstGeom prst="rect">
-            <a:avLst/>
-          </a:prstGeom>
-          <a:noFill/>
-          <a:ln/>
-        </p:spPr>
-        <p:txBody>
-          <a:bodyPr wrap="square" lIns="0" tIns="0" rIns="0" bIns="0" rtlCol="0" anchor="t"/>
+          <a:bodyPr wrap="square" lIns="0" tIns="0" rIns="0" bIns="0" rtlCol="0" anchor="t">
+            <a:normAutofit/>
+          </a:bodyPr>
           <a:lstStyle/>
           <a:p>
             <a:pPr indent="0" marL="0">
@@ -4785,14 +4956,17 @@
               <a:buNone/>
             </a:pPr>
             <a:r>
-              <a:rPr lang="en-US" sz="1300" dirty="0">
-                <a:solidFill>
-                  <a:schemeClr val="tx1"/>
-                </a:solidFill>
+              <a:rPr lang="ja-JP" altLang="en-US" sz="1250" b="1" dirty="0">
+                <a:solidFill>
+                  <a:srgbClr val="1A1A1A"/>
+                </a:solidFill>
+                <a:latin typeface="Noto Sans JP" pitchFamily="34" charset="0"/>
+                <a:ea typeface="Noto Sans JP" pitchFamily="34" charset="-122"/>
+                <a:cs typeface="Noto Sans JP" pitchFamily="34" charset="-120"/>
               </a:rPr>
               <a:t>出力の形</a:t>
             </a:r>
-            <a:endParaRPr lang="en-US" sz="1300" dirty="0"/>
+            <a:endParaRPr lang="ja-JP" sz="1250" dirty="0"/>
           </a:p>
           <a:p>
             <a:pPr indent="0" marL="0">
@@ -4802,14 +4976,17 @@
               <a:buNone/>
             </a:pPr>
             <a:r>
-              <a:rPr lang="en-US" sz="1300" dirty="0">
-                <a:solidFill>
-                  <a:schemeClr val="tx1"/>
-                </a:solidFill>
+              <a:rPr lang="ja-JP" altLang="en-US" sz="1250" b="1" dirty="0">
+                <a:solidFill>
+                  <a:srgbClr val="1A1A1A"/>
+                </a:solidFill>
+                <a:latin typeface="Noto Sans JP" pitchFamily="34" charset="0"/>
+                <a:ea typeface="Noto Sans JP" pitchFamily="34" charset="-122"/>
+                <a:cs typeface="Noto Sans JP" pitchFamily="34" charset="-120"/>
               </a:rPr>
               <a:t>例：表で／300字以内で</a:t>
             </a:r>
-            <a:endParaRPr lang="en-US" sz="1300" dirty="0"/>
+            <a:endParaRPr lang="ja-JP" sz="1250" dirty="0"/>
           </a:p>
         </p:txBody>
       </p:sp>
@@ -4825,8 +5002,8 @@
         </p:nvSpPr>
         <p:spPr>
           <a:xfrm>
-            <a:off x="8229600" y="4773168"/>
-            <a:ext cx="365760" cy="228600"/>
+            <a:off x="8366760" y="4754880"/>
+            <a:ext cx="365760" cy="274320"/>
           </a:xfrm>
           <a:prstGeom prst="rect">
             <a:avLst/>
@@ -4838,20 +5015,23 @@
           </a:extLst>
         </p:spPr>
         <p:txBody>
-          <a:bodyPr/>
+          <a:bodyPr anchor="ctr"/>
           <a:lstStyle>
             <a:lvl1pPr>
-              <a:defRPr sz="900">
-                <a:solidFill>
-                  <a:srgbClr val="5A6872"/>
-                </a:solidFill>
+              <a:defRPr sz="850">
+                <a:solidFill>
+                  <a:srgbClr val="FFFFFF"/>
+                </a:solidFill>
+                <a:latin typeface="Noto Sans JP"/>
+                <a:ea typeface="Noto Sans JP"/>
+                <a:cs typeface="Noto Sans JP"/>
               </a:defRPr>
             </a:lvl1pPr>
           </a:lstStyle>
           <a:p>
             <a:pPr algn="r"/>
             <a:fld id="{F7021451-1387-4CA6-816F-3879F97B5CBC}" type="slidenum">
-              <a:rPr b="0" lang="en-US"/>
+              <a:rPr b="1" lang="en-US"/>
               <a:t>4</a:t>
             </a:fld>
             <a:endParaRPr lang="en-US"/>
@@ -4886,15 +5066,58 @@
       <p:sp>
         <p:nvSpPr>
           <p:cNvPr id="2" name="Text 0"/>
-          <p:cNvSpPr/>
-          <p:nvPr>
-            <p:ph idx="100" type="title" hasCustomPrompt="1"/>
-          </p:nvPr>
-        </p:nvSpPr>
-        <p:spPr>
-          <a:xfrm>
-            <a:off x="548640" y="658368"/>
-            <a:ext cx="8046720" cy="566928"/>
+          <p:cNvSpPr txBox="1"/>
+          <p:nvPr/>
+        </p:nvSpPr>
+        <p:spPr>
+          <a:xfrm rot="-180000">
+            <a:off x="411480" y="201168"/>
+            <a:ext cx="1915668" cy="352044"/>
+          </a:xfrm>
+          <a:prstGeom prst="rect">
+            <a:avLst/>
+          </a:prstGeom>
+          <a:solidFill>
+            <a:srgbClr val="DD6420"/>
+          </a:solidFill>
+          <a:ln>
+            <a:solidFill>
+              <a:srgbClr val="DD6420"/>
+            </a:solidFill>
+          </a:ln>
+        </p:spPr>
+        <p:txBody>
+          <a:bodyPr wrap="square" lIns="0" tIns="0" rIns="0" bIns="0" rtlCol="0" anchor="ctr"/>
+          <a:lstStyle/>
+          <a:p>
+            <a:pPr algn="ctr" indent="0" marL="0">
+              <a:buNone/>
+            </a:pPr>
+            <a:r>
+              <a:rPr lang="ja-JP" altLang="en-US" sz="1100" dirty="0">
+                <a:solidFill>
+                  <a:srgbClr val="FFFFFF"/>
+                </a:solidFill>
+                <a:latin typeface="Dela Gothic One" pitchFamily="34" charset="0"/>
+                <a:ea typeface="けいふぉんと" pitchFamily="34" charset="-122"/>
+                <a:cs typeface="Dela Gothic One" pitchFamily="34" charset="-120"/>
+              </a:rPr>
+              <a:t>ハンズオン① 20分</a:t>
+            </a:r>
+            <a:endParaRPr lang="ja-JP" sz="1100" dirty="0"/>
+          </a:p>
+        </p:txBody>
+      </p:sp>
+      <p:sp>
+        <p:nvSpPr>
+          <p:cNvPr id="3" name="Text 1"/>
+          <p:cNvSpPr txBox="1"/>
+          <p:nvPr/>
+        </p:nvSpPr>
+        <p:spPr>
+          <a:xfrm>
+            <a:off x="411480" y="502920"/>
+            <a:ext cx="8321040" cy="685800"/>
           </a:xfrm>
           <a:prstGeom prst="rect">
             <a:avLst/>
@@ -4903,122 +5126,118 @@
           <a:ln/>
         </p:spPr>
         <p:txBody>
-          <a:bodyPr wrap="square" lIns="0" tIns="0" rIns="0" bIns="0" rtlCol="0" anchor="ctr"/>
-          <a:lstStyle/>
-          <a:p>
-            <a:pPr algn="l" indent="0" marL="0">
-              <a:buNone/>
-            </a:pPr>
-            <a:r>
-              <a:rPr lang="en-US" sz="2400" b="1" dirty="0">
-                <a:solidFill>
-                  <a:schemeClr val="tx1"/>
-                </a:solidFill>
+          <a:bodyPr wrap="square" lIns="0" tIns="0" rIns="0" bIns="0" rtlCol="0" anchor="ctr">
+            <a:normAutofit/>
+          </a:bodyPr>
+          <a:lstStyle/>
+          <a:p>
+            <a:pPr indent="0" marL="0">
+              <a:buNone/>
+            </a:pPr>
+            <a:r>
+              <a:rPr lang="ja-JP" altLang="en-US" sz="2600" dirty="0">
+                <a:solidFill>
+                  <a:srgbClr val="1A1A1A"/>
+                </a:solidFill>
+                <a:latin typeface="Dela Gothic One" pitchFamily="34" charset="0"/>
+                <a:ea typeface="けいふぉんと" pitchFamily="34" charset="-122"/>
+                <a:cs typeface="Dela Gothic One" pitchFamily="34" charset="-120"/>
               </a:rPr>
               <a:t>業務文書をAIで作る</a:t>
             </a:r>
-            <a:endParaRPr lang="en-US" sz="2400" dirty="0"/>
-          </a:p>
-        </p:txBody>
-      </p:sp>
-      <p:sp>
-        <p:nvSpPr>
-          <p:cNvPr id="3" name="chip"/>
+            <a:endParaRPr lang="ja-JP" sz="2600" dirty="0"/>
+          </a:p>
+        </p:txBody>
+      </p:sp>
+      <p:sp>
+        <p:nvSpPr>
+          <p:cNvPr id="5" name="card"/>
           <p:cNvSpPr/>
           <p:nvPr/>
         </p:nvSpPr>
         <p:spPr>
           <a:xfrm>
-            <a:off x="548640" y="292608"/>
-            <a:ext cx="1755648" cy="292608"/>
+            <a:off x="502920" y="1417320"/>
+            <a:ext cx="8138160" cy="509778"/>
           </a:xfrm>
           <a:prstGeom prst="roundRect">
             <a:avLst>
-              <a:gd name="adj" fmla="val 50000"/>
+              <a:gd name="adj" fmla="val 17937"/>
             </a:avLst>
           </a:prstGeom>
           <a:solidFill>
-            <a:schemeClr val="accent2"/>
-          </a:solidFill>
-          <a:ln w="12700">
-            <a:solidFill>
-              <a:schemeClr val="accent2"/>
-            </a:solidFill>
-            <a:prstDash val="solid"/>
-          </a:ln>
-        </p:spPr>
-      </p:sp>
-      <p:sp>
-        <p:nvSpPr>
-          <p:cNvPr id="4" name="chip-text"/>
-          <p:cNvSpPr txBox="1"/>
-          <p:nvPr/>
-        </p:nvSpPr>
-        <p:spPr>
-          <a:xfrm>
-            <a:off x="548640" y="292608"/>
-            <a:ext cx="1755648" cy="292608"/>
-          </a:xfrm>
-          <a:prstGeom prst="rect">
-            <a:avLst/>
-          </a:prstGeom>
-          <a:noFill/>
-          <a:ln/>
-        </p:spPr>
-        <p:txBody>
-          <a:bodyPr wrap="square" lIns="0" tIns="0" rIns="0" bIns="0" rtlCol="0" anchor="ctr"/>
-          <a:lstStyle/>
-          <a:p>
-            <a:pPr algn="ctr" indent="0" marL="0">
-              <a:buNone/>
-            </a:pPr>
-            <a:r>
-              <a:rPr lang="en-US" sz="1100" b="1" dirty="0">
-                <a:solidFill>
-                  <a:schemeClr val="bg1"/>
-                </a:solidFill>
-              </a:rPr>
-              <a:t>ハンズオン① 20分</a:t>
-            </a:r>
-            <a:endParaRPr lang="en-US" sz="1100" dirty="0"/>
-          </a:p>
-        </p:txBody>
-      </p:sp>
-      <p:sp>
-        <p:nvSpPr>
-          <p:cNvPr id="6" name="step-num"/>
-          <p:cNvSpPr/>
-          <p:nvPr/>
-        </p:nvSpPr>
-        <p:spPr>
-          <a:xfrm>
-            <a:off x="548640" y="1572768"/>
-            <a:ext cx="384048" cy="384048"/>
-          </a:xfrm>
-          <a:prstGeom prst="ellipse">
-            <a:avLst/>
-          </a:prstGeom>
-          <a:solidFill>
-            <a:schemeClr val="accent1"/>
-          </a:solidFill>
-          <a:ln w="15875">
+            <a:srgbClr val="FFFFFF"/>
+          </a:solidFill>
+          <a:ln w="25400">
             <a:solidFill>
               <a:srgbClr val="1A1A1A"/>
             </a:solidFill>
             <a:prstDash val="solid"/>
           </a:ln>
-        </p:spPr>
-      </p:sp>
-      <p:sp>
-        <p:nvSpPr>
-          <p:cNvPr id="7" name="step-num-text"/>
+          <a:effectLst>
+            <a:outerShdw sx="100000" sy="100000" kx="0" ky="0" algn="bl" rotWithShape="0" blurRad="101600" dist="38100" dir="2700000">
+              <a:srgbClr val="1A1A1A">
+                <a:alpha val="100000"/>
+              </a:srgbClr>
+            </a:outerShdw>
+          </a:effectLst>
+        </p:spPr>
+      </p:sp>
+      <p:sp>
+        <p:nvSpPr>
+          <p:cNvPr id="6" name="Text 3"/>
           <p:cNvSpPr txBox="1"/>
           <p:nvPr/>
         </p:nvSpPr>
         <p:spPr>
           <a:xfrm>
-            <a:off x="548640" y="1572768"/>
-            <a:ext cx="384048" cy="384048"/>
+            <a:off x="640080" y="1472184"/>
+            <a:ext cx="400050" cy="400050"/>
+          </a:xfrm>
+          <a:prstGeom prst="ellipse">
+            <a:avLst/>
+          </a:prstGeom>
+          <a:solidFill>
+            <a:srgbClr val="DD6420"/>
+          </a:solidFill>
+          <a:ln w="19050">
+            <a:solidFill>
+              <a:srgbClr val="1A1A1A"/>
+            </a:solidFill>
+          </a:ln>
+        </p:spPr>
+        <p:txBody>
+          <a:bodyPr wrap="square" lIns="0" tIns="0" rIns="0" bIns="0" rtlCol="0" anchor="ctr"/>
+          <a:lstStyle/>
+          <a:p>
+            <a:pPr algn="ctr" indent="0" marL="0">
+              <a:buNone/>
+            </a:pPr>
+            <a:r>
+              <a:rPr lang="ja-JP" altLang="en-US" sz="1500" dirty="0">
+                <a:solidFill>
+                  <a:srgbClr val="FFFFFF"/>
+                </a:solidFill>
+                <a:latin typeface="Dela Gothic One" pitchFamily="34" charset="0"/>
+                <a:ea typeface="けいふぉんと" pitchFamily="34" charset="-122"/>
+                <a:cs typeface="Dela Gothic One" pitchFamily="34" charset="-120"/>
+              </a:rPr>
+              <a:t>1</a:t>
+            </a:r>
+            <a:endParaRPr lang="ja-JP" sz="1500" dirty="0"/>
+          </a:p>
+        </p:txBody>
+      </p:sp>
+      <p:sp>
+        <p:nvSpPr>
+          <p:cNvPr id="7" name="step-text"/>
+          <p:cNvSpPr txBox="1"/>
+          <p:nvPr/>
+        </p:nvSpPr>
+        <p:spPr>
+          <a:xfrm>
+            <a:off x="1234440" y="1417320"/>
+            <a:ext cx="7269480" cy="509778"/>
           </a:xfrm>
           <a:prstGeom prst="rect">
             <a:avLst/>
@@ -5027,95 +5246,118 @@
           <a:ln/>
         </p:spPr>
         <p:txBody>
-          <a:bodyPr wrap="square" lIns="0" tIns="0" rIns="0" bIns="0" rtlCol="0" anchor="ctr"/>
-          <a:lstStyle/>
-          <a:p>
-            <a:pPr algn="ctr" indent="0" marL="0">
-              <a:buNone/>
-            </a:pPr>
-            <a:r>
-              <a:rPr lang="en-US" sz="1400" b="1" dirty="0">
-                <a:solidFill>
-                  <a:schemeClr val="tx1"/>
-                </a:solidFill>
-              </a:rPr>
-              <a:t>1</a:t>
-            </a:r>
-            <a:endParaRPr lang="en-US" sz="1400" dirty="0"/>
-          </a:p>
-        </p:txBody>
-      </p:sp>
-      <p:sp>
-        <p:nvSpPr>
-          <p:cNvPr id="8" name="step-text"/>
-          <p:cNvSpPr txBox="1"/>
-          <p:nvPr/>
-        </p:nvSpPr>
-        <p:spPr>
-          <a:xfrm>
-            <a:off x="1097280" y="1463040"/>
-            <a:ext cx="7498080" cy="603504"/>
-          </a:xfrm>
-          <a:prstGeom prst="rect">
-            <a:avLst/>
-          </a:prstGeom>
-          <a:noFill/>
-          <a:ln/>
-        </p:spPr>
-        <p:txBody>
-          <a:bodyPr wrap="square" lIns="0" tIns="0" rIns="0" bIns="0" rtlCol="0" anchor="ctr"/>
+          <a:bodyPr wrap="square" lIns="0" tIns="0" rIns="0" bIns="0" rtlCol="0" anchor="ctr">
+            <a:normAutofit/>
+          </a:bodyPr>
           <a:lstStyle/>
           <a:p>
             <a:pPr indent="0" marL="0">
               <a:buNone/>
             </a:pPr>
             <a:r>
-              <a:rPr lang="en-US" sz="1450" dirty="0">
-                <a:solidFill>
-                  <a:schemeClr val="tx1"/>
-                </a:solidFill>
+              <a:rPr lang="ja-JP" altLang="en-US" sz="1400" b="1" dirty="0">
+                <a:solidFill>
+                  <a:srgbClr val="1A1A1A"/>
+                </a:solidFill>
+                <a:latin typeface="Noto Sans JP" pitchFamily="34" charset="0"/>
+                <a:ea typeface="Noto Sans JP" pitchFamily="34" charset="-122"/>
+                <a:cs typeface="Noto Sans JP" pitchFamily="34" charset="-120"/>
               </a:rPr>
               <a:t>型を使わずに「予約受付のルールを作って」と頼む</a:t>
             </a:r>
-            <a:endParaRPr lang="en-US" sz="1450" dirty="0"/>
-          </a:p>
-        </p:txBody>
-      </p:sp>
-      <p:sp>
-        <p:nvSpPr>
-          <p:cNvPr id="9" name="step-num"/>
+            <a:endParaRPr lang="ja-JP" sz="1400" dirty="0"/>
+          </a:p>
+        </p:txBody>
+      </p:sp>
+      <p:sp>
+        <p:nvSpPr>
+          <p:cNvPr id="8" name="card"/>
           <p:cNvSpPr/>
           <p:nvPr/>
         </p:nvSpPr>
         <p:spPr>
           <a:xfrm>
-            <a:off x="548640" y="2176272"/>
-            <a:ext cx="384048" cy="384048"/>
-          </a:xfrm>
-          <a:prstGeom prst="ellipse">
-            <a:avLst/>
-          </a:prstGeom>
-          <a:solidFill>
-            <a:schemeClr val="accent1"/>
-          </a:solidFill>
-          <a:ln w="15875">
+            <a:off x="502920" y="2055114"/>
+            <a:ext cx="8138160" cy="509778"/>
+          </a:xfrm>
+          <a:prstGeom prst="roundRect">
+            <a:avLst>
+              <a:gd name="adj" fmla="val 17937"/>
+            </a:avLst>
+          </a:prstGeom>
+          <a:solidFill>
+            <a:srgbClr val="FFFFFF"/>
+          </a:solidFill>
+          <a:ln w="25400">
             <a:solidFill>
               <a:srgbClr val="1A1A1A"/>
             </a:solidFill>
             <a:prstDash val="solid"/>
           </a:ln>
-        </p:spPr>
-      </p:sp>
-      <p:sp>
-        <p:nvSpPr>
-          <p:cNvPr id="10" name="step-num-text"/>
+          <a:effectLst>
+            <a:outerShdw sx="100000" sy="100000" kx="0" ky="0" algn="bl" rotWithShape="0" blurRad="101600" dist="38100" dir="2700000">
+              <a:srgbClr val="1A1A1A">
+                <a:alpha val="100000"/>
+              </a:srgbClr>
+            </a:outerShdw>
+          </a:effectLst>
+        </p:spPr>
+      </p:sp>
+      <p:sp>
+        <p:nvSpPr>
+          <p:cNvPr id="9" name="Text 6"/>
           <p:cNvSpPr txBox="1"/>
           <p:nvPr/>
         </p:nvSpPr>
         <p:spPr>
           <a:xfrm>
-            <a:off x="548640" y="2176272"/>
-            <a:ext cx="384048" cy="384048"/>
+            <a:off x="640080" y="2109978"/>
+            <a:ext cx="400050" cy="400050"/>
+          </a:xfrm>
+          <a:prstGeom prst="ellipse">
+            <a:avLst/>
+          </a:prstGeom>
+          <a:solidFill>
+            <a:srgbClr val="DD6420"/>
+          </a:solidFill>
+          <a:ln w="19050">
+            <a:solidFill>
+              <a:srgbClr val="1A1A1A"/>
+            </a:solidFill>
+          </a:ln>
+        </p:spPr>
+        <p:txBody>
+          <a:bodyPr wrap="square" lIns="0" tIns="0" rIns="0" bIns="0" rtlCol="0" anchor="ctr"/>
+          <a:lstStyle/>
+          <a:p>
+            <a:pPr algn="ctr" indent="0" marL="0">
+              <a:buNone/>
+            </a:pPr>
+            <a:r>
+              <a:rPr lang="ja-JP" altLang="en-US" sz="1500" dirty="0">
+                <a:solidFill>
+                  <a:srgbClr val="FFFFFF"/>
+                </a:solidFill>
+                <a:latin typeface="Dela Gothic One" pitchFamily="34" charset="0"/>
+                <a:ea typeface="けいふぉんと" pitchFamily="34" charset="-122"/>
+                <a:cs typeface="Dela Gothic One" pitchFamily="34" charset="-120"/>
+              </a:rPr>
+              <a:t>2</a:t>
+            </a:r>
+            <a:endParaRPr lang="ja-JP" sz="1500" dirty="0"/>
+          </a:p>
+        </p:txBody>
+      </p:sp>
+      <p:sp>
+        <p:nvSpPr>
+          <p:cNvPr id="10" name="step-text"/>
+          <p:cNvSpPr txBox="1"/>
+          <p:nvPr/>
+        </p:nvSpPr>
+        <p:spPr>
+          <a:xfrm>
+            <a:off x="1234440" y="2055114"/>
+            <a:ext cx="7269480" cy="509778"/>
           </a:xfrm>
           <a:prstGeom prst="rect">
             <a:avLst/>
@@ -5124,95 +5366,118 @@
           <a:ln/>
         </p:spPr>
         <p:txBody>
-          <a:bodyPr wrap="square" lIns="0" tIns="0" rIns="0" bIns="0" rtlCol="0" anchor="ctr"/>
-          <a:lstStyle/>
-          <a:p>
-            <a:pPr algn="ctr" indent="0" marL="0">
-              <a:buNone/>
-            </a:pPr>
-            <a:r>
-              <a:rPr lang="en-US" sz="1400" b="1" dirty="0">
-                <a:solidFill>
-                  <a:schemeClr val="tx1"/>
-                </a:solidFill>
-              </a:rPr>
-              <a:t>2</a:t>
-            </a:r>
-            <a:endParaRPr lang="en-US" sz="1400" dirty="0"/>
-          </a:p>
-        </p:txBody>
-      </p:sp>
-      <p:sp>
-        <p:nvSpPr>
-          <p:cNvPr id="11" name="step-text"/>
-          <p:cNvSpPr txBox="1"/>
-          <p:nvPr/>
-        </p:nvSpPr>
-        <p:spPr>
-          <a:xfrm>
-            <a:off x="1097280" y="2066544"/>
-            <a:ext cx="7498080" cy="603504"/>
-          </a:xfrm>
-          <a:prstGeom prst="rect">
-            <a:avLst/>
-          </a:prstGeom>
-          <a:noFill/>
-          <a:ln/>
-        </p:spPr>
-        <p:txBody>
-          <a:bodyPr wrap="square" lIns="0" tIns="0" rIns="0" bIns="0" rtlCol="0" anchor="ctr"/>
+          <a:bodyPr wrap="square" lIns="0" tIns="0" rIns="0" bIns="0" rtlCol="0" anchor="ctr">
+            <a:normAutofit/>
+          </a:bodyPr>
           <a:lstStyle/>
           <a:p>
             <a:pPr indent="0" marL="0">
               <a:buNone/>
             </a:pPr>
             <a:r>
-              <a:rPr lang="en-US" sz="1450" dirty="0">
-                <a:solidFill>
-                  <a:schemeClr val="tx1"/>
-                </a:solidFill>
+              <a:rPr lang="ja-JP" altLang="en-US" sz="1400" b="1" dirty="0">
+                <a:solidFill>
+                  <a:srgbClr val="1A1A1A"/>
+                </a:solidFill>
+                <a:latin typeface="Noto Sans JP" pitchFamily="34" charset="0"/>
+                <a:ea typeface="Noto Sans JP" pitchFamily="34" charset="-122"/>
+                <a:cs typeface="Noto Sans JP" pitchFamily="34" charset="-120"/>
               </a:rPr>
               <a:t>型を使って同じことを頼む（プロンプト集 P-01）</a:t>
             </a:r>
-            <a:endParaRPr lang="en-US" sz="1450" dirty="0"/>
-          </a:p>
-        </p:txBody>
-      </p:sp>
-      <p:sp>
-        <p:nvSpPr>
-          <p:cNvPr id="12" name="step-num"/>
+            <a:endParaRPr lang="ja-JP" sz="1400" dirty="0"/>
+          </a:p>
+        </p:txBody>
+      </p:sp>
+      <p:sp>
+        <p:nvSpPr>
+          <p:cNvPr id="11" name="card"/>
           <p:cNvSpPr/>
           <p:nvPr/>
         </p:nvSpPr>
         <p:spPr>
           <a:xfrm>
-            <a:off x="548640" y="2779776"/>
-            <a:ext cx="384048" cy="384048"/>
-          </a:xfrm>
-          <a:prstGeom prst="ellipse">
-            <a:avLst/>
-          </a:prstGeom>
-          <a:solidFill>
-            <a:schemeClr val="accent1"/>
-          </a:solidFill>
-          <a:ln w="15875">
+            <a:off x="502920" y="2692908"/>
+            <a:ext cx="8138160" cy="509778"/>
+          </a:xfrm>
+          <a:prstGeom prst="roundRect">
+            <a:avLst>
+              <a:gd name="adj" fmla="val 17937"/>
+            </a:avLst>
+          </a:prstGeom>
+          <a:solidFill>
+            <a:srgbClr val="FFFFFF"/>
+          </a:solidFill>
+          <a:ln w="25400">
             <a:solidFill>
               <a:srgbClr val="1A1A1A"/>
             </a:solidFill>
             <a:prstDash val="solid"/>
           </a:ln>
-        </p:spPr>
-      </p:sp>
-      <p:sp>
-        <p:nvSpPr>
-          <p:cNvPr id="13" name="step-num-text"/>
+          <a:effectLst>
+            <a:outerShdw sx="100000" sy="100000" kx="0" ky="0" algn="bl" rotWithShape="0" blurRad="101600" dist="38100" dir="2700000">
+              <a:srgbClr val="1A1A1A">
+                <a:alpha val="100000"/>
+              </a:srgbClr>
+            </a:outerShdw>
+          </a:effectLst>
+        </p:spPr>
+      </p:sp>
+      <p:sp>
+        <p:nvSpPr>
+          <p:cNvPr id="12" name="Text 9"/>
           <p:cNvSpPr txBox="1"/>
           <p:nvPr/>
         </p:nvSpPr>
         <p:spPr>
           <a:xfrm>
-            <a:off x="548640" y="2779776"/>
-            <a:ext cx="384048" cy="384048"/>
+            <a:off x="640080" y="2747772"/>
+            <a:ext cx="400050" cy="400050"/>
+          </a:xfrm>
+          <a:prstGeom prst="ellipse">
+            <a:avLst/>
+          </a:prstGeom>
+          <a:solidFill>
+            <a:srgbClr val="DD6420"/>
+          </a:solidFill>
+          <a:ln w="19050">
+            <a:solidFill>
+              <a:srgbClr val="1A1A1A"/>
+            </a:solidFill>
+          </a:ln>
+        </p:spPr>
+        <p:txBody>
+          <a:bodyPr wrap="square" lIns="0" tIns="0" rIns="0" bIns="0" rtlCol="0" anchor="ctr"/>
+          <a:lstStyle/>
+          <a:p>
+            <a:pPr algn="ctr" indent="0" marL="0">
+              <a:buNone/>
+            </a:pPr>
+            <a:r>
+              <a:rPr lang="ja-JP" altLang="en-US" sz="1500" dirty="0">
+                <a:solidFill>
+                  <a:srgbClr val="FFFFFF"/>
+                </a:solidFill>
+                <a:latin typeface="Dela Gothic One" pitchFamily="34" charset="0"/>
+                <a:ea typeface="けいふぉんと" pitchFamily="34" charset="-122"/>
+                <a:cs typeface="Dela Gothic One" pitchFamily="34" charset="-120"/>
+              </a:rPr>
+              <a:t>3</a:t>
+            </a:r>
+            <a:endParaRPr lang="ja-JP" sz="1500" dirty="0"/>
+          </a:p>
+        </p:txBody>
+      </p:sp>
+      <p:sp>
+        <p:nvSpPr>
+          <p:cNvPr id="13" name="step-text"/>
+          <p:cNvSpPr txBox="1"/>
+          <p:nvPr/>
+        </p:nvSpPr>
+        <p:spPr>
+          <a:xfrm>
+            <a:off x="1234440" y="2692908"/>
+            <a:ext cx="7269480" cy="509778"/>
           </a:xfrm>
           <a:prstGeom prst="rect">
             <a:avLst/>
@@ -5221,95 +5486,118 @@
           <a:ln/>
         </p:spPr>
         <p:txBody>
-          <a:bodyPr wrap="square" lIns="0" tIns="0" rIns="0" bIns="0" rtlCol="0" anchor="ctr"/>
-          <a:lstStyle/>
-          <a:p>
-            <a:pPr algn="ctr" indent="0" marL="0">
-              <a:buNone/>
-            </a:pPr>
-            <a:r>
-              <a:rPr lang="en-US" sz="1400" b="1" dirty="0">
-                <a:solidFill>
-                  <a:schemeClr val="tx1"/>
-                </a:solidFill>
-              </a:rPr>
-              <a:t>3</a:t>
-            </a:r>
-            <a:endParaRPr lang="en-US" sz="1400" dirty="0"/>
-          </a:p>
-        </p:txBody>
-      </p:sp>
-      <p:sp>
-        <p:nvSpPr>
-          <p:cNvPr id="14" name="step-text"/>
-          <p:cNvSpPr txBox="1"/>
-          <p:nvPr/>
-        </p:nvSpPr>
-        <p:spPr>
-          <a:xfrm>
-            <a:off x="1097280" y="2670048"/>
-            <a:ext cx="7498080" cy="603504"/>
-          </a:xfrm>
-          <a:prstGeom prst="rect">
-            <a:avLst/>
-          </a:prstGeom>
-          <a:noFill/>
-          <a:ln/>
-        </p:spPr>
-        <p:txBody>
-          <a:bodyPr wrap="square" lIns="0" tIns="0" rIns="0" bIns="0" rtlCol="0" anchor="ctr"/>
+          <a:bodyPr wrap="square" lIns="0" tIns="0" rIns="0" bIns="0" rtlCol="0" anchor="ctr">
+            <a:normAutofit/>
+          </a:bodyPr>
           <a:lstStyle/>
           <a:p>
             <a:pPr indent="0" marL="0">
               <a:buNone/>
             </a:pPr>
             <a:r>
-              <a:rPr lang="en-US" sz="1450" dirty="0">
-                <a:solidFill>
-                  <a:schemeClr val="tx1"/>
-                </a:solidFill>
+              <a:rPr lang="ja-JP" altLang="en-US" sz="1400" b="1" dirty="0">
+                <a:solidFill>
+                  <a:srgbClr val="1A1A1A"/>
+                </a:solidFill>
+                <a:latin typeface="Noto Sans JP" pitchFamily="34" charset="0"/>
+                <a:ea typeface="Noto Sans JP" pitchFamily="34" charset="-122"/>
+                <a:cs typeface="Noto Sans JP" pitchFamily="34" charset="-120"/>
               </a:rPr>
               <a:t>2つの答えを比べ、違いを共有する</a:t>
             </a:r>
-            <a:endParaRPr lang="en-US" sz="1450" dirty="0"/>
-          </a:p>
-        </p:txBody>
-      </p:sp>
-      <p:sp>
-        <p:nvSpPr>
-          <p:cNvPr id="15" name="step-num"/>
+            <a:endParaRPr lang="ja-JP" sz="1400" dirty="0"/>
+          </a:p>
+        </p:txBody>
+      </p:sp>
+      <p:sp>
+        <p:nvSpPr>
+          <p:cNvPr id="14" name="card"/>
           <p:cNvSpPr/>
           <p:nvPr/>
         </p:nvSpPr>
         <p:spPr>
           <a:xfrm>
-            <a:off x="548640" y="3383280"/>
-            <a:ext cx="384048" cy="384048"/>
-          </a:xfrm>
-          <a:prstGeom prst="ellipse">
-            <a:avLst/>
-          </a:prstGeom>
-          <a:solidFill>
-            <a:schemeClr val="accent1"/>
-          </a:solidFill>
-          <a:ln w="15875">
+            <a:off x="502920" y="3330702"/>
+            <a:ext cx="8138160" cy="509778"/>
+          </a:xfrm>
+          <a:prstGeom prst="roundRect">
+            <a:avLst>
+              <a:gd name="adj" fmla="val 17937"/>
+            </a:avLst>
+          </a:prstGeom>
+          <a:solidFill>
+            <a:srgbClr val="FFFFFF"/>
+          </a:solidFill>
+          <a:ln w="25400">
             <a:solidFill>
               <a:srgbClr val="1A1A1A"/>
             </a:solidFill>
             <a:prstDash val="solid"/>
           </a:ln>
-        </p:spPr>
-      </p:sp>
-      <p:sp>
-        <p:nvSpPr>
-          <p:cNvPr id="16" name="step-num-text"/>
+          <a:effectLst>
+            <a:outerShdw sx="100000" sy="100000" kx="0" ky="0" algn="bl" rotWithShape="0" blurRad="101600" dist="38100" dir="2700000">
+              <a:srgbClr val="1A1A1A">
+                <a:alpha val="100000"/>
+              </a:srgbClr>
+            </a:outerShdw>
+          </a:effectLst>
+        </p:spPr>
+      </p:sp>
+      <p:sp>
+        <p:nvSpPr>
+          <p:cNvPr id="15" name="Text 12"/>
           <p:cNvSpPr txBox="1"/>
           <p:nvPr/>
         </p:nvSpPr>
         <p:spPr>
           <a:xfrm>
-            <a:off x="548640" y="3383280"/>
-            <a:ext cx="384048" cy="384048"/>
+            <a:off x="640080" y="3385566"/>
+            <a:ext cx="400050" cy="400050"/>
+          </a:xfrm>
+          <a:prstGeom prst="ellipse">
+            <a:avLst/>
+          </a:prstGeom>
+          <a:solidFill>
+            <a:srgbClr val="DD6420"/>
+          </a:solidFill>
+          <a:ln w="19050">
+            <a:solidFill>
+              <a:srgbClr val="1A1A1A"/>
+            </a:solidFill>
+          </a:ln>
+        </p:spPr>
+        <p:txBody>
+          <a:bodyPr wrap="square" lIns="0" tIns="0" rIns="0" bIns="0" rtlCol="0" anchor="ctr"/>
+          <a:lstStyle/>
+          <a:p>
+            <a:pPr algn="ctr" indent="0" marL="0">
+              <a:buNone/>
+            </a:pPr>
+            <a:r>
+              <a:rPr lang="ja-JP" altLang="en-US" sz="1500" dirty="0">
+                <a:solidFill>
+                  <a:srgbClr val="FFFFFF"/>
+                </a:solidFill>
+                <a:latin typeface="Dela Gothic One" pitchFamily="34" charset="0"/>
+                <a:ea typeface="けいふぉんと" pitchFamily="34" charset="-122"/>
+                <a:cs typeface="Dela Gothic One" pitchFamily="34" charset="-120"/>
+              </a:rPr>
+              <a:t>4</a:t>
+            </a:r>
+            <a:endParaRPr lang="ja-JP" sz="1500" dirty="0"/>
+          </a:p>
+        </p:txBody>
+      </p:sp>
+      <p:sp>
+        <p:nvSpPr>
+          <p:cNvPr id="16" name="step-text"/>
+          <p:cNvSpPr txBox="1"/>
+          <p:nvPr/>
+        </p:nvSpPr>
+        <p:spPr>
+          <a:xfrm>
+            <a:off x="1234440" y="3330702"/>
+            <a:ext cx="7269480" cy="509778"/>
           </a:xfrm>
           <a:prstGeom prst="rect">
             <a:avLst/>
@@ -5318,144 +5606,80 @@
           <a:ln/>
         </p:spPr>
         <p:txBody>
-          <a:bodyPr wrap="square" lIns="0" tIns="0" rIns="0" bIns="0" rtlCol="0" anchor="ctr"/>
+          <a:bodyPr wrap="square" lIns="0" tIns="0" rIns="0" bIns="0" rtlCol="0" anchor="ctr">
+            <a:normAutofit/>
+          </a:bodyPr>
+          <a:lstStyle/>
+          <a:p>
+            <a:pPr indent="0" marL="0">
+              <a:buNone/>
+            </a:pPr>
+            <a:r>
+              <a:rPr lang="ja-JP" altLang="en-US" sz="1400" b="1" dirty="0">
+                <a:solidFill>
+                  <a:srgbClr val="1A1A1A"/>
+                </a:solidFill>
+                <a:latin typeface="Noto Sans JP" pitchFamily="34" charset="0"/>
+                <a:ea typeface="Noto Sans JP" pitchFamily="34" charset="-122"/>
+                <a:cs typeface="Noto Sans JP" pitchFamily="34" charset="-120"/>
+              </a:rPr>
+              <a:t>「もっと短く」「〜の場合を足して」と会話で直していく</a:t>
+            </a:r>
+            <a:endParaRPr lang="ja-JP" sz="1400" dirty="0"/>
+          </a:p>
+        </p:txBody>
+      </p:sp>
+      <p:sp>
+        <p:nvSpPr>
+          <p:cNvPr id="17" name="Text 14"/>
+          <p:cNvSpPr txBox="1"/>
+          <p:nvPr/>
+        </p:nvSpPr>
+        <p:spPr>
+          <a:xfrm rot="-60000">
+            <a:off x="502920" y="4005072"/>
+            <a:ext cx="8138160" cy="502920"/>
+          </a:xfrm>
+          <a:prstGeom prst="rect">
+            <a:avLst/>
+          </a:prstGeom>
+          <a:solidFill>
+            <a:srgbClr val="DD6420"/>
+          </a:solidFill>
+          <a:ln w="19050">
+            <a:solidFill>
+              <a:srgbClr val="1A1A1A"/>
+            </a:solidFill>
+          </a:ln>
+          <a:effectLst>
+            <a:outerShdw sx="100000" sy="100000" kx="0" ky="0" algn="bl" rotWithShape="0" blurRad="101600" dist="38100" dir="2700000">
+              <a:srgbClr val="1A1A1A">
+                <a:alpha val="100000"/>
+              </a:srgbClr>
+            </a:outerShdw>
+          </a:effectLst>
+        </p:spPr>
+        <p:txBody>
+          <a:bodyPr wrap="square" lIns="0" tIns="1905" rIns="1905" bIns="0" rtlCol="0" anchor="ctr">
+            <a:normAutofit/>
+          </a:bodyPr>
           <a:lstStyle/>
           <a:p>
             <a:pPr algn="ctr" indent="0" marL="0">
               <a:buNone/>
             </a:pPr>
             <a:r>
-              <a:rPr lang="en-US" sz="1400" b="1" dirty="0">
-                <a:solidFill>
-                  <a:schemeClr val="tx1"/>
-                </a:solidFill>
-              </a:rPr>
-              <a:t>4</a:t>
-            </a:r>
-            <a:endParaRPr lang="en-US" sz="1400" dirty="0"/>
-          </a:p>
-        </p:txBody>
-      </p:sp>
-      <p:sp>
-        <p:nvSpPr>
-          <p:cNvPr id="17" name="step-text"/>
-          <p:cNvSpPr txBox="1"/>
-          <p:nvPr/>
-        </p:nvSpPr>
-        <p:spPr>
-          <a:xfrm>
-            <a:off x="1097280" y="3273552"/>
-            <a:ext cx="7498080" cy="603504"/>
-          </a:xfrm>
-          <a:prstGeom prst="rect">
-            <a:avLst/>
-          </a:prstGeom>
-          <a:noFill/>
-          <a:ln/>
-        </p:spPr>
-        <p:txBody>
-          <a:bodyPr wrap="square" lIns="0" tIns="0" rIns="0" bIns="0" rtlCol="0" anchor="ctr"/>
-          <a:lstStyle/>
-          <a:p>
-            <a:pPr indent="0" marL="0">
-              <a:buNone/>
-            </a:pPr>
-            <a:r>
-              <a:rPr lang="en-US" sz="1450" dirty="0">
-                <a:solidFill>
-                  <a:schemeClr val="tx1"/>
-                </a:solidFill>
-              </a:rPr>
-              <a:t>「もっと短く」「〜の場合を足して」と会話で直していく</a:t>
-            </a:r>
-            <a:endParaRPr lang="en-US" sz="1450" dirty="0"/>
-          </a:p>
-        </p:txBody>
-      </p:sp>
-      <p:sp>
-        <p:nvSpPr>
-          <p:cNvPr id="18" name="foot-box"/>
-          <p:cNvSpPr/>
-          <p:nvPr/>
-        </p:nvSpPr>
-        <p:spPr>
-          <a:xfrm>
-            <a:off x="548640" y="3977640"/>
-            <a:ext cx="8046720" cy="502920"/>
-          </a:xfrm>
-          <a:prstGeom prst="roundRect">
-            <a:avLst>
-              <a:gd name="adj" fmla="val 18182"/>
-            </a:avLst>
-          </a:prstGeom>
-          <a:solidFill>
-            <a:schemeClr val="bg2"/>
-          </a:solidFill>
-          <a:ln w="12700">
-            <a:solidFill>
-              <a:schemeClr val="bg2"/>
-            </a:solidFill>
-            <a:prstDash val="solid"/>
-          </a:ln>
-        </p:spPr>
-      </p:sp>
-      <p:pic>
-        <p:nvPicPr>
-          <p:cNvPr id="19" name="foot-icon" descr="preencoded.png">    </p:cNvPr>
-          <p:cNvPicPr>
-            <a:picLocks noChangeAspect="1"/>
-          </p:cNvPicPr>
-          <p:nvPr/>
-        </p:nvPicPr>
-        <p:blipFill>
-          <a:blip r:embed="rId1"/>
-          <a:stretch>
-            <a:fillRect/>
-          </a:stretch>
-        </p:blipFill>
-        <p:spPr>
-          <a:xfrm>
-            <a:off x="685800" y="4105656"/>
-            <a:ext cx="246888" cy="246888"/>
-          </a:xfrm>
-          <a:prstGeom prst="rect">
-            <a:avLst/>
-          </a:prstGeom>
-        </p:spPr>
-      </p:pic>
-      <p:sp>
-        <p:nvSpPr>
-          <p:cNvPr id="20" name="foot-text"/>
-          <p:cNvSpPr txBox="1"/>
-          <p:nvPr/>
-        </p:nvSpPr>
-        <p:spPr>
-          <a:xfrm>
-            <a:off x="1051560" y="3977640"/>
-            <a:ext cx="7406640" cy="502920"/>
-          </a:xfrm>
-          <a:prstGeom prst="rect">
-            <a:avLst/>
-          </a:prstGeom>
-          <a:noFill/>
-          <a:ln/>
-        </p:spPr>
-        <p:txBody>
-          <a:bodyPr wrap="square" lIns="0" tIns="0" rIns="0" bIns="0" rtlCol="0" anchor="ctr"/>
-          <a:lstStyle/>
-          <a:p>
-            <a:pPr indent="0" marL="0">
-              <a:buNone/>
-            </a:pPr>
-            <a:r>
-              <a:rPr lang="en-US" sz="1150" dirty="0">
-                <a:solidFill>
-                  <a:schemeClr val="tx1"/>
-                </a:solidFill>
+              <a:rPr lang="ja-JP" altLang="en-US" sz="1300" b="1" dirty="0">
+                <a:solidFill>
+                  <a:srgbClr val="FFFFFF"/>
+                </a:solidFill>
+                <a:latin typeface="Noto Sans JP" pitchFamily="34" charset="0"/>
+                <a:ea typeface="Noto Sans JP" pitchFamily="34" charset="-122"/>
+                <a:cs typeface="Noto Sans JP" pitchFamily="34" charset="-120"/>
               </a:rPr>
               <a:t>1回で完璧を狙わず、会話で育てる</a:t>
             </a:r>
-            <a:endParaRPr lang="en-US" sz="1150" dirty="0"/>
+            <a:endParaRPr lang="ja-JP" sz="1300" dirty="0"/>
           </a:p>
         </p:txBody>
       </p:sp>
@@ -5471,8 +5695,8 @@
         </p:nvSpPr>
         <p:spPr>
           <a:xfrm>
-            <a:off x="8229600" y="4773168"/>
-            <a:ext cx="365760" cy="228600"/>
+            <a:off x="8366760" y="4754880"/>
+            <a:ext cx="365760" cy="274320"/>
           </a:xfrm>
           <a:prstGeom prst="rect">
             <a:avLst/>
@@ -5484,20 +5708,23 @@
           </a:extLst>
         </p:spPr>
         <p:txBody>
-          <a:bodyPr/>
+          <a:bodyPr anchor="ctr"/>
           <a:lstStyle>
             <a:lvl1pPr>
-              <a:defRPr sz="900">
-                <a:solidFill>
-                  <a:srgbClr val="5A6872"/>
-                </a:solidFill>
+              <a:defRPr sz="850">
+                <a:solidFill>
+                  <a:srgbClr val="FFFFFF"/>
+                </a:solidFill>
+                <a:latin typeface="Noto Sans JP"/>
+                <a:ea typeface="Noto Sans JP"/>
+                <a:cs typeface="Noto Sans JP"/>
               </a:defRPr>
             </a:lvl1pPr>
           </a:lstStyle>
           <a:p>
             <a:pPr algn="r"/>
             <a:fld id="{F7021451-1387-4CA6-816F-3879F97B5CBC}" type="slidenum">
-              <a:rPr b="0" lang="en-US"/>
+              <a:rPr b="1" lang="en-US"/>
               <a:t>5</a:t>
             </a:fld>
             <a:endParaRPr lang="en-US"/>
@@ -5532,15 +5759,58 @@
       <p:sp>
         <p:nvSpPr>
           <p:cNvPr id="2" name="Text 0"/>
-          <p:cNvSpPr/>
-          <p:nvPr>
-            <p:ph idx="100" type="title" hasCustomPrompt="1"/>
-          </p:nvPr>
-        </p:nvSpPr>
-        <p:spPr>
-          <a:xfrm>
-            <a:off x="548640" y="658368"/>
-            <a:ext cx="8046720" cy="566928"/>
+          <p:cNvSpPr txBox="1"/>
+          <p:nvPr/>
+        </p:nvSpPr>
+        <p:spPr>
+          <a:xfrm rot="-180000">
+            <a:off x="411480" y="201168"/>
+            <a:ext cx="1478128" cy="352044"/>
+          </a:xfrm>
+          <a:prstGeom prst="rect">
+            <a:avLst/>
+          </a:prstGeom>
+          <a:solidFill>
+            <a:srgbClr val="1A1A1A"/>
+          </a:solidFill>
+          <a:ln>
+            <a:solidFill>
+              <a:srgbClr val="1A1A1A"/>
+            </a:solidFill>
+          </a:ln>
+        </p:spPr>
+        <p:txBody>
+          <a:bodyPr wrap="square" lIns="0" tIns="0" rIns="0" bIns="0" rtlCol="0" anchor="ctr"/>
+          <a:lstStyle/>
+          <a:p>
+            <a:pPr algn="ctr" indent="0" marL="0">
+              <a:buNone/>
+            </a:pPr>
+            <a:r>
+              <a:rPr lang="ja-JP" altLang="en-US" sz="1100" dirty="0">
+                <a:solidFill>
+                  <a:srgbClr val="FFFFFF"/>
+                </a:solidFill>
+                <a:latin typeface="Dela Gothic One" pitchFamily="34" charset="0"/>
+                <a:ea typeface="けいふぉんと" pitchFamily="34" charset="-122"/>
+                <a:cs typeface="Dela Gothic One" pitchFamily="34" charset="-120"/>
+              </a:rPr>
+              <a:t>説明② 10分</a:t>
+            </a:r>
+            <a:endParaRPr lang="ja-JP" sz="1100" dirty="0"/>
+          </a:p>
+        </p:txBody>
+      </p:sp>
+      <p:sp>
+        <p:nvSpPr>
+          <p:cNvPr id="3" name="Text 1"/>
+          <p:cNvSpPr txBox="1"/>
+          <p:nvPr/>
+        </p:nvSpPr>
+        <p:spPr>
+          <a:xfrm>
+            <a:off x="411480" y="502920"/>
+            <a:ext cx="8321040" cy="685800"/>
           </a:xfrm>
           <a:prstGeom prst="rect">
             <a:avLst/>
@@ -5549,116 +5819,86 @@
           <a:ln/>
         </p:spPr>
         <p:txBody>
-          <a:bodyPr wrap="square" lIns="0" tIns="0" rIns="0" bIns="0" rtlCol="0" anchor="ctr"/>
-          <a:lstStyle/>
-          <a:p>
-            <a:pPr algn="l" indent="0" marL="0">
-              <a:buNone/>
-            </a:pPr>
-            <a:r>
-              <a:rPr lang="en-US" sz="2400" b="1" dirty="0">
-                <a:solidFill>
-                  <a:schemeClr val="tx1"/>
-                </a:solidFill>
-              </a:rPr>
-              <a:t>AIを「壁打ち相手」にする</a:t>
-            </a:r>
-            <a:endParaRPr lang="en-US" sz="2400" dirty="0"/>
-          </a:p>
-        </p:txBody>
-      </p:sp>
-      <p:sp>
-        <p:nvSpPr>
-          <p:cNvPr id="3" name="chip"/>
+          <a:bodyPr wrap="square" lIns="0" tIns="0" rIns="0" bIns="0" rtlCol="0" anchor="ctr">
+            <a:normAutofit/>
+          </a:bodyPr>
+          <a:lstStyle/>
+          <a:p>
+            <a:pPr indent="0" marL="0">
+              <a:buNone/>
+            </a:pPr>
+            <a:r>
+              <a:rPr lang="ja-JP" altLang="en-US" sz="2600" dirty="0">
+                <a:solidFill>
+                  <a:srgbClr val="1A1A1A"/>
+                </a:solidFill>
+                <a:latin typeface="Dela Gothic One" pitchFamily="34" charset="0"/>
+                <a:ea typeface="けいふぉんと" pitchFamily="34" charset="-122"/>
+                <a:cs typeface="Dela Gothic One" pitchFamily="34" charset="-120"/>
+              </a:rPr>
+              <a:t>AIを</a:t>
+            </a:r>
+            <a:pPr indent="0" marL="0">
+              <a:buNone/>
+            </a:pPr>
+            <a:r>
+              <a:rPr lang="ja-JP" altLang="en-US" sz="2600" dirty="0">
+                <a:solidFill>
+                  <a:srgbClr val="DD6420"/>
+                </a:solidFill>
+                <a:latin typeface="Dela Gothic One" pitchFamily="34" charset="0"/>
+                <a:ea typeface="けいふぉんと" pitchFamily="34" charset="-122"/>
+                <a:cs typeface="Dela Gothic One" pitchFamily="34" charset="-120"/>
+              </a:rPr>
+              <a:t>「壁打ち相手」</a:t>
+            </a:r>
+            <a:pPr indent="0" marL="0">
+              <a:buNone/>
+            </a:pPr>
+            <a:r>
+              <a:rPr lang="ja-JP" altLang="en-US" sz="2600" dirty="0">
+                <a:solidFill>
+                  <a:srgbClr val="1A1A1A"/>
+                </a:solidFill>
+                <a:latin typeface="Dela Gothic One" pitchFamily="34" charset="0"/>
+                <a:ea typeface="けいふぉんと" pitchFamily="34" charset="-122"/>
+                <a:cs typeface="Dela Gothic One" pitchFamily="34" charset="-120"/>
+              </a:rPr>
+              <a:t>にする</a:t>
+            </a:r>
+            <a:endParaRPr lang="ja-JP" sz="2600" dirty="0"/>
+          </a:p>
+        </p:txBody>
+      </p:sp>
+      <p:sp>
+        <p:nvSpPr>
+          <p:cNvPr id="5" name="card"/>
           <p:cNvSpPr/>
           <p:nvPr/>
         </p:nvSpPr>
         <p:spPr>
           <a:xfrm>
-            <a:off x="548640" y="292608"/>
-            <a:ext cx="1344168" cy="292608"/>
+            <a:off x="502920" y="1691640"/>
+            <a:ext cx="1746504" cy="1600200"/>
           </a:xfrm>
           <a:prstGeom prst="roundRect">
             <a:avLst>
-              <a:gd name="adj" fmla="val 50000"/>
+              <a:gd name="adj" fmla="val 5714"/>
             </a:avLst>
           </a:prstGeom>
           <a:solidFill>
-            <a:schemeClr val="tx1"/>
-          </a:solidFill>
-          <a:ln w="12700">
-            <a:solidFill>
-              <a:schemeClr val="tx1"/>
-            </a:solidFill>
-            <a:prstDash val="solid"/>
-          </a:ln>
-        </p:spPr>
-      </p:sp>
-      <p:sp>
-        <p:nvSpPr>
-          <p:cNvPr id="4" name="chip-text"/>
-          <p:cNvSpPr txBox="1"/>
-          <p:nvPr/>
-        </p:nvSpPr>
-        <p:spPr>
-          <a:xfrm>
-            <a:off x="548640" y="292608"/>
-            <a:ext cx="1344168" cy="292608"/>
-          </a:xfrm>
-          <a:prstGeom prst="rect">
-            <a:avLst/>
-          </a:prstGeom>
-          <a:noFill/>
-          <a:ln/>
-        </p:spPr>
-        <p:txBody>
-          <a:bodyPr wrap="square" lIns="0" tIns="0" rIns="0" bIns="0" rtlCol="0" anchor="ctr"/>
-          <a:lstStyle/>
-          <a:p>
-            <a:pPr algn="ctr" indent="0" marL="0">
-              <a:buNone/>
-            </a:pPr>
-            <a:r>
-              <a:rPr lang="en-US" sz="1100" b="1" dirty="0">
-                <a:solidFill>
-                  <a:schemeClr val="accent1"/>
-                </a:solidFill>
-              </a:rPr>
-              <a:t>説明② 10分</a:t>
-            </a:r>
-            <a:endParaRPr lang="en-US" sz="1100" dirty="0"/>
-          </a:p>
-        </p:txBody>
-      </p:sp>
-      <p:sp>
-        <p:nvSpPr>
-          <p:cNvPr id="6" name="card"/>
-          <p:cNvSpPr/>
-          <p:nvPr/>
-        </p:nvSpPr>
-        <p:spPr>
-          <a:xfrm>
-            <a:off x="548640" y="1828800"/>
-            <a:ext cx="1723644" cy="1463040"/>
-          </a:xfrm>
-          <a:prstGeom prst="roundRect">
-            <a:avLst>
-              <a:gd name="adj" fmla="val 7500"/>
-            </a:avLst>
-          </a:prstGeom>
-          <a:solidFill>
-            <a:schemeClr val="bg1"/>
-          </a:solidFill>
-          <a:ln w="19050">
+            <a:srgbClr val="FFFFFF"/>
+          </a:solidFill>
+          <a:ln w="25400">
             <a:solidFill>
               <a:srgbClr val="1A1A1A"/>
             </a:solidFill>
             <a:prstDash val="solid"/>
           </a:ln>
           <a:effectLst>
-            <a:outerShdw sx="100000" sy="100000" kx="0" ky="0" algn="bl" rotWithShape="0" blurRad="101600" dist="38100" dir="2700000">
-              <a:srgbClr val="000000">
-                <a:alpha val="18000"/>
+            <a:outerShdw sx="100000" sy="100000" kx="0" ky="0" algn="bl" rotWithShape="0" blurRad="101600" dist="50800" dir="2700000">
+              <a:srgbClr val="1A1A1A">
+                <a:alpha val="100000"/>
               </a:srgbClr>
             </a:outerShdw>
           </a:effectLst>
@@ -5666,14 +5906,59 @@
       </p:sp>
       <p:sp>
         <p:nvSpPr>
-          <p:cNvPr id="7" name="Text 4"/>
+          <p:cNvPr id="6" name="Text 3"/>
           <p:cNvSpPr txBox="1"/>
           <p:nvPr/>
         </p:nvSpPr>
         <p:spPr>
-          <a:xfrm>
-            <a:off x="548640" y="1993392"/>
-            <a:ext cx="1723644" cy="274320"/>
+          <a:xfrm rot="-180000">
+            <a:off x="918972" y="1545336"/>
+            <a:ext cx="914400" cy="292608"/>
+          </a:xfrm>
+          <a:prstGeom prst="rect">
+            <a:avLst/>
+          </a:prstGeom>
+          <a:solidFill>
+            <a:srgbClr val="1A1A1A"/>
+          </a:solidFill>
+          <a:ln>
+            <a:solidFill>
+              <a:srgbClr val="1A1A1A"/>
+            </a:solidFill>
+          </a:ln>
+        </p:spPr>
+        <p:txBody>
+          <a:bodyPr wrap="square" lIns="0" tIns="0" rIns="0" bIns="0" rtlCol="0" anchor="ctr"/>
+          <a:lstStyle/>
+          <a:p>
+            <a:pPr algn="ctr" indent="0" marL="0">
+              <a:buNone/>
+            </a:pPr>
+            <a:r>
+              <a:rPr lang="ja-JP" altLang="en-US" sz="1000" dirty="0">
+                <a:solidFill>
+                  <a:srgbClr val="FFFFFF"/>
+                </a:solidFill>
+                <a:latin typeface="Dela Gothic One" pitchFamily="34" charset="0"/>
+                <a:ea typeface="けいふぉんと" pitchFamily="34" charset="-122"/>
+                <a:cs typeface="Dela Gothic One" pitchFamily="34" charset="-120"/>
+              </a:rPr>
+              <a:t>STEP 1</a:t>
+            </a:r>
+            <a:endParaRPr lang="ja-JP" sz="1000" dirty="0"/>
+          </a:p>
+        </p:txBody>
+      </p:sp>
+      <p:sp>
+        <p:nvSpPr>
+          <p:cNvPr id="7" name="flow-node"/>
+          <p:cNvSpPr txBox="1"/>
+          <p:nvPr/>
+        </p:nvSpPr>
+        <p:spPr>
+          <a:xfrm>
+            <a:off x="612648" y="1965960"/>
+            <a:ext cx="1527048" cy="1234440"/>
           </a:xfrm>
           <a:prstGeom prst="rect">
             <a:avLst/>
@@ -5682,63 +5967,32 @@
           <a:ln/>
         </p:spPr>
         <p:txBody>
-          <a:bodyPr wrap="square" lIns="0" tIns="0" rIns="0" bIns="0" rtlCol="0" anchor="ctr"/>
+          <a:bodyPr wrap="square" lIns="0" tIns="0" rIns="0" bIns="0" rtlCol="0" anchor="ctr">
+            <a:normAutofit/>
+          </a:bodyPr>
           <a:lstStyle/>
           <a:p>
             <a:pPr algn="ctr" indent="0" marL="0">
               <a:buNone/>
             </a:pPr>
             <a:r>
-              <a:rPr lang="en-US" sz="1000" b="1" dirty="0">
-                <a:solidFill>
-                  <a:schemeClr val="accent2"/>
-                </a:solidFill>
-              </a:rPr>
-              <a:t>STEP 1</a:t>
-            </a:r>
-            <a:endParaRPr lang="en-US" sz="1000" dirty="0"/>
-          </a:p>
-        </p:txBody>
-      </p:sp>
-      <p:sp>
-        <p:nvSpPr>
-          <p:cNvPr id="8" name="flow-node"/>
-          <p:cNvSpPr txBox="1"/>
-          <p:nvPr/>
-        </p:nvSpPr>
-        <p:spPr>
-          <a:xfrm>
-            <a:off x="640080" y="2286000"/>
-            <a:ext cx="1540764" cy="868680"/>
-          </a:xfrm>
-          <a:prstGeom prst="rect">
-            <a:avLst/>
-          </a:prstGeom>
-          <a:noFill/>
-          <a:ln/>
-        </p:spPr>
-        <p:txBody>
-          <a:bodyPr wrap="square" lIns="0" tIns="0" rIns="0" bIns="0" rtlCol="0" anchor="ctr"/>
-          <a:lstStyle/>
-          <a:p>
-            <a:pPr algn="ctr" indent="0" marL="0">
-              <a:buNone/>
-            </a:pPr>
-            <a:r>
-              <a:rPr lang="en-US" sz="1400" b="1" dirty="0">
-                <a:solidFill>
-                  <a:schemeClr val="tx1"/>
-                </a:solidFill>
+              <a:rPr lang="ja-JP" altLang="en-US" sz="1400" b="1" dirty="0">
+                <a:solidFill>
+                  <a:srgbClr val="1A1A1A"/>
+                </a:solidFill>
+                <a:latin typeface="Noto Sans JP" pitchFamily="34" charset="0"/>
+                <a:ea typeface="Noto Sans JP" pitchFamily="34" charset="-122"/>
+                <a:cs typeface="Noto Sans JP" pitchFamily="34" charset="-120"/>
               </a:rPr>
               <a:t>設計シートを渡す</a:t>
             </a:r>
-            <a:endParaRPr lang="en-US" sz="1400" dirty="0"/>
+            <a:endParaRPr lang="ja-JP" sz="1400" dirty="0"/>
           </a:p>
         </p:txBody>
       </p:sp>
       <p:pic>
         <p:nvPicPr>
-          <p:cNvPr id="9" name="flow-arrow" descr="preencoded.png">    </p:cNvPr>
+          <p:cNvPr id="8" name="flow-arrow" descr="preencoded.png">    </p:cNvPr>
           <p:cNvPicPr>
             <a:picLocks noChangeAspect="1"/>
           </p:cNvPicPr>
@@ -5752,8 +6006,8 @@
         </p:blipFill>
         <p:spPr>
           <a:xfrm>
-            <a:off x="2345436" y="2441448"/>
-            <a:ext cx="237744" cy="237744"/>
+            <a:off x="2313432" y="2363724"/>
+            <a:ext cx="256032" cy="256032"/>
           </a:xfrm>
           <a:prstGeom prst="rect">
             <a:avLst/>
@@ -5762,33 +6016,33 @@
       </p:pic>
       <p:sp>
         <p:nvSpPr>
-          <p:cNvPr id="10" name="card"/>
+          <p:cNvPr id="9" name="card"/>
           <p:cNvSpPr/>
           <p:nvPr/>
         </p:nvSpPr>
         <p:spPr>
           <a:xfrm>
-            <a:off x="2656332" y="1828800"/>
-            <a:ext cx="1723644" cy="1463040"/>
+            <a:off x="2633472" y="1691640"/>
+            <a:ext cx="1746504" cy="1600200"/>
           </a:xfrm>
           <a:prstGeom prst="roundRect">
             <a:avLst>
-              <a:gd name="adj" fmla="val 7500"/>
+              <a:gd name="adj" fmla="val 5714"/>
             </a:avLst>
           </a:prstGeom>
           <a:solidFill>
-            <a:schemeClr val="bg1"/>
-          </a:solidFill>
-          <a:ln w="19050">
+            <a:srgbClr val="FFFFFF"/>
+          </a:solidFill>
+          <a:ln w="25400">
             <a:solidFill>
               <a:srgbClr val="1A1A1A"/>
             </a:solidFill>
             <a:prstDash val="solid"/>
           </a:ln>
           <a:effectLst>
-            <a:outerShdw sx="100000" sy="100000" kx="0" ky="0" algn="bl" rotWithShape="0" blurRad="101600" dist="38100" dir="2700000">
-              <a:srgbClr val="000000">
-                <a:alpha val="18000"/>
+            <a:outerShdw sx="100000" sy="100000" kx="0" ky="0" algn="bl" rotWithShape="0" blurRad="101600" dist="50800" dir="2700000">
+              <a:srgbClr val="1A1A1A">
+                <a:alpha val="100000"/>
               </a:srgbClr>
             </a:outerShdw>
           </a:effectLst>
@@ -5796,14 +6050,59 @@
       </p:sp>
       <p:sp>
         <p:nvSpPr>
-          <p:cNvPr id="11" name="Text 7"/>
+          <p:cNvPr id="10" name="Text 6"/>
           <p:cNvSpPr txBox="1"/>
           <p:nvPr/>
         </p:nvSpPr>
         <p:spPr>
-          <a:xfrm>
-            <a:off x="2656332" y="1993392"/>
-            <a:ext cx="1723644" cy="274320"/>
+          <a:xfrm rot="-180000">
+            <a:off x="3049524" y="1545336"/>
+            <a:ext cx="914400" cy="292608"/>
+          </a:xfrm>
+          <a:prstGeom prst="rect">
+            <a:avLst/>
+          </a:prstGeom>
+          <a:solidFill>
+            <a:srgbClr val="1A1A1A"/>
+          </a:solidFill>
+          <a:ln>
+            <a:solidFill>
+              <a:srgbClr val="1A1A1A"/>
+            </a:solidFill>
+          </a:ln>
+        </p:spPr>
+        <p:txBody>
+          <a:bodyPr wrap="square" lIns="0" tIns="0" rIns="0" bIns="0" rtlCol="0" anchor="ctr"/>
+          <a:lstStyle/>
+          <a:p>
+            <a:pPr algn="ctr" indent="0" marL="0">
+              <a:buNone/>
+            </a:pPr>
+            <a:r>
+              <a:rPr lang="ja-JP" altLang="en-US" sz="1000" dirty="0">
+                <a:solidFill>
+                  <a:srgbClr val="FFFFFF"/>
+                </a:solidFill>
+                <a:latin typeface="Dela Gothic One" pitchFamily="34" charset="0"/>
+                <a:ea typeface="けいふぉんと" pitchFamily="34" charset="-122"/>
+                <a:cs typeface="Dela Gothic One" pitchFamily="34" charset="-120"/>
+              </a:rPr>
+              <a:t>STEP 2</a:t>
+            </a:r>
+            <a:endParaRPr lang="ja-JP" sz="1000" dirty="0"/>
+          </a:p>
+        </p:txBody>
+      </p:sp>
+      <p:sp>
+        <p:nvSpPr>
+          <p:cNvPr id="11" name="flow-node"/>
+          <p:cNvSpPr txBox="1"/>
+          <p:nvPr/>
+        </p:nvSpPr>
+        <p:spPr>
+          <a:xfrm>
+            <a:off x="2743200" y="1965960"/>
+            <a:ext cx="1527048" cy="1234440"/>
           </a:xfrm>
           <a:prstGeom prst="rect">
             <a:avLst/>
@@ -5812,63 +6111,32 @@
           <a:ln/>
         </p:spPr>
         <p:txBody>
-          <a:bodyPr wrap="square" lIns="0" tIns="0" rIns="0" bIns="0" rtlCol="0" anchor="ctr"/>
+          <a:bodyPr wrap="square" lIns="0" tIns="0" rIns="0" bIns="0" rtlCol="0" anchor="ctr">
+            <a:normAutofit/>
+          </a:bodyPr>
           <a:lstStyle/>
           <a:p>
             <a:pPr algn="ctr" indent="0" marL="0">
               <a:buNone/>
             </a:pPr>
             <a:r>
-              <a:rPr lang="en-US" sz="1000" b="1" dirty="0">
-                <a:solidFill>
-                  <a:schemeClr val="accent2"/>
-                </a:solidFill>
-              </a:rPr>
-              <a:t>STEP 2</a:t>
-            </a:r>
-            <a:endParaRPr lang="en-US" sz="1000" dirty="0"/>
-          </a:p>
-        </p:txBody>
-      </p:sp>
-      <p:sp>
-        <p:nvSpPr>
-          <p:cNvPr id="12" name="flow-node"/>
-          <p:cNvSpPr txBox="1"/>
-          <p:nvPr/>
-        </p:nvSpPr>
-        <p:spPr>
-          <a:xfrm>
-            <a:off x="2747772" y="2286000"/>
-            <a:ext cx="1540764" cy="868680"/>
-          </a:xfrm>
-          <a:prstGeom prst="rect">
-            <a:avLst/>
-          </a:prstGeom>
-          <a:noFill/>
-          <a:ln/>
-        </p:spPr>
-        <p:txBody>
-          <a:bodyPr wrap="square" lIns="0" tIns="0" rIns="0" bIns="0" rtlCol="0" anchor="ctr"/>
-          <a:lstStyle/>
-          <a:p>
-            <a:pPr algn="ctr" indent="0" marL="0">
-              <a:buNone/>
-            </a:pPr>
-            <a:r>
-              <a:rPr lang="en-US" sz="1400" b="1" dirty="0">
-                <a:solidFill>
-                  <a:schemeClr val="tx1"/>
-                </a:solidFill>
+              <a:rPr lang="ja-JP" altLang="en-US" sz="1400" b="1" dirty="0">
+                <a:solidFill>
+                  <a:srgbClr val="1A1A1A"/>
+                </a:solidFill>
+                <a:latin typeface="Noto Sans JP" pitchFamily="34" charset="0"/>
+                <a:ea typeface="Noto Sans JP" pitchFamily="34" charset="-122"/>
+                <a:cs typeface="Noto Sans JP" pitchFamily="34" charset="-120"/>
               </a:rPr>
               <a:t>AIが1問ずつ質問</a:t>
             </a:r>
-            <a:endParaRPr lang="en-US" sz="1400" dirty="0"/>
+            <a:endParaRPr lang="ja-JP" sz="1400" dirty="0"/>
           </a:p>
         </p:txBody>
       </p:sp>
       <p:pic>
         <p:nvPicPr>
-          <p:cNvPr id="13" name="flow-arrow" descr="preencoded.png">    </p:cNvPr>
+          <p:cNvPr id="12" name="flow-arrow" descr="preencoded.png">    </p:cNvPr>
           <p:cNvPicPr>
             <a:picLocks noChangeAspect="1"/>
           </p:cNvPicPr>
@@ -5882,8 +6150,8 @@
         </p:blipFill>
         <p:spPr>
           <a:xfrm>
-            <a:off x="4453128" y="2441448"/>
-            <a:ext cx="237744" cy="237744"/>
+            <a:off x="4443984" y="2363724"/>
+            <a:ext cx="256032" cy="256032"/>
           </a:xfrm>
           <a:prstGeom prst="rect">
             <a:avLst/>
@@ -5892,33 +6160,33 @@
       </p:pic>
       <p:sp>
         <p:nvSpPr>
-          <p:cNvPr id="14" name="card"/>
+          <p:cNvPr id="13" name="card"/>
           <p:cNvSpPr/>
           <p:nvPr/>
         </p:nvSpPr>
         <p:spPr>
           <a:xfrm>
-            <a:off x="4764024" y="1828800"/>
-            <a:ext cx="1723644" cy="1463040"/>
+            <a:off x="4764024" y="1691640"/>
+            <a:ext cx="1746504" cy="1600200"/>
           </a:xfrm>
           <a:prstGeom prst="roundRect">
             <a:avLst>
-              <a:gd name="adj" fmla="val 7500"/>
+              <a:gd name="adj" fmla="val 5714"/>
             </a:avLst>
           </a:prstGeom>
           <a:solidFill>
-            <a:schemeClr val="bg1"/>
-          </a:solidFill>
-          <a:ln w="19050">
+            <a:srgbClr val="FFFFFF"/>
+          </a:solidFill>
+          <a:ln w="25400">
             <a:solidFill>
               <a:srgbClr val="1A1A1A"/>
             </a:solidFill>
             <a:prstDash val="solid"/>
           </a:ln>
           <a:effectLst>
-            <a:outerShdw sx="100000" sy="100000" kx="0" ky="0" algn="bl" rotWithShape="0" blurRad="101600" dist="38100" dir="2700000">
-              <a:srgbClr val="000000">
-                <a:alpha val="18000"/>
+            <a:outerShdw sx="100000" sy="100000" kx="0" ky="0" algn="bl" rotWithShape="0" blurRad="101600" dist="50800" dir="2700000">
+              <a:srgbClr val="1A1A1A">
+                <a:alpha val="100000"/>
               </a:srgbClr>
             </a:outerShdw>
           </a:effectLst>
@@ -5926,14 +6194,59 @@
       </p:sp>
       <p:sp>
         <p:nvSpPr>
-          <p:cNvPr id="15" name="Text 10"/>
+          <p:cNvPr id="14" name="Text 9"/>
           <p:cNvSpPr txBox="1"/>
           <p:nvPr/>
         </p:nvSpPr>
         <p:spPr>
-          <a:xfrm>
-            <a:off x="4764024" y="1993392"/>
-            <a:ext cx="1723644" cy="274320"/>
+          <a:xfrm rot="-180000">
+            <a:off x="5180076" y="1545336"/>
+            <a:ext cx="914400" cy="292608"/>
+          </a:xfrm>
+          <a:prstGeom prst="rect">
+            <a:avLst/>
+          </a:prstGeom>
+          <a:solidFill>
+            <a:srgbClr val="1A1A1A"/>
+          </a:solidFill>
+          <a:ln>
+            <a:solidFill>
+              <a:srgbClr val="1A1A1A"/>
+            </a:solidFill>
+          </a:ln>
+        </p:spPr>
+        <p:txBody>
+          <a:bodyPr wrap="square" lIns="0" tIns="0" rIns="0" bIns="0" rtlCol="0" anchor="ctr"/>
+          <a:lstStyle/>
+          <a:p>
+            <a:pPr algn="ctr" indent="0" marL="0">
+              <a:buNone/>
+            </a:pPr>
+            <a:r>
+              <a:rPr lang="ja-JP" altLang="en-US" sz="1000" dirty="0">
+                <a:solidFill>
+                  <a:srgbClr val="FFFFFF"/>
+                </a:solidFill>
+                <a:latin typeface="Dela Gothic One" pitchFamily="34" charset="0"/>
+                <a:ea typeface="けいふぉんと" pitchFamily="34" charset="-122"/>
+                <a:cs typeface="Dela Gothic One" pitchFamily="34" charset="-120"/>
+              </a:rPr>
+              <a:t>STEP 3</a:t>
+            </a:r>
+            <a:endParaRPr lang="ja-JP" sz="1000" dirty="0"/>
+          </a:p>
+        </p:txBody>
+      </p:sp>
+      <p:sp>
+        <p:nvSpPr>
+          <p:cNvPr id="15" name="flow-node"/>
+          <p:cNvSpPr txBox="1"/>
+          <p:nvPr/>
+        </p:nvSpPr>
+        <p:spPr>
+          <a:xfrm>
+            <a:off x="4873752" y="1965960"/>
+            <a:ext cx="1527048" cy="1234440"/>
           </a:xfrm>
           <a:prstGeom prst="rect">
             <a:avLst/>
@@ -5942,63 +6255,32 @@
           <a:ln/>
         </p:spPr>
         <p:txBody>
-          <a:bodyPr wrap="square" lIns="0" tIns="0" rIns="0" bIns="0" rtlCol="0" anchor="ctr"/>
+          <a:bodyPr wrap="square" lIns="0" tIns="0" rIns="0" bIns="0" rtlCol="0" anchor="ctr">
+            <a:normAutofit/>
+          </a:bodyPr>
           <a:lstStyle/>
           <a:p>
             <a:pPr algn="ctr" indent="0" marL="0">
               <a:buNone/>
             </a:pPr>
             <a:r>
-              <a:rPr lang="en-US" sz="1000" b="1" dirty="0">
-                <a:solidFill>
-                  <a:schemeClr val="accent2"/>
-                </a:solidFill>
-              </a:rPr>
-              <a:t>STEP 3</a:t>
-            </a:r>
-            <a:endParaRPr lang="en-US" sz="1000" dirty="0"/>
-          </a:p>
-        </p:txBody>
-      </p:sp>
-      <p:sp>
-        <p:nvSpPr>
-          <p:cNvPr id="16" name="flow-node"/>
-          <p:cNvSpPr txBox="1"/>
-          <p:nvPr/>
-        </p:nvSpPr>
-        <p:spPr>
-          <a:xfrm>
-            <a:off x="4855464" y="2286000"/>
-            <a:ext cx="1540764" cy="868680"/>
-          </a:xfrm>
-          <a:prstGeom prst="rect">
-            <a:avLst/>
-          </a:prstGeom>
-          <a:noFill/>
-          <a:ln/>
-        </p:spPr>
-        <p:txBody>
-          <a:bodyPr wrap="square" lIns="0" tIns="0" rIns="0" bIns="0" rtlCol="0" anchor="ctr"/>
-          <a:lstStyle/>
-          <a:p>
-            <a:pPr algn="ctr" indent="0" marL="0">
-              <a:buNone/>
-            </a:pPr>
-            <a:r>
-              <a:rPr lang="en-US" sz="1400" b="1" dirty="0">
-                <a:solidFill>
-                  <a:schemeClr val="tx1"/>
-                </a:solidFill>
+              <a:rPr lang="ja-JP" altLang="en-US" sz="1400" b="1" dirty="0">
+                <a:solidFill>
+                  <a:srgbClr val="1A1A1A"/>
+                </a:solidFill>
+                <a:latin typeface="Noto Sans JP" pitchFamily="34" charset="0"/>
+                <a:ea typeface="Noto Sans JP" pitchFamily="34" charset="-122"/>
+                <a:cs typeface="Noto Sans JP" pitchFamily="34" charset="-120"/>
               </a:rPr>
               <a:t>自分が答える</a:t>
             </a:r>
-            <a:endParaRPr lang="en-US" sz="1400" dirty="0"/>
+            <a:endParaRPr lang="ja-JP" sz="1400" dirty="0"/>
           </a:p>
         </p:txBody>
       </p:sp>
       <p:pic>
         <p:nvPicPr>
-          <p:cNvPr id="17" name="flow-arrow" descr="preencoded.png">    </p:cNvPr>
+          <p:cNvPr id="16" name="flow-arrow" descr="preencoded.png">    </p:cNvPr>
           <p:cNvPicPr>
             <a:picLocks noChangeAspect="1"/>
           </p:cNvPicPr>
@@ -6012,8 +6294,8 @@
         </p:blipFill>
         <p:spPr>
           <a:xfrm>
-            <a:off x="6560820" y="2441448"/>
-            <a:ext cx="237744" cy="237744"/>
+            <a:off x="6574536" y="2363724"/>
+            <a:ext cx="256032" cy="256032"/>
           </a:xfrm>
           <a:prstGeom prst="rect">
             <a:avLst/>
@@ -6022,33 +6304,33 @@
       </p:pic>
       <p:sp>
         <p:nvSpPr>
-          <p:cNvPr id="18" name="card"/>
+          <p:cNvPr id="17" name="card"/>
           <p:cNvSpPr/>
           <p:nvPr/>
         </p:nvSpPr>
         <p:spPr>
           <a:xfrm>
-            <a:off x="6871716" y="1828800"/>
-            <a:ext cx="1723644" cy="1463040"/>
+            <a:off x="6894576" y="1691640"/>
+            <a:ext cx="1746504" cy="1600200"/>
           </a:xfrm>
           <a:prstGeom prst="roundRect">
             <a:avLst>
-              <a:gd name="adj" fmla="val 7500"/>
+              <a:gd name="adj" fmla="val 5714"/>
             </a:avLst>
           </a:prstGeom>
           <a:solidFill>
-            <a:schemeClr val="accent1"/>
-          </a:solidFill>
-          <a:ln w="19050">
+            <a:srgbClr val="F5A623"/>
+          </a:solidFill>
+          <a:ln w="25400">
             <a:solidFill>
               <a:srgbClr val="1A1A1A"/>
             </a:solidFill>
             <a:prstDash val="solid"/>
           </a:ln>
           <a:effectLst>
-            <a:outerShdw sx="100000" sy="100000" kx="0" ky="0" algn="bl" rotWithShape="0" blurRad="101600" dist="38100" dir="2700000">
-              <a:srgbClr val="000000">
-                <a:alpha val="18000"/>
+            <a:outerShdw sx="100000" sy="100000" kx="0" ky="0" algn="bl" rotWithShape="0" blurRad="101600" dist="50800" dir="2700000">
+              <a:srgbClr val="1A1A1A">
+                <a:alpha val="100000"/>
               </a:srgbClr>
             </a:outerShdw>
           </a:effectLst>
@@ -6056,14 +6338,59 @@
       </p:sp>
       <p:sp>
         <p:nvSpPr>
-          <p:cNvPr id="19" name="Text 13"/>
+          <p:cNvPr id="18" name="Text 12"/>
           <p:cNvSpPr txBox="1"/>
           <p:nvPr/>
         </p:nvSpPr>
         <p:spPr>
-          <a:xfrm>
-            <a:off x="6871716" y="1993392"/>
-            <a:ext cx="1723644" cy="274320"/>
+          <a:xfrm rot="-180000">
+            <a:off x="7310628" y="1545336"/>
+            <a:ext cx="914400" cy="292608"/>
+          </a:xfrm>
+          <a:prstGeom prst="rect">
+            <a:avLst/>
+          </a:prstGeom>
+          <a:solidFill>
+            <a:srgbClr val="1A1A1A"/>
+          </a:solidFill>
+          <a:ln>
+            <a:solidFill>
+              <a:srgbClr val="1A1A1A"/>
+            </a:solidFill>
+          </a:ln>
+        </p:spPr>
+        <p:txBody>
+          <a:bodyPr wrap="square" lIns="0" tIns="0" rIns="0" bIns="0" rtlCol="0" anchor="ctr"/>
+          <a:lstStyle/>
+          <a:p>
+            <a:pPr algn="ctr" indent="0" marL="0">
+              <a:buNone/>
+            </a:pPr>
+            <a:r>
+              <a:rPr lang="ja-JP" altLang="en-US" sz="1000" dirty="0">
+                <a:solidFill>
+                  <a:srgbClr val="FFFFFF"/>
+                </a:solidFill>
+                <a:latin typeface="Dela Gothic One" pitchFamily="34" charset="0"/>
+                <a:ea typeface="けいふぉんと" pitchFamily="34" charset="-122"/>
+                <a:cs typeface="Dela Gothic One" pitchFamily="34" charset="-120"/>
+              </a:rPr>
+              <a:t>STEP 4</a:t>
+            </a:r>
+            <a:endParaRPr lang="ja-JP" sz="1000" dirty="0"/>
+          </a:p>
+        </p:txBody>
+      </p:sp>
+      <p:sp>
+        <p:nvSpPr>
+          <p:cNvPr id="19" name="flow-node"/>
+          <p:cNvSpPr txBox="1"/>
+          <p:nvPr/>
+        </p:nvSpPr>
+        <p:spPr>
+          <a:xfrm>
+            <a:off x="7004304" y="1965960"/>
+            <a:ext cx="1527048" cy="1234440"/>
           </a:xfrm>
           <a:prstGeom prst="rect">
             <a:avLst/>
@@ -6072,144 +6399,94 @@
           <a:ln/>
         </p:spPr>
         <p:txBody>
-          <a:bodyPr wrap="square" lIns="0" tIns="0" rIns="0" bIns="0" rtlCol="0" anchor="ctr"/>
+          <a:bodyPr wrap="square" lIns="0" tIns="0" rIns="0" bIns="0" rtlCol="0" anchor="ctr">
+            <a:normAutofit/>
+          </a:bodyPr>
           <a:lstStyle/>
           <a:p>
             <a:pPr algn="ctr" indent="0" marL="0">
               <a:buNone/>
             </a:pPr>
             <a:r>
-              <a:rPr lang="en-US" sz="1000" b="1" dirty="0">
-                <a:solidFill>
-                  <a:schemeClr val="accent2"/>
-                </a:solidFill>
-              </a:rPr>
-              <a:t>STEP 4</a:t>
-            </a:r>
-            <a:endParaRPr lang="en-US" sz="1000" dirty="0"/>
-          </a:p>
-        </p:txBody>
-      </p:sp>
-      <p:sp>
-        <p:nvSpPr>
-          <p:cNvPr id="20" name="flow-node"/>
+              <a:rPr lang="ja-JP" altLang="en-US" sz="1400" b="1" dirty="0">
+                <a:solidFill>
+                  <a:srgbClr val="1A1A1A"/>
+                </a:solidFill>
+                <a:latin typeface="Noto Sans JP" pitchFamily="34" charset="0"/>
+                <a:ea typeface="Noto Sans JP" pitchFamily="34" charset="-122"/>
+                <a:cs typeface="Noto Sans JP" pitchFamily="34" charset="-120"/>
+              </a:rPr>
+              <a:t>設計シートにまとめる</a:t>
+            </a:r>
+            <a:endParaRPr lang="ja-JP" sz="1400" dirty="0"/>
+          </a:p>
+        </p:txBody>
+      </p:sp>
+      <p:sp>
+        <p:nvSpPr>
+          <p:cNvPr id="20" name="Text 14"/>
           <p:cNvSpPr txBox="1"/>
           <p:nvPr/>
         </p:nvSpPr>
         <p:spPr>
-          <a:xfrm>
-            <a:off x="6963156" y="2286000"/>
-            <a:ext cx="1540764" cy="868680"/>
-          </a:xfrm>
-          <a:prstGeom prst="rect">
-            <a:avLst/>
-          </a:prstGeom>
-          <a:noFill/>
-          <a:ln/>
-        </p:spPr>
-        <p:txBody>
-          <a:bodyPr wrap="square" lIns="0" tIns="0" rIns="0" bIns="0" rtlCol="0" anchor="ctr"/>
+          <a:xfrm rot="-60000">
+            <a:off x="502920" y="3794760"/>
+            <a:ext cx="8138160" cy="502920"/>
+          </a:xfrm>
+          <a:prstGeom prst="rect">
+            <a:avLst/>
+          </a:prstGeom>
+          <a:solidFill>
+            <a:srgbClr val="DD6420"/>
+          </a:solidFill>
+          <a:ln w="19050">
+            <a:solidFill>
+              <a:srgbClr val="1A1A1A"/>
+            </a:solidFill>
+          </a:ln>
+          <a:effectLst>
+            <a:outerShdw sx="100000" sy="100000" kx="0" ky="0" algn="bl" rotWithShape="0" blurRad="101600" dist="38100" dir="2700000">
+              <a:srgbClr val="1A1A1A">
+                <a:alpha val="100000"/>
+              </a:srgbClr>
+            </a:outerShdw>
+          </a:effectLst>
+        </p:spPr>
+        <p:txBody>
+          <a:bodyPr wrap="square" lIns="0" tIns="1905" rIns="1905" bIns="0" rtlCol="0" anchor="ctr">
+            <a:normAutofit/>
+          </a:bodyPr>
           <a:lstStyle/>
           <a:p>
             <a:pPr algn="ctr" indent="0" marL="0">
               <a:buNone/>
             </a:pPr>
             <a:r>
-              <a:rPr lang="en-US" sz="1400" b="1" dirty="0">
-                <a:solidFill>
-                  <a:schemeClr val="tx1"/>
-                </a:solidFill>
-              </a:rPr>
-              <a:t>設計シートにまとめる</a:t>
-            </a:r>
-            <a:endParaRPr lang="en-US" sz="1400" dirty="0"/>
-          </a:p>
-        </p:txBody>
-      </p:sp>
-      <p:sp>
-        <p:nvSpPr>
-          <p:cNvPr id="21" name="foot-box"/>
-          <p:cNvSpPr/>
-          <p:nvPr/>
-        </p:nvSpPr>
-        <p:spPr>
-          <a:xfrm>
-            <a:off x="548640" y="3794760"/>
-            <a:ext cx="8046720" cy="502920"/>
-          </a:xfrm>
-          <a:prstGeom prst="roundRect">
-            <a:avLst>
-              <a:gd name="adj" fmla="val 18182"/>
-            </a:avLst>
-          </a:prstGeom>
-          <a:solidFill>
-            <a:schemeClr val="bg2"/>
-          </a:solidFill>
-          <a:ln w="12700">
-            <a:solidFill>
-              <a:schemeClr val="bg2"/>
-            </a:solidFill>
-            <a:prstDash val="solid"/>
-          </a:ln>
-        </p:spPr>
-      </p:sp>
-      <p:pic>
-        <p:nvPicPr>
-          <p:cNvPr id="22" name="foot-icon" descr="preencoded.png">    </p:cNvPr>
-          <p:cNvPicPr>
-            <a:picLocks noChangeAspect="1"/>
-          </p:cNvPicPr>
-          <p:nvPr/>
-        </p:nvPicPr>
-        <p:blipFill>
-          <a:blip r:embed="rId4"/>
-          <a:stretch>
-            <a:fillRect/>
-          </a:stretch>
-        </p:blipFill>
-        <p:spPr>
-          <a:xfrm>
-            <a:off x="685800" y="3922776"/>
-            <a:ext cx="246888" cy="246888"/>
-          </a:xfrm>
-          <a:prstGeom prst="rect">
-            <a:avLst/>
-          </a:prstGeom>
-        </p:spPr>
-      </p:pic>
-      <p:sp>
-        <p:nvSpPr>
-          <p:cNvPr id="23" name="foot-text"/>
-          <p:cNvSpPr txBox="1"/>
-          <p:nvPr/>
-        </p:nvSpPr>
-        <p:spPr>
-          <a:xfrm>
-            <a:off x="1051560" y="3794760"/>
-            <a:ext cx="7406640" cy="502920"/>
-          </a:xfrm>
-          <a:prstGeom prst="rect">
-            <a:avLst/>
-          </a:prstGeom>
-          <a:noFill/>
-          <a:ln/>
-        </p:spPr>
-        <p:txBody>
-          <a:bodyPr wrap="square" lIns="0" tIns="0" rIns="0" bIns="0" rtlCol="0" anchor="ctr"/>
-          <a:lstStyle/>
-          <a:p>
-            <a:pPr indent="0" marL="0">
-              <a:buNone/>
-            </a:pPr>
-            <a:r>
-              <a:rPr lang="en-US" sz="1150" dirty="0">
-                <a:solidFill>
-                  <a:schemeClr val="tx1"/>
-                </a:solidFill>
-              </a:rPr>
-              <a:t>「足りない情報があれば、1つずつ質問してください」と付けると、AIが聞き役になる</a:t>
-            </a:r>
-            <a:endParaRPr lang="en-US" sz="1150" dirty="0"/>
+              <a:rPr lang="ja-JP" altLang="en-US" sz="1300" b="1" dirty="0">
+                <a:solidFill>
+                  <a:srgbClr val="FFD600"/>
+                </a:solidFill>
+                <a:latin typeface="Noto Sans JP" pitchFamily="34" charset="0"/>
+                <a:ea typeface="Noto Sans JP" pitchFamily="34" charset="-122"/>
+                <a:cs typeface="Noto Sans JP" pitchFamily="34" charset="-120"/>
+              </a:rPr>
+              <a:t>「足りない情報があれば、1つずつ質問してください」</a:t>
+            </a:r>
+            <a:pPr algn="ctr" indent="0" marL="0">
+              <a:buNone/>
+            </a:pPr>
+            <a:r>
+              <a:rPr lang="ja-JP" altLang="en-US" sz="1300" b="1" dirty="0">
+                <a:solidFill>
+                  <a:srgbClr val="FFFFFF"/>
+                </a:solidFill>
+                <a:latin typeface="Noto Sans JP" pitchFamily="34" charset="0"/>
+                <a:ea typeface="Noto Sans JP" pitchFamily="34" charset="-122"/>
+                <a:cs typeface="Noto Sans JP" pitchFamily="34" charset="-120"/>
+              </a:rPr>
+              <a:t>と付けると、AIが聞き役になる</a:t>
+            </a:r>
+            <a:endParaRPr lang="ja-JP" sz="1300" dirty="0"/>
           </a:p>
         </p:txBody>
       </p:sp>
@@ -6225,8 +6502,8 @@
         </p:nvSpPr>
         <p:spPr>
           <a:xfrm>
-            <a:off x="8229600" y="4773168"/>
-            <a:ext cx="365760" cy="228600"/>
+            <a:off x="8366760" y="4754880"/>
+            <a:ext cx="365760" cy="274320"/>
           </a:xfrm>
           <a:prstGeom prst="rect">
             <a:avLst/>
@@ -6238,20 +6515,23 @@
           </a:extLst>
         </p:spPr>
         <p:txBody>
-          <a:bodyPr/>
+          <a:bodyPr anchor="ctr"/>
           <a:lstStyle>
             <a:lvl1pPr>
-              <a:defRPr sz="900">
-                <a:solidFill>
-                  <a:srgbClr val="5A6872"/>
-                </a:solidFill>
+              <a:defRPr sz="850">
+                <a:solidFill>
+                  <a:srgbClr val="FFFFFF"/>
+                </a:solidFill>
+                <a:latin typeface="Noto Sans JP"/>
+                <a:ea typeface="Noto Sans JP"/>
+                <a:cs typeface="Noto Sans JP"/>
               </a:defRPr>
             </a:lvl1pPr>
           </a:lstStyle>
           <a:p>
             <a:pPr algn="r"/>
             <a:fld id="{F7021451-1387-4CA6-816F-3879F97B5CBC}" type="slidenum">
-              <a:rPr b="0" lang="en-US"/>
+              <a:rPr b="1" lang="en-US"/>
               <a:t>6</a:t>
             </a:fld>
             <a:endParaRPr lang="en-US"/>
@@ -6286,15 +6566,58 @@
       <p:sp>
         <p:nvSpPr>
           <p:cNvPr id="2" name="Text 0"/>
-          <p:cNvSpPr/>
-          <p:nvPr>
-            <p:ph idx="100" type="title" hasCustomPrompt="1"/>
-          </p:nvPr>
-        </p:nvSpPr>
-        <p:spPr>
-          <a:xfrm>
-            <a:off x="548640" y="658368"/>
-            <a:ext cx="8046720" cy="566928"/>
+          <p:cNvSpPr txBox="1"/>
+          <p:nvPr/>
+        </p:nvSpPr>
+        <p:spPr>
+          <a:xfrm rot="-180000">
+            <a:off x="411480" y="201168"/>
+            <a:ext cx="1915668" cy="352044"/>
+          </a:xfrm>
+          <a:prstGeom prst="rect">
+            <a:avLst/>
+          </a:prstGeom>
+          <a:solidFill>
+            <a:srgbClr val="DD6420"/>
+          </a:solidFill>
+          <a:ln>
+            <a:solidFill>
+              <a:srgbClr val="DD6420"/>
+            </a:solidFill>
+          </a:ln>
+        </p:spPr>
+        <p:txBody>
+          <a:bodyPr wrap="square" lIns="0" tIns="0" rIns="0" bIns="0" rtlCol="0" anchor="ctr"/>
+          <a:lstStyle/>
+          <a:p>
+            <a:pPr algn="ctr" indent="0" marL="0">
+              <a:buNone/>
+            </a:pPr>
+            <a:r>
+              <a:rPr lang="ja-JP" altLang="en-US" sz="1100" dirty="0">
+                <a:solidFill>
+                  <a:srgbClr val="FFFFFF"/>
+                </a:solidFill>
+                <a:latin typeface="Dela Gothic One" pitchFamily="34" charset="0"/>
+                <a:ea typeface="けいふぉんと" pitchFamily="34" charset="-122"/>
+                <a:cs typeface="Dela Gothic One" pitchFamily="34" charset="-120"/>
+              </a:rPr>
+              <a:t>ハンズオン② 20分</a:t>
+            </a:r>
+            <a:endParaRPr lang="ja-JP" sz="1100" dirty="0"/>
+          </a:p>
+        </p:txBody>
+      </p:sp>
+      <p:sp>
+        <p:nvSpPr>
+          <p:cNvPr id="3" name="Text 1"/>
+          <p:cNvSpPr txBox="1"/>
+          <p:nvPr/>
+        </p:nvSpPr>
+        <p:spPr>
+          <a:xfrm>
+            <a:off x="411480" y="502920"/>
+            <a:ext cx="8321040" cy="685800"/>
           </a:xfrm>
           <a:prstGeom prst="rect">
             <a:avLst/>
@@ -6303,122 +6626,118 @@
           <a:ln/>
         </p:spPr>
         <p:txBody>
-          <a:bodyPr wrap="square" lIns="0" tIns="0" rIns="0" bIns="0" rtlCol="0" anchor="ctr"/>
-          <a:lstStyle/>
-          <a:p>
-            <a:pPr algn="l" indent="0" marL="0">
-              <a:buNone/>
-            </a:pPr>
-            <a:r>
-              <a:rPr lang="en-US" sz="2400" b="1" dirty="0">
-                <a:solidFill>
-                  <a:schemeClr val="tx1"/>
-                </a:solidFill>
+          <a:bodyPr wrap="square" lIns="0" tIns="0" rIns="0" bIns="0" rtlCol="0" anchor="ctr">
+            <a:normAutofit/>
+          </a:bodyPr>
+          <a:lstStyle/>
+          <a:p>
+            <a:pPr indent="0" marL="0">
+              <a:buNone/>
+            </a:pPr>
+            <a:r>
+              <a:rPr lang="ja-JP" altLang="en-US" sz="2600" dirty="0">
+                <a:solidFill>
+                  <a:srgbClr val="1A1A1A"/>
+                </a:solidFill>
+                <a:latin typeface="Dela Gothic One" pitchFamily="34" charset="0"/>
+                <a:ea typeface="けいふぉんと" pitchFamily="34" charset="-122"/>
+                <a:cs typeface="Dela Gothic One" pitchFamily="34" charset="-120"/>
               </a:rPr>
               <a:t>設計シートをAIと仕上げる</a:t>
             </a:r>
-            <a:endParaRPr lang="en-US" sz="2400" dirty="0"/>
-          </a:p>
-        </p:txBody>
-      </p:sp>
-      <p:sp>
-        <p:nvSpPr>
-          <p:cNvPr id="3" name="chip"/>
+            <a:endParaRPr lang="ja-JP" sz="2600" dirty="0"/>
+          </a:p>
+        </p:txBody>
+      </p:sp>
+      <p:sp>
+        <p:nvSpPr>
+          <p:cNvPr id="5" name="card"/>
           <p:cNvSpPr/>
           <p:nvPr/>
         </p:nvSpPr>
         <p:spPr>
           <a:xfrm>
-            <a:off x="548640" y="292608"/>
-            <a:ext cx="1755648" cy="292608"/>
+            <a:off x="502920" y="1604772"/>
+            <a:ext cx="8138160" cy="566928"/>
           </a:xfrm>
           <a:prstGeom prst="roundRect">
             <a:avLst>
-              <a:gd name="adj" fmla="val 50000"/>
+              <a:gd name="adj" fmla="val 16129"/>
             </a:avLst>
           </a:prstGeom>
           <a:solidFill>
-            <a:schemeClr val="accent2"/>
-          </a:solidFill>
-          <a:ln w="12700">
-            <a:solidFill>
-              <a:schemeClr val="accent2"/>
-            </a:solidFill>
-            <a:prstDash val="solid"/>
-          </a:ln>
-        </p:spPr>
-      </p:sp>
-      <p:sp>
-        <p:nvSpPr>
-          <p:cNvPr id="4" name="chip-text"/>
-          <p:cNvSpPr txBox="1"/>
-          <p:nvPr/>
-        </p:nvSpPr>
-        <p:spPr>
-          <a:xfrm>
-            <a:off x="548640" y="292608"/>
-            <a:ext cx="1755648" cy="292608"/>
-          </a:xfrm>
-          <a:prstGeom prst="rect">
-            <a:avLst/>
-          </a:prstGeom>
-          <a:noFill/>
-          <a:ln/>
-        </p:spPr>
-        <p:txBody>
-          <a:bodyPr wrap="square" lIns="0" tIns="0" rIns="0" bIns="0" rtlCol="0" anchor="ctr"/>
-          <a:lstStyle/>
-          <a:p>
-            <a:pPr algn="ctr" indent="0" marL="0">
-              <a:buNone/>
-            </a:pPr>
-            <a:r>
-              <a:rPr lang="en-US" sz="1100" b="1" dirty="0">
-                <a:solidFill>
-                  <a:schemeClr val="bg1"/>
-                </a:solidFill>
-              </a:rPr>
-              <a:t>ハンズオン② 20分</a:t>
-            </a:r>
-            <a:endParaRPr lang="en-US" sz="1100" dirty="0"/>
-          </a:p>
-        </p:txBody>
-      </p:sp>
-      <p:sp>
-        <p:nvSpPr>
-          <p:cNvPr id="6" name="step-num"/>
-          <p:cNvSpPr/>
-          <p:nvPr/>
-        </p:nvSpPr>
-        <p:spPr>
-          <a:xfrm>
-            <a:off x="548640" y="1787652"/>
-            <a:ext cx="384048" cy="384048"/>
-          </a:xfrm>
-          <a:prstGeom prst="ellipse">
-            <a:avLst/>
-          </a:prstGeom>
-          <a:solidFill>
-            <a:schemeClr val="accent1"/>
-          </a:solidFill>
-          <a:ln w="15875">
+            <a:srgbClr val="FFFFFF"/>
+          </a:solidFill>
+          <a:ln w="25400">
             <a:solidFill>
               <a:srgbClr val="1A1A1A"/>
             </a:solidFill>
             <a:prstDash val="solid"/>
           </a:ln>
-        </p:spPr>
-      </p:sp>
-      <p:sp>
-        <p:nvSpPr>
-          <p:cNvPr id="7" name="step-num-text"/>
+          <a:effectLst>
+            <a:outerShdw sx="100000" sy="100000" kx="0" ky="0" algn="bl" rotWithShape="0" blurRad="101600" dist="38100" dir="2700000">
+              <a:srgbClr val="1A1A1A">
+                <a:alpha val="100000"/>
+              </a:srgbClr>
+            </a:outerShdw>
+          </a:effectLst>
+        </p:spPr>
+      </p:sp>
+      <p:sp>
+        <p:nvSpPr>
+          <p:cNvPr id="6" name="Text 3"/>
           <p:cNvSpPr txBox="1"/>
           <p:nvPr/>
         </p:nvSpPr>
         <p:spPr>
           <a:xfrm>
-            <a:off x="548640" y="1787652"/>
-            <a:ext cx="384048" cy="384048"/>
+            <a:off x="640080" y="1687068"/>
+            <a:ext cx="402336" cy="402336"/>
+          </a:xfrm>
+          <a:prstGeom prst="ellipse">
+            <a:avLst/>
+          </a:prstGeom>
+          <a:solidFill>
+            <a:srgbClr val="DD6420"/>
+          </a:solidFill>
+          <a:ln w="19050">
+            <a:solidFill>
+              <a:srgbClr val="1A1A1A"/>
+            </a:solidFill>
+          </a:ln>
+        </p:spPr>
+        <p:txBody>
+          <a:bodyPr wrap="square" lIns="0" tIns="0" rIns="0" bIns="0" rtlCol="0" anchor="ctr"/>
+          <a:lstStyle/>
+          <a:p>
+            <a:pPr algn="ctr" indent="0" marL="0">
+              <a:buNone/>
+            </a:pPr>
+            <a:r>
+              <a:rPr lang="ja-JP" altLang="en-US" sz="1500" dirty="0">
+                <a:solidFill>
+                  <a:srgbClr val="FFFFFF"/>
+                </a:solidFill>
+                <a:latin typeface="Dela Gothic One" pitchFamily="34" charset="0"/>
+                <a:ea typeface="けいふぉんと" pitchFamily="34" charset="-122"/>
+                <a:cs typeface="Dela Gothic One" pitchFamily="34" charset="-120"/>
+              </a:rPr>
+              <a:t>1</a:t>
+            </a:r>
+            <a:endParaRPr lang="ja-JP" sz="1500" dirty="0"/>
+          </a:p>
+        </p:txBody>
+      </p:sp>
+      <p:sp>
+        <p:nvSpPr>
+          <p:cNvPr id="7" name="step-text"/>
+          <p:cNvSpPr txBox="1"/>
+          <p:nvPr/>
+        </p:nvSpPr>
+        <p:spPr>
+          <a:xfrm>
+            <a:off x="1234440" y="1604772"/>
+            <a:ext cx="7269480" cy="566928"/>
           </a:xfrm>
           <a:prstGeom prst="rect">
             <a:avLst/>
@@ -6427,95 +6746,118 @@
           <a:ln/>
         </p:spPr>
         <p:txBody>
-          <a:bodyPr wrap="square" lIns="0" tIns="0" rIns="0" bIns="0" rtlCol="0" anchor="ctr"/>
-          <a:lstStyle/>
-          <a:p>
-            <a:pPr algn="ctr" indent="0" marL="0">
-              <a:buNone/>
-            </a:pPr>
-            <a:r>
-              <a:rPr lang="en-US" sz="1400" b="1" dirty="0">
-                <a:solidFill>
-                  <a:schemeClr val="tx1"/>
-                </a:solidFill>
-              </a:rPr>
-              <a:t>1</a:t>
-            </a:r>
-            <a:endParaRPr lang="en-US" sz="1400" dirty="0"/>
-          </a:p>
-        </p:txBody>
-      </p:sp>
-      <p:sp>
-        <p:nvSpPr>
-          <p:cNvPr id="8" name="step-text"/>
-          <p:cNvSpPr txBox="1"/>
-          <p:nvPr/>
-        </p:nvSpPr>
-        <p:spPr>
-          <a:xfrm>
-            <a:off x="1097280" y="1677924"/>
-            <a:ext cx="7498080" cy="603504"/>
-          </a:xfrm>
-          <a:prstGeom prst="rect">
-            <a:avLst/>
-          </a:prstGeom>
-          <a:noFill/>
-          <a:ln/>
-        </p:spPr>
-        <p:txBody>
-          <a:bodyPr wrap="square" lIns="0" tIns="0" rIns="0" bIns="0" rtlCol="0" anchor="ctr"/>
+          <a:bodyPr wrap="square" lIns="0" tIns="0" rIns="0" bIns="0" rtlCol="0" anchor="ctr">
+            <a:normAutofit/>
+          </a:bodyPr>
           <a:lstStyle/>
           <a:p>
             <a:pPr indent="0" marL="0">
               <a:buNone/>
             </a:pPr>
             <a:r>
-              <a:rPr lang="en-US" sz="1450" dirty="0">
-                <a:solidFill>
-                  <a:schemeClr val="tx1"/>
-                </a:solidFill>
+              <a:rPr lang="ja-JP" altLang="en-US" sz="1400" b="1" dirty="0">
+                <a:solidFill>
+                  <a:srgbClr val="1A1A1A"/>
+                </a:solidFill>
+                <a:latin typeface="Noto Sans JP" pitchFamily="34" charset="0"/>
+                <a:ea typeface="Noto Sans JP" pitchFamily="34" charset="-122"/>
+                <a:cs typeface="Noto Sans JP" pitchFamily="34" charset="-120"/>
               </a:rPr>
               <a:t>第1回の設計シートを貼り付け、P-02「要件の壁打ち」で頼む</a:t>
             </a:r>
-            <a:endParaRPr lang="en-US" sz="1450" dirty="0"/>
-          </a:p>
-        </p:txBody>
-      </p:sp>
-      <p:sp>
-        <p:nvSpPr>
-          <p:cNvPr id="9" name="step-num"/>
+            <a:endParaRPr lang="ja-JP" sz="1400" dirty="0"/>
+          </a:p>
+        </p:txBody>
+      </p:sp>
+      <p:sp>
+        <p:nvSpPr>
+          <p:cNvPr id="8" name="card"/>
           <p:cNvSpPr/>
           <p:nvPr/>
         </p:nvSpPr>
         <p:spPr>
           <a:xfrm>
-            <a:off x="548640" y="2391156"/>
-            <a:ext cx="384048" cy="384048"/>
-          </a:xfrm>
-          <a:prstGeom prst="ellipse">
-            <a:avLst/>
-          </a:prstGeom>
-          <a:solidFill>
-            <a:schemeClr val="accent1"/>
-          </a:solidFill>
-          <a:ln w="15875">
+            <a:off x="502920" y="2299716"/>
+            <a:ext cx="8138160" cy="566928"/>
+          </a:xfrm>
+          <a:prstGeom prst="roundRect">
+            <a:avLst>
+              <a:gd name="adj" fmla="val 16129"/>
+            </a:avLst>
+          </a:prstGeom>
+          <a:solidFill>
+            <a:srgbClr val="FFFFFF"/>
+          </a:solidFill>
+          <a:ln w="25400">
             <a:solidFill>
               <a:srgbClr val="1A1A1A"/>
             </a:solidFill>
             <a:prstDash val="solid"/>
           </a:ln>
-        </p:spPr>
-      </p:sp>
-      <p:sp>
-        <p:nvSpPr>
-          <p:cNvPr id="10" name="step-num-text"/>
+          <a:effectLst>
+            <a:outerShdw sx="100000" sy="100000" kx="0" ky="0" algn="bl" rotWithShape="0" blurRad="101600" dist="38100" dir="2700000">
+              <a:srgbClr val="1A1A1A">
+                <a:alpha val="100000"/>
+              </a:srgbClr>
+            </a:outerShdw>
+          </a:effectLst>
+        </p:spPr>
+      </p:sp>
+      <p:sp>
+        <p:nvSpPr>
+          <p:cNvPr id="9" name="Text 6"/>
           <p:cNvSpPr txBox="1"/>
           <p:nvPr/>
         </p:nvSpPr>
         <p:spPr>
           <a:xfrm>
-            <a:off x="548640" y="2391156"/>
-            <a:ext cx="384048" cy="384048"/>
+            <a:off x="640080" y="2382012"/>
+            <a:ext cx="402336" cy="402336"/>
+          </a:xfrm>
+          <a:prstGeom prst="ellipse">
+            <a:avLst/>
+          </a:prstGeom>
+          <a:solidFill>
+            <a:srgbClr val="DD6420"/>
+          </a:solidFill>
+          <a:ln w="19050">
+            <a:solidFill>
+              <a:srgbClr val="1A1A1A"/>
+            </a:solidFill>
+          </a:ln>
+        </p:spPr>
+        <p:txBody>
+          <a:bodyPr wrap="square" lIns="0" tIns="0" rIns="0" bIns="0" rtlCol="0" anchor="ctr"/>
+          <a:lstStyle/>
+          <a:p>
+            <a:pPr algn="ctr" indent="0" marL="0">
+              <a:buNone/>
+            </a:pPr>
+            <a:r>
+              <a:rPr lang="ja-JP" altLang="en-US" sz="1500" dirty="0">
+                <a:solidFill>
+                  <a:srgbClr val="FFFFFF"/>
+                </a:solidFill>
+                <a:latin typeface="Dela Gothic One" pitchFamily="34" charset="0"/>
+                <a:ea typeface="けいふぉんと" pitchFamily="34" charset="-122"/>
+                <a:cs typeface="Dela Gothic One" pitchFamily="34" charset="-120"/>
+              </a:rPr>
+              <a:t>2</a:t>
+            </a:r>
+            <a:endParaRPr lang="ja-JP" sz="1500" dirty="0"/>
+          </a:p>
+        </p:txBody>
+      </p:sp>
+      <p:sp>
+        <p:nvSpPr>
+          <p:cNvPr id="10" name="step-text"/>
+          <p:cNvSpPr txBox="1"/>
+          <p:nvPr/>
+        </p:nvSpPr>
+        <p:spPr>
+          <a:xfrm>
+            <a:off x="1234440" y="2299716"/>
+            <a:ext cx="7269480" cy="566928"/>
           </a:xfrm>
           <a:prstGeom prst="rect">
             <a:avLst/>
@@ -6524,95 +6866,118 @@
           <a:ln/>
         </p:spPr>
         <p:txBody>
-          <a:bodyPr wrap="square" lIns="0" tIns="0" rIns="0" bIns="0" rtlCol="0" anchor="ctr"/>
-          <a:lstStyle/>
-          <a:p>
-            <a:pPr algn="ctr" indent="0" marL="0">
-              <a:buNone/>
-            </a:pPr>
-            <a:r>
-              <a:rPr lang="en-US" sz="1400" b="1" dirty="0">
-                <a:solidFill>
-                  <a:schemeClr val="tx1"/>
-                </a:solidFill>
-              </a:rPr>
-              <a:t>2</a:t>
-            </a:r>
-            <a:endParaRPr lang="en-US" sz="1400" dirty="0"/>
-          </a:p>
-        </p:txBody>
-      </p:sp>
-      <p:sp>
-        <p:nvSpPr>
-          <p:cNvPr id="11" name="step-text"/>
-          <p:cNvSpPr txBox="1"/>
-          <p:nvPr/>
-        </p:nvSpPr>
-        <p:spPr>
-          <a:xfrm>
-            <a:off x="1097280" y="2281428"/>
-            <a:ext cx="7498080" cy="603504"/>
-          </a:xfrm>
-          <a:prstGeom prst="rect">
-            <a:avLst/>
-          </a:prstGeom>
-          <a:noFill/>
-          <a:ln/>
-        </p:spPr>
-        <p:txBody>
-          <a:bodyPr wrap="square" lIns="0" tIns="0" rIns="0" bIns="0" rtlCol="0" anchor="ctr"/>
+          <a:bodyPr wrap="square" lIns="0" tIns="0" rIns="0" bIns="0" rtlCol="0" anchor="ctr">
+            <a:normAutofit/>
+          </a:bodyPr>
           <a:lstStyle/>
           <a:p>
             <a:pPr indent="0" marL="0">
               <a:buNone/>
             </a:pPr>
             <a:r>
-              <a:rPr lang="en-US" sz="1450" dirty="0">
-                <a:solidFill>
-                  <a:schemeClr val="tx1"/>
-                </a:solidFill>
+              <a:rPr lang="ja-JP" altLang="en-US" sz="1400" b="1" dirty="0">
+                <a:solidFill>
+                  <a:srgbClr val="1A1A1A"/>
+                </a:solidFill>
+                <a:latin typeface="Noto Sans JP" pitchFamily="34" charset="0"/>
+                <a:ea typeface="Noto Sans JP" pitchFamily="34" charset="-122"/>
+                <a:cs typeface="Noto Sans JP" pitchFamily="34" charset="-120"/>
               </a:rPr>
               <a:t>AIの質問に答えていく（5〜10問）</a:t>
             </a:r>
-            <a:endParaRPr lang="en-US" sz="1450" dirty="0"/>
-          </a:p>
-        </p:txBody>
-      </p:sp>
-      <p:sp>
-        <p:nvSpPr>
-          <p:cNvPr id="12" name="step-num"/>
+            <a:endParaRPr lang="ja-JP" sz="1400" dirty="0"/>
+          </a:p>
+        </p:txBody>
+      </p:sp>
+      <p:sp>
+        <p:nvSpPr>
+          <p:cNvPr id="11" name="card"/>
           <p:cNvSpPr/>
           <p:nvPr/>
         </p:nvSpPr>
         <p:spPr>
           <a:xfrm>
-            <a:off x="548640" y="2994660"/>
-            <a:ext cx="384048" cy="384048"/>
-          </a:xfrm>
-          <a:prstGeom prst="ellipse">
-            <a:avLst/>
-          </a:prstGeom>
-          <a:solidFill>
-            <a:schemeClr val="accent1"/>
-          </a:solidFill>
-          <a:ln w="15875">
+            <a:off x="502920" y="2994660"/>
+            <a:ext cx="8138160" cy="566928"/>
+          </a:xfrm>
+          <a:prstGeom prst="roundRect">
+            <a:avLst>
+              <a:gd name="adj" fmla="val 16129"/>
+            </a:avLst>
+          </a:prstGeom>
+          <a:solidFill>
+            <a:srgbClr val="FFFFFF"/>
+          </a:solidFill>
+          <a:ln w="25400">
             <a:solidFill>
               <a:srgbClr val="1A1A1A"/>
             </a:solidFill>
             <a:prstDash val="solid"/>
           </a:ln>
-        </p:spPr>
-      </p:sp>
-      <p:sp>
-        <p:nvSpPr>
-          <p:cNvPr id="13" name="step-num-text"/>
+          <a:effectLst>
+            <a:outerShdw sx="100000" sy="100000" kx="0" ky="0" algn="bl" rotWithShape="0" blurRad="101600" dist="38100" dir="2700000">
+              <a:srgbClr val="1A1A1A">
+                <a:alpha val="100000"/>
+              </a:srgbClr>
+            </a:outerShdw>
+          </a:effectLst>
+        </p:spPr>
+      </p:sp>
+      <p:sp>
+        <p:nvSpPr>
+          <p:cNvPr id="12" name="Text 9"/>
           <p:cNvSpPr txBox="1"/>
           <p:nvPr/>
         </p:nvSpPr>
         <p:spPr>
           <a:xfrm>
-            <a:off x="548640" y="2994660"/>
-            <a:ext cx="384048" cy="384048"/>
+            <a:off x="640080" y="3076956"/>
+            <a:ext cx="402336" cy="402336"/>
+          </a:xfrm>
+          <a:prstGeom prst="ellipse">
+            <a:avLst/>
+          </a:prstGeom>
+          <a:solidFill>
+            <a:srgbClr val="DD6420"/>
+          </a:solidFill>
+          <a:ln w="19050">
+            <a:solidFill>
+              <a:srgbClr val="1A1A1A"/>
+            </a:solidFill>
+          </a:ln>
+        </p:spPr>
+        <p:txBody>
+          <a:bodyPr wrap="square" lIns="0" tIns="0" rIns="0" bIns="0" rtlCol="0" anchor="ctr"/>
+          <a:lstStyle/>
+          <a:p>
+            <a:pPr algn="ctr" indent="0" marL="0">
+              <a:buNone/>
+            </a:pPr>
+            <a:r>
+              <a:rPr lang="ja-JP" altLang="en-US" sz="1500" dirty="0">
+                <a:solidFill>
+                  <a:srgbClr val="FFFFFF"/>
+                </a:solidFill>
+                <a:latin typeface="Dela Gothic One" pitchFamily="34" charset="0"/>
+                <a:ea typeface="けいふぉんと" pitchFamily="34" charset="-122"/>
+                <a:cs typeface="Dela Gothic One" pitchFamily="34" charset="-120"/>
+              </a:rPr>
+              <a:t>3</a:t>
+            </a:r>
+            <a:endParaRPr lang="ja-JP" sz="1500" dirty="0"/>
+          </a:p>
+        </p:txBody>
+      </p:sp>
+      <p:sp>
+        <p:nvSpPr>
+          <p:cNvPr id="13" name="step-text"/>
+          <p:cNvSpPr txBox="1"/>
+          <p:nvPr/>
+        </p:nvSpPr>
+        <p:spPr>
+          <a:xfrm>
+            <a:off x="1234440" y="2994660"/>
+            <a:ext cx="7269480" cy="566928"/>
           </a:xfrm>
           <a:prstGeom prst="rect">
             <a:avLst/>
@@ -6621,144 +6986,80 @@
           <a:ln/>
         </p:spPr>
         <p:txBody>
-          <a:bodyPr wrap="square" lIns="0" tIns="0" rIns="0" bIns="0" rtlCol="0" anchor="ctr"/>
+          <a:bodyPr wrap="square" lIns="0" tIns="0" rIns="0" bIns="0" rtlCol="0" anchor="ctr">
+            <a:normAutofit/>
+          </a:bodyPr>
+          <a:lstStyle/>
+          <a:p>
+            <a:pPr indent="0" marL="0">
+              <a:buNone/>
+            </a:pPr>
+            <a:r>
+              <a:rPr lang="ja-JP" altLang="en-US" sz="1400" b="1" dirty="0">
+                <a:solidFill>
+                  <a:srgbClr val="1A1A1A"/>
+                </a:solidFill>
+                <a:latin typeface="Noto Sans JP" pitchFamily="34" charset="0"/>
+                <a:ea typeface="Noto Sans JP" pitchFamily="34" charset="-122"/>
+                <a:cs typeface="Noto Sans JP" pitchFamily="34" charset="-120"/>
+              </a:rPr>
+              <a:t>「設計シートの形にまとめて」と頼み、自分の言葉で直す</a:t>
+            </a:r>
+            <a:endParaRPr lang="ja-JP" sz="1400" dirty="0"/>
+          </a:p>
+        </p:txBody>
+      </p:sp>
+      <p:sp>
+        <p:nvSpPr>
+          <p:cNvPr id="14" name="Text 11"/>
+          <p:cNvSpPr txBox="1"/>
+          <p:nvPr/>
+        </p:nvSpPr>
+        <p:spPr>
+          <a:xfrm rot="-60000">
+            <a:off x="502920" y="4005072"/>
+            <a:ext cx="8138160" cy="502920"/>
+          </a:xfrm>
+          <a:prstGeom prst="rect">
+            <a:avLst/>
+          </a:prstGeom>
+          <a:solidFill>
+            <a:srgbClr val="DD6420"/>
+          </a:solidFill>
+          <a:ln w="19050">
+            <a:solidFill>
+              <a:srgbClr val="1A1A1A"/>
+            </a:solidFill>
+          </a:ln>
+          <a:effectLst>
+            <a:outerShdw sx="100000" sy="100000" kx="0" ky="0" algn="bl" rotWithShape="0" blurRad="101600" dist="38100" dir="2700000">
+              <a:srgbClr val="1A1A1A">
+                <a:alpha val="100000"/>
+              </a:srgbClr>
+            </a:outerShdw>
+          </a:effectLst>
+        </p:spPr>
+        <p:txBody>
+          <a:bodyPr wrap="square" lIns="0" tIns="1905" rIns="1905" bIns="0" rtlCol="0" anchor="ctr">
+            <a:normAutofit/>
+          </a:bodyPr>
           <a:lstStyle/>
           <a:p>
             <a:pPr algn="ctr" indent="0" marL="0">
               <a:buNone/>
             </a:pPr>
             <a:r>
-              <a:rPr lang="en-US" sz="1400" b="1" dirty="0">
-                <a:solidFill>
-                  <a:schemeClr val="tx1"/>
-                </a:solidFill>
-              </a:rPr>
-              <a:t>3</a:t>
-            </a:r>
-            <a:endParaRPr lang="en-US" sz="1400" dirty="0"/>
-          </a:p>
-        </p:txBody>
-      </p:sp>
-      <p:sp>
-        <p:nvSpPr>
-          <p:cNvPr id="14" name="step-text"/>
-          <p:cNvSpPr txBox="1"/>
-          <p:nvPr/>
-        </p:nvSpPr>
-        <p:spPr>
-          <a:xfrm>
-            <a:off x="1097280" y="2884932"/>
-            <a:ext cx="7498080" cy="603504"/>
-          </a:xfrm>
-          <a:prstGeom prst="rect">
-            <a:avLst/>
-          </a:prstGeom>
-          <a:noFill/>
-          <a:ln/>
-        </p:spPr>
-        <p:txBody>
-          <a:bodyPr wrap="square" lIns="0" tIns="0" rIns="0" bIns="0" rtlCol="0" anchor="ctr"/>
-          <a:lstStyle/>
-          <a:p>
-            <a:pPr indent="0" marL="0">
-              <a:buNone/>
-            </a:pPr>
-            <a:r>
-              <a:rPr lang="en-US" sz="1450" dirty="0">
-                <a:solidFill>
-                  <a:schemeClr val="tx1"/>
-                </a:solidFill>
-              </a:rPr>
-              <a:t>「設計シートの形にまとめて」と頼み、自分の言葉で直す</a:t>
-            </a:r>
-            <a:endParaRPr lang="en-US" sz="1450" dirty="0"/>
-          </a:p>
-        </p:txBody>
-      </p:sp>
-      <p:sp>
-        <p:nvSpPr>
-          <p:cNvPr id="15" name="foot-box"/>
-          <p:cNvSpPr/>
-          <p:nvPr/>
-        </p:nvSpPr>
-        <p:spPr>
-          <a:xfrm>
-            <a:off x="548640" y="3977640"/>
-            <a:ext cx="8046720" cy="502920"/>
-          </a:xfrm>
-          <a:prstGeom prst="roundRect">
-            <a:avLst>
-              <a:gd name="adj" fmla="val 18182"/>
-            </a:avLst>
-          </a:prstGeom>
-          <a:solidFill>
-            <a:schemeClr val="bg2"/>
-          </a:solidFill>
-          <a:ln w="12700">
-            <a:solidFill>
-              <a:schemeClr val="bg2"/>
-            </a:solidFill>
-            <a:prstDash val="solid"/>
-          </a:ln>
-        </p:spPr>
-      </p:sp>
-      <p:pic>
-        <p:nvPicPr>
-          <p:cNvPr id="16" name="foot-icon" descr="preencoded.png">    </p:cNvPr>
-          <p:cNvPicPr>
-            <a:picLocks noChangeAspect="1"/>
-          </p:cNvPicPr>
-          <p:nvPr/>
-        </p:nvPicPr>
-        <p:blipFill>
-          <a:blip r:embed="rId1"/>
-          <a:stretch>
-            <a:fillRect/>
-          </a:stretch>
-        </p:blipFill>
-        <p:spPr>
-          <a:xfrm>
-            <a:off x="685800" y="4105656"/>
-            <a:ext cx="246888" cy="246888"/>
-          </a:xfrm>
-          <a:prstGeom prst="rect">
-            <a:avLst/>
-          </a:prstGeom>
-        </p:spPr>
-      </p:pic>
-      <p:sp>
-        <p:nvSpPr>
-          <p:cNvPr id="17" name="foot-text"/>
-          <p:cNvSpPr txBox="1"/>
-          <p:nvPr/>
-        </p:nvSpPr>
-        <p:spPr>
-          <a:xfrm>
-            <a:off x="1051560" y="3977640"/>
-            <a:ext cx="7406640" cy="502920"/>
-          </a:xfrm>
-          <a:prstGeom prst="rect">
-            <a:avLst/>
-          </a:prstGeom>
-          <a:noFill/>
-          <a:ln/>
-        </p:spPr>
-        <p:txBody>
-          <a:bodyPr wrap="square" lIns="0" tIns="0" rIns="0" bIns="0" rtlCol="0" anchor="ctr"/>
-          <a:lstStyle/>
-          <a:p>
-            <a:pPr indent="0" marL="0">
-              <a:buNone/>
-            </a:pPr>
-            <a:r>
-              <a:rPr lang="en-US" sz="1150" dirty="0">
-                <a:solidFill>
-                  <a:schemeClr val="tx1"/>
-                </a:solidFill>
+              <a:rPr lang="ja-JP" altLang="en-US" sz="1300" b="1" dirty="0">
+                <a:solidFill>
+                  <a:srgbClr val="FFFFFF"/>
+                </a:solidFill>
+                <a:latin typeface="Noto Sans JP" pitchFamily="34" charset="0"/>
+                <a:ea typeface="Noto Sans JP" pitchFamily="34" charset="-122"/>
+                <a:cs typeface="Noto Sans JP" pitchFamily="34" charset="-120"/>
               </a:rPr>
               <a:t>完成の目安：使う人／入力する項目／見たい画面／知らせたいタイミング が埋まっている</a:t>
             </a:r>
-            <a:endParaRPr lang="en-US" sz="1150" dirty="0"/>
+            <a:endParaRPr lang="ja-JP" sz="1300" dirty="0"/>
           </a:p>
         </p:txBody>
       </p:sp>
@@ -6774,8 +7075,8 @@
         </p:nvSpPr>
         <p:spPr>
           <a:xfrm>
-            <a:off x="8229600" y="4773168"/>
-            <a:ext cx="365760" cy="228600"/>
+            <a:off x="8366760" y="4754880"/>
+            <a:ext cx="365760" cy="274320"/>
           </a:xfrm>
           <a:prstGeom prst="rect">
             <a:avLst/>
@@ -6787,20 +7088,23 @@
           </a:extLst>
         </p:spPr>
         <p:txBody>
-          <a:bodyPr/>
+          <a:bodyPr anchor="ctr"/>
           <a:lstStyle>
             <a:lvl1pPr>
-              <a:defRPr sz="900">
-                <a:solidFill>
-                  <a:srgbClr val="5A6872"/>
-                </a:solidFill>
+              <a:defRPr sz="850">
+                <a:solidFill>
+                  <a:srgbClr val="FFFFFF"/>
+                </a:solidFill>
+                <a:latin typeface="Noto Sans JP"/>
+                <a:ea typeface="Noto Sans JP"/>
+                <a:cs typeface="Noto Sans JP"/>
               </a:defRPr>
             </a:lvl1pPr>
           </a:lstStyle>
           <a:p>
             <a:pPr algn="r"/>
             <a:fld id="{F7021451-1387-4CA6-816F-3879F97B5CBC}" type="slidenum">
-              <a:rPr b="0" lang="en-US"/>
+              <a:rPr b="1" lang="en-US"/>
               <a:t>7</a:t>
             </a:fld>
             <a:endParaRPr lang="en-US"/>
@@ -6835,15 +7139,58 @@
       <p:sp>
         <p:nvSpPr>
           <p:cNvPr id="2" name="Text 0"/>
-          <p:cNvSpPr/>
-          <p:nvPr>
-            <p:ph idx="100" type="title" hasCustomPrompt="1"/>
-          </p:nvPr>
-        </p:nvSpPr>
-        <p:spPr>
-          <a:xfrm>
-            <a:off x="548640" y="658368"/>
-            <a:ext cx="8046720" cy="566928"/>
+          <p:cNvSpPr txBox="1"/>
+          <p:nvPr/>
+        </p:nvSpPr>
+        <p:spPr>
+          <a:xfrm rot="-180000">
+            <a:off x="411480" y="201168"/>
+            <a:ext cx="1040587" cy="352044"/>
+          </a:xfrm>
+          <a:prstGeom prst="rect">
+            <a:avLst/>
+          </a:prstGeom>
+          <a:solidFill>
+            <a:srgbClr val="1A1A1A"/>
+          </a:solidFill>
+          <a:ln>
+            <a:solidFill>
+              <a:srgbClr val="1A1A1A"/>
+            </a:solidFill>
+          </a:ln>
+        </p:spPr>
+        <p:txBody>
+          <a:bodyPr wrap="square" lIns="0" tIns="0" rIns="0" bIns="0" rtlCol="0" anchor="ctr"/>
+          <a:lstStyle/>
+          <a:p>
+            <a:pPr algn="ctr" indent="0" marL="0">
+              <a:buNone/>
+            </a:pPr>
+            <a:r>
+              <a:rPr lang="ja-JP" altLang="en-US" sz="1100" dirty="0">
+                <a:solidFill>
+                  <a:srgbClr val="FFFFFF"/>
+                </a:solidFill>
+                <a:latin typeface="Dela Gothic One" pitchFamily="34" charset="0"/>
+                <a:ea typeface="けいふぉんと" pitchFamily="34" charset="-122"/>
+                <a:cs typeface="Dela Gothic One" pitchFamily="34" charset="-120"/>
+              </a:rPr>
+              <a:t>必ず守る</a:t>
+            </a:r>
+            <a:endParaRPr lang="ja-JP" sz="1100" dirty="0"/>
+          </a:p>
+        </p:txBody>
+      </p:sp>
+      <p:sp>
+        <p:nvSpPr>
+          <p:cNvPr id="3" name="Text 1"/>
+          <p:cNvSpPr txBox="1"/>
+          <p:nvPr/>
+        </p:nvSpPr>
+        <p:spPr>
+          <a:xfrm>
+            <a:off x="411480" y="502920"/>
+            <a:ext cx="8321040" cy="685800"/>
           </a:xfrm>
           <a:prstGeom prst="rect">
             <a:avLst/>
@@ -6852,105 +7199,79 @@
           <a:ln/>
         </p:spPr>
         <p:txBody>
-          <a:bodyPr wrap="square" lIns="0" tIns="0" rIns="0" bIns="0" rtlCol="0" anchor="ctr"/>
-          <a:lstStyle/>
-          <a:p>
-            <a:pPr algn="l" indent="0" marL="0">
-              <a:buNone/>
-            </a:pPr>
-            <a:r>
-              <a:rPr lang="en-US" sz="2400" b="1" dirty="0">
-                <a:solidFill>
-                  <a:schemeClr val="tx1"/>
-                </a:solidFill>
+          <a:bodyPr wrap="square" lIns="0" tIns="0" rIns="0" bIns="0" rtlCol="0" anchor="ctr">
+            <a:normAutofit/>
+          </a:bodyPr>
+          <a:lstStyle/>
+          <a:p>
+            <a:pPr indent="0" marL="0">
+              <a:buNone/>
+            </a:pPr>
+            <a:r>
+              <a:rPr lang="ja-JP" altLang="en-US" sz="2600" dirty="0">
+                <a:solidFill>
+                  <a:srgbClr val="1A1A1A"/>
+                </a:solidFill>
+                <a:latin typeface="Dela Gothic One" pitchFamily="34" charset="0"/>
+                <a:ea typeface="けいふぉんと" pitchFamily="34" charset="-122"/>
+                <a:cs typeface="Dela Gothic One" pitchFamily="34" charset="-120"/>
               </a:rPr>
               <a:t>AIに渡してはいけないもの</a:t>
             </a:r>
-            <a:endParaRPr lang="en-US" sz="2400" dirty="0"/>
-          </a:p>
-        </p:txBody>
-      </p:sp>
-      <p:sp>
-        <p:nvSpPr>
-          <p:cNvPr id="3" name="chip"/>
+            <a:endParaRPr lang="ja-JP" sz="2600" dirty="0"/>
+          </a:p>
+        </p:txBody>
+      </p:sp>
+      <p:sp>
+        <p:nvSpPr>
+          <p:cNvPr id="5" name="card"/>
           <p:cNvSpPr/>
           <p:nvPr/>
         </p:nvSpPr>
         <p:spPr>
           <a:xfrm>
-            <a:off x="548640" y="292608"/>
-            <a:ext cx="932688" cy="292608"/>
+            <a:off x="502920" y="1417320"/>
+            <a:ext cx="2542032" cy="2331720"/>
           </a:xfrm>
           <a:prstGeom prst="roundRect">
             <a:avLst>
-              <a:gd name="adj" fmla="val 50000"/>
+              <a:gd name="adj" fmla="val 3922"/>
             </a:avLst>
           </a:prstGeom>
           <a:solidFill>
-            <a:schemeClr val="accent5"/>
-          </a:solidFill>
-          <a:ln w="12700">
+            <a:srgbClr val="FFFFFF"/>
+          </a:solidFill>
+          <a:ln w="25400">
             <a:solidFill>
-              <a:schemeClr val="accent5"/>
+              <a:srgbClr val="1A1A1A"/>
             </a:solidFill>
             <a:prstDash val="solid"/>
           </a:ln>
-        </p:spPr>
-      </p:sp>
-      <p:sp>
-        <p:nvSpPr>
-          <p:cNvPr id="4" name="chip-text"/>
-          <p:cNvSpPr txBox="1"/>
-          <p:nvPr/>
-        </p:nvSpPr>
-        <p:spPr>
-          <a:xfrm>
-            <a:off x="548640" y="292608"/>
-            <a:ext cx="932688" cy="292608"/>
-          </a:xfrm>
-          <a:prstGeom prst="rect">
-            <a:avLst/>
-          </a:prstGeom>
-          <a:noFill/>
-          <a:ln/>
-        </p:spPr>
-        <p:txBody>
-          <a:bodyPr wrap="square" lIns="0" tIns="0" rIns="0" bIns="0" rtlCol="0" anchor="ctr"/>
-          <a:lstStyle/>
-          <a:p>
-            <a:pPr algn="ctr" indent="0" marL="0">
-              <a:buNone/>
-            </a:pPr>
-            <a:r>
-              <a:rPr lang="en-US" sz="1100" b="1" dirty="0">
-                <a:solidFill>
-                  <a:schemeClr val="bg1"/>
-                </a:solidFill>
-              </a:rPr>
-              <a:t>必ず守る</a:t>
-            </a:r>
-            <a:endParaRPr lang="en-US" sz="1100" dirty="0"/>
-          </a:p>
-        </p:txBody>
-      </p:sp>
-      <p:sp>
-        <p:nvSpPr>
-          <p:cNvPr id="6" name="card"/>
+          <a:effectLst>
+            <a:outerShdw sx="100000" sy="100000" kx="0" ky="0" algn="bl" rotWithShape="0" blurRad="101600" dist="50800" dir="2700000">
+              <a:srgbClr val="1A1A1A">
+                <a:alpha val="100000"/>
+              </a:srgbClr>
+            </a:outerShdw>
+          </a:effectLst>
+        </p:spPr>
+      </p:sp>
+      <p:sp>
+        <p:nvSpPr>
+          <p:cNvPr id="6" name="icon-circle"/>
           <p:cNvSpPr/>
           <p:nvPr/>
         </p:nvSpPr>
         <p:spPr>
           <a:xfrm>
-            <a:off x="548640" y="1463040"/>
-            <a:ext cx="2529840" cy="2286000"/>
-          </a:xfrm>
-          <a:prstGeom prst="roundRect">
-            <a:avLst>
-              <a:gd name="adj" fmla="val 4800"/>
-            </a:avLst>
-          </a:prstGeom>
-          <a:solidFill>
-            <a:srgbClr val="FFF1F0"/>
+            <a:off x="704088" y="1618488"/>
+            <a:ext cx="548640" cy="548640"/>
+          </a:xfrm>
+          <a:prstGeom prst="ellipse">
+            <a:avLst/>
+          </a:prstGeom>
+          <a:solidFill>
+            <a:srgbClr val="DD6420"/>
           </a:solidFill>
           <a:ln w="19050">
             <a:solidFill>
@@ -6958,43 +7279,11 @@
             </a:solidFill>
             <a:prstDash val="solid"/>
           </a:ln>
-          <a:effectLst>
-            <a:outerShdw sx="100000" sy="100000" kx="0" ky="0" algn="bl" rotWithShape="0" blurRad="101600" dist="38100" dir="2700000">
-              <a:srgbClr val="000000">
-                <a:alpha val="18000"/>
-              </a:srgbClr>
-            </a:outerShdw>
-          </a:effectLst>
-        </p:spPr>
-      </p:sp>
-      <p:sp>
-        <p:nvSpPr>
-          <p:cNvPr id="7" name="icon-circle"/>
-          <p:cNvSpPr/>
-          <p:nvPr/>
-        </p:nvSpPr>
-        <p:spPr>
-          <a:xfrm>
-            <a:off x="731520" y="1645920"/>
-            <a:ext cx="502920" cy="502920"/>
-          </a:xfrm>
-          <a:prstGeom prst="ellipse">
-            <a:avLst/>
-          </a:prstGeom>
-          <a:solidFill>
-            <a:srgbClr val="E53935"/>
-          </a:solidFill>
-          <a:ln w="15875">
-            <a:solidFill>
-              <a:srgbClr val="1A1A1A"/>
-            </a:solidFill>
-            <a:prstDash val="solid"/>
-          </a:ln>
         </p:spPr>
       </p:sp>
       <p:pic>
         <p:nvPicPr>
-          <p:cNvPr id="8" name="icon" descr="preencoded.png">    </p:cNvPr>
+          <p:cNvPr id="7" name="icon" descr="preencoded.png">    </p:cNvPr>
           <p:cNvPicPr>
             <a:picLocks noChangeAspect="1"/>
           </p:cNvPicPr>
@@ -7008,8 +7297,8 @@
         </p:blipFill>
         <p:spPr>
           <a:xfrm>
-            <a:off x="862279" y="1776679"/>
-            <a:ext cx="241402" cy="241402"/>
+            <a:off x="841248" y="1755648"/>
+            <a:ext cx="274320" cy="274320"/>
           </a:xfrm>
           <a:prstGeom prst="rect">
             <a:avLst/>
@@ -7018,14 +7307,14 @@
       </p:pic>
       <p:sp>
         <p:nvSpPr>
-          <p:cNvPr id="9" name="card-head"/>
+          <p:cNvPr id="8" name="Text 4"/>
           <p:cNvSpPr txBox="1"/>
           <p:nvPr/>
         </p:nvSpPr>
         <p:spPr>
           <a:xfrm>
-            <a:off x="731520" y="2286000"/>
-            <a:ext cx="2164080" cy="365760"/>
+            <a:off x="1371600" y="1618488"/>
+            <a:ext cx="1490472" cy="548640"/>
           </a:xfrm>
           <a:prstGeom prst="rect">
             <a:avLst/>
@@ -7034,34 +7323,39 @@
           <a:ln/>
         </p:spPr>
         <p:txBody>
-          <a:bodyPr wrap="square" lIns="0" tIns="0" rIns="0" bIns="0" rtlCol="0" anchor="ctr"/>
+          <a:bodyPr wrap="square" lIns="0" tIns="0" rIns="0" bIns="0" rtlCol="0" anchor="ctr">
+            <a:normAutofit/>
+          </a:bodyPr>
           <a:lstStyle/>
           <a:p>
             <a:pPr indent="0" marL="0">
               <a:buNone/>
             </a:pPr>
             <a:r>
-              <a:rPr lang="en-US" sz="1500" b="1" dirty="0">
-                <a:solidFill>
-                  <a:schemeClr val="tx1"/>
-                </a:solidFill>
+              <a:rPr lang="ja-JP" altLang="en-US" sz="1700" dirty="0">
+                <a:solidFill>
+                  <a:srgbClr val="1A1A1A"/>
+                </a:solidFill>
+                <a:latin typeface="Dela Gothic One" pitchFamily="34" charset="0"/>
+                <a:ea typeface="けいふぉんと" pitchFamily="34" charset="-122"/>
+                <a:cs typeface="Dela Gothic One" pitchFamily="34" charset="-120"/>
               </a:rPr>
               <a:t>個人情報</a:t>
             </a:r>
-            <a:endParaRPr lang="en-US" sz="1500" dirty="0"/>
-          </a:p>
-        </p:txBody>
-      </p:sp>
-      <p:sp>
-        <p:nvSpPr>
-          <p:cNvPr id="10" name="card-body"/>
+            <a:endParaRPr lang="ja-JP" sz="1700" dirty="0"/>
+          </a:p>
+        </p:txBody>
+      </p:sp>
+      <p:sp>
+        <p:nvSpPr>
+          <p:cNvPr id="9" name="card-body"/>
           <p:cNvSpPr txBox="1"/>
           <p:nvPr/>
         </p:nvSpPr>
         <p:spPr>
           <a:xfrm>
-            <a:off x="731520" y="2697480"/>
-            <a:ext cx="2164080" cy="914400"/>
+            <a:off x="704088" y="2313432"/>
+            <a:ext cx="2139696" cy="1298448"/>
           </a:xfrm>
           <a:prstGeom prst="rect">
             <a:avLst/>
@@ -7070,7 +7364,9 @@
           <a:ln/>
         </p:spPr>
         <p:txBody>
-          <a:bodyPr wrap="square" lIns="0" tIns="0" rIns="0" bIns="0" rtlCol="0" anchor="t"/>
+          <a:bodyPr wrap="square" lIns="0" tIns="0" rIns="0" bIns="0" rtlCol="0" anchor="t">
+            <a:normAutofit/>
+          </a:bodyPr>
           <a:lstStyle/>
           <a:p>
             <a:pPr indent="0" marL="0">
@@ -7080,35 +7376,70 @@
               <a:buNone/>
             </a:pPr>
             <a:r>
-              <a:rPr lang="en-US" sz="1300" dirty="0">
-                <a:solidFill>
-                  <a:schemeClr val="tx1"/>
-                </a:solidFill>
+              <a:rPr lang="ja-JP" altLang="en-US" sz="1350" b="1" dirty="0">
+                <a:solidFill>
+                  <a:srgbClr val="1A1A1A"/>
+                </a:solidFill>
+                <a:latin typeface="Noto Sans JP" pitchFamily="34" charset="0"/>
+                <a:ea typeface="Noto Sans JP" pitchFamily="34" charset="-122"/>
+                <a:cs typeface="Noto Sans JP" pitchFamily="34" charset="-120"/>
               </a:rPr>
               <a:t>顧客の実名・電話番号は「顧客A」に置き換える</a:t>
             </a:r>
-            <a:endParaRPr lang="en-US" sz="1300" dirty="0"/>
-          </a:p>
-        </p:txBody>
-      </p:sp>
-      <p:sp>
-        <p:nvSpPr>
-          <p:cNvPr id="11" name="card"/>
+            <a:endParaRPr lang="ja-JP" sz="1350" dirty="0"/>
+          </a:p>
+        </p:txBody>
+      </p:sp>
+      <p:sp>
+        <p:nvSpPr>
+          <p:cNvPr id="10" name="card"/>
           <p:cNvSpPr/>
           <p:nvPr/>
         </p:nvSpPr>
         <p:spPr>
           <a:xfrm>
-            <a:off x="3307080" y="1463040"/>
-            <a:ext cx="2529840" cy="2286000"/>
+            <a:off x="3300984" y="1417320"/>
+            <a:ext cx="2542032" cy="2331720"/>
           </a:xfrm>
           <a:prstGeom prst="roundRect">
             <a:avLst>
-              <a:gd name="adj" fmla="val 4800"/>
+              <a:gd name="adj" fmla="val 3922"/>
             </a:avLst>
           </a:prstGeom>
           <a:solidFill>
-            <a:srgbClr val="FFF1F0"/>
+            <a:srgbClr val="FFFFFF"/>
+          </a:solidFill>
+          <a:ln w="25400">
+            <a:solidFill>
+              <a:srgbClr val="1A1A1A"/>
+            </a:solidFill>
+            <a:prstDash val="solid"/>
+          </a:ln>
+          <a:effectLst>
+            <a:outerShdw sx="100000" sy="100000" kx="0" ky="0" algn="bl" rotWithShape="0" blurRad="101600" dist="50800" dir="2700000">
+              <a:srgbClr val="1A1A1A">
+                <a:alpha val="100000"/>
+              </a:srgbClr>
+            </a:outerShdw>
+          </a:effectLst>
+        </p:spPr>
+      </p:sp>
+      <p:sp>
+        <p:nvSpPr>
+          <p:cNvPr id="11" name="icon-circle"/>
+          <p:cNvSpPr/>
+          <p:nvPr/>
+        </p:nvSpPr>
+        <p:spPr>
+          <a:xfrm>
+            <a:off x="3502152" y="1618488"/>
+            <a:ext cx="548640" cy="548640"/>
+          </a:xfrm>
+          <a:prstGeom prst="ellipse">
+            <a:avLst/>
+          </a:prstGeom>
+          <a:solidFill>
+            <a:srgbClr val="DD6420"/>
           </a:solidFill>
           <a:ln w="19050">
             <a:solidFill>
@@ -7116,43 +7447,11 @@
             </a:solidFill>
             <a:prstDash val="solid"/>
           </a:ln>
-          <a:effectLst>
-            <a:outerShdw sx="100000" sy="100000" kx="0" ky="0" algn="bl" rotWithShape="0" blurRad="101600" dist="38100" dir="2700000">
-              <a:srgbClr val="000000">
-                <a:alpha val="18000"/>
-              </a:srgbClr>
-            </a:outerShdw>
-          </a:effectLst>
-        </p:spPr>
-      </p:sp>
-      <p:sp>
-        <p:nvSpPr>
-          <p:cNvPr id="12" name="icon-circle"/>
-          <p:cNvSpPr/>
-          <p:nvPr/>
-        </p:nvSpPr>
-        <p:spPr>
-          <a:xfrm>
-            <a:off x="3489960" y="1645920"/>
-            <a:ext cx="502920" cy="502920"/>
-          </a:xfrm>
-          <a:prstGeom prst="ellipse">
-            <a:avLst/>
-          </a:prstGeom>
-          <a:solidFill>
-            <a:srgbClr val="E53935"/>
-          </a:solidFill>
-          <a:ln w="15875">
-            <a:solidFill>
-              <a:srgbClr val="1A1A1A"/>
-            </a:solidFill>
-            <a:prstDash val="solid"/>
-          </a:ln>
         </p:spPr>
       </p:sp>
       <p:pic>
         <p:nvPicPr>
-          <p:cNvPr id="13" name="icon" descr="preencoded.png">    </p:cNvPr>
+          <p:cNvPr id="12" name="icon" descr="preencoded.png">    </p:cNvPr>
           <p:cNvPicPr>
             <a:picLocks noChangeAspect="1"/>
           </p:cNvPicPr>
@@ -7166,8 +7465,8 @@
         </p:blipFill>
         <p:spPr>
           <a:xfrm>
-            <a:off x="3620719" y="1776679"/>
-            <a:ext cx="241402" cy="241402"/>
+            <a:off x="3639312" y="1755648"/>
+            <a:ext cx="274320" cy="274320"/>
           </a:xfrm>
           <a:prstGeom prst="rect">
             <a:avLst/>
@@ -7176,14 +7475,14 @@
       </p:pic>
       <p:sp>
         <p:nvSpPr>
-          <p:cNvPr id="14" name="card-head"/>
+          <p:cNvPr id="13" name="Text 8"/>
           <p:cNvSpPr txBox="1"/>
           <p:nvPr/>
         </p:nvSpPr>
         <p:spPr>
           <a:xfrm>
-            <a:off x="3489960" y="2286000"/>
-            <a:ext cx="2164080" cy="365760"/>
+            <a:off x="4169664" y="1618488"/>
+            <a:ext cx="1490472" cy="548640"/>
           </a:xfrm>
           <a:prstGeom prst="rect">
             <a:avLst/>
@@ -7192,34 +7491,39 @@
           <a:ln/>
         </p:spPr>
         <p:txBody>
-          <a:bodyPr wrap="square" lIns="0" tIns="0" rIns="0" bIns="0" rtlCol="0" anchor="ctr"/>
+          <a:bodyPr wrap="square" lIns="0" tIns="0" rIns="0" bIns="0" rtlCol="0" anchor="ctr">
+            <a:normAutofit/>
+          </a:bodyPr>
           <a:lstStyle/>
           <a:p>
             <a:pPr indent="0" marL="0">
               <a:buNone/>
             </a:pPr>
             <a:r>
-              <a:rPr lang="en-US" sz="1500" b="1" dirty="0">
-                <a:solidFill>
-                  <a:schemeClr val="tx1"/>
-                </a:solidFill>
+              <a:rPr lang="ja-JP" altLang="en-US" sz="1500" dirty="0">
+                <a:solidFill>
+                  <a:srgbClr val="1A1A1A"/>
+                </a:solidFill>
+                <a:latin typeface="Dela Gothic One" pitchFamily="34" charset="0"/>
+                <a:ea typeface="けいふぉんと" pitchFamily="34" charset="-122"/>
+                <a:cs typeface="Dela Gothic One" pitchFamily="34" charset="-120"/>
               </a:rPr>
               <a:t>社外秘の数字</a:t>
             </a:r>
-            <a:endParaRPr lang="en-US" sz="1500" dirty="0"/>
-          </a:p>
-        </p:txBody>
-      </p:sp>
-      <p:sp>
-        <p:nvSpPr>
-          <p:cNvPr id="15" name="card-body"/>
+            <a:endParaRPr lang="ja-JP" sz="1500" dirty="0"/>
+          </a:p>
+        </p:txBody>
+      </p:sp>
+      <p:sp>
+        <p:nvSpPr>
+          <p:cNvPr id="14" name="card-body"/>
           <p:cNvSpPr txBox="1"/>
           <p:nvPr/>
         </p:nvSpPr>
         <p:spPr>
           <a:xfrm>
-            <a:off x="3489960" y="2697480"/>
-            <a:ext cx="2164080" cy="914400"/>
+            <a:off x="3502152" y="2313432"/>
+            <a:ext cx="2139696" cy="1298448"/>
           </a:xfrm>
           <a:prstGeom prst="rect">
             <a:avLst/>
@@ -7228,7 +7532,9 @@
           <a:ln/>
         </p:spPr>
         <p:txBody>
-          <a:bodyPr wrap="square" lIns="0" tIns="0" rIns="0" bIns="0" rtlCol="0" anchor="t"/>
+          <a:bodyPr wrap="square" lIns="0" tIns="0" rIns="0" bIns="0" rtlCol="0" anchor="t">
+            <a:normAutofit/>
+          </a:bodyPr>
           <a:lstStyle/>
           <a:p>
             <a:pPr indent="0" marL="0">
@@ -7238,35 +7544,70 @@
               <a:buNone/>
             </a:pPr>
             <a:r>
-              <a:rPr lang="en-US" sz="1300" dirty="0">
-                <a:solidFill>
-                  <a:schemeClr val="tx1"/>
-                </a:solidFill>
+              <a:rPr lang="ja-JP" altLang="en-US" sz="1350" b="1" dirty="0">
+                <a:solidFill>
+                  <a:srgbClr val="1A1A1A"/>
+                </a:solidFill>
+                <a:latin typeface="Noto Sans JP" pitchFamily="34" charset="0"/>
+                <a:ea typeface="Noto Sans JP" pitchFamily="34" charset="-122"/>
+                <a:cs typeface="Noto Sans JP" pitchFamily="34" charset="-120"/>
               </a:rPr>
               <a:t>丸めるか伏せる</a:t>
             </a:r>
-            <a:endParaRPr lang="en-US" sz="1300" dirty="0"/>
-          </a:p>
-        </p:txBody>
-      </p:sp>
-      <p:sp>
-        <p:nvSpPr>
-          <p:cNvPr id="16" name="card"/>
+            <a:endParaRPr lang="ja-JP" sz="1350" dirty="0"/>
+          </a:p>
+        </p:txBody>
+      </p:sp>
+      <p:sp>
+        <p:nvSpPr>
+          <p:cNvPr id="15" name="card"/>
           <p:cNvSpPr/>
           <p:nvPr/>
         </p:nvSpPr>
         <p:spPr>
           <a:xfrm>
-            <a:off x="6065520" y="1463040"/>
-            <a:ext cx="2529840" cy="2286000"/>
+            <a:off x="6099048" y="1417320"/>
+            <a:ext cx="2542032" cy="2331720"/>
           </a:xfrm>
           <a:prstGeom prst="roundRect">
             <a:avLst>
-              <a:gd name="adj" fmla="val 4800"/>
+              <a:gd name="adj" fmla="val 3922"/>
             </a:avLst>
           </a:prstGeom>
           <a:solidFill>
-            <a:srgbClr val="FFF1F0"/>
+            <a:srgbClr val="FFFFFF"/>
+          </a:solidFill>
+          <a:ln w="25400">
+            <a:solidFill>
+              <a:srgbClr val="1A1A1A"/>
+            </a:solidFill>
+            <a:prstDash val="solid"/>
+          </a:ln>
+          <a:effectLst>
+            <a:outerShdw sx="100000" sy="100000" kx="0" ky="0" algn="bl" rotWithShape="0" blurRad="101600" dist="50800" dir="2700000">
+              <a:srgbClr val="1A1A1A">
+                <a:alpha val="100000"/>
+              </a:srgbClr>
+            </a:outerShdw>
+          </a:effectLst>
+        </p:spPr>
+      </p:sp>
+      <p:sp>
+        <p:nvSpPr>
+          <p:cNvPr id="16" name="icon-circle"/>
+          <p:cNvSpPr/>
+          <p:nvPr/>
+        </p:nvSpPr>
+        <p:spPr>
+          <a:xfrm>
+            <a:off x="6300216" y="1618488"/>
+            <a:ext cx="548640" cy="548640"/>
+          </a:xfrm>
+          <a:prstGeom prst="ellipse">
+            <a:avLst/>
+          </a:prstGeom>
+          <a:solidFill>
+            <a:srgbClr val="DD6420"/>
           </a:solidFill>
           <a:ln w="19050">
             <a:solidFill>
@@ -7274,43 +7615,11 @@
             </a:solidFill>
             <a:prstDash val="solid"/>
           </a:ln>
-          <a:effectLst>
-            <a:outerShdw sx="100000" sy="100000" kx="0" ky="0" algn="bl" rotWithShape="0" blurRad="101600" dist="38100" dir="2700000">
-              <a:srgbClr val="000000">
-                <a:alpha val="18000"/>
-              </a:srgbClr>
-            </a:outerShdw>
-          </a:effectLst>
-        </p:spPr>
-      </p:sp>
-      <p:sp>
-        <p:nvSpPr>
-          <p:cNvPr id="17" name="icon-circle"/>
-          <p:cNvSpPr/>
-          <p:nvPr/>
-        </p:nvSpPr>
-        <p:spPr>
-          <a:xfrm>
-            <a:off x="6248400" y="1645920"/>
-            <a:ext cx="502920" cy="502920"/>
-          </a:xfrm>
-          <a:prstGeom prst="ellipse">
-            <a:avLst/>
-          </a:prstGeom>
-          <a:solidFill>
-            <a:srgbClr val="E53935"/>
-          </a:solidFill>
-          <a:ln w="15875">
-            <a:solidFill>
-              <a:srgbClr val="1A1A1A"/>
-            </a:solidFill>
-            <a:prstDash val="solid"/>
-          </a:ln>
         </p:spPr>
       </p:sp>
       <p:pic>
         <p:nvPicPr>
-          <p:cNvPr id="18" name="icon" descr="preencoded.png">    </p:cNvPr>
+          <p:cNvPr id="17" name="icon" descr="preencoded.png">    </p:cNvPr>
           <p:cNvPicPr>
             <a:picLocks noChangeAspect="1"/>
           </p:cNvPicPr>
@@ -7324,8 +7633,8 @@
         </p:blipFill>
         <p:spPr>
           <a:xfrm>
-            <a:off x="6379159" y="1776679"/>
-            <a:ext cx="241402" cy="241402"/>
+            <a:off x="6437376" y="1755648"/>
+            <a:ext cx="274320" cy="274320"/>
           </a:xfrm>
           <a:prstGeom prst="rect">
             <a:avLst/>
@@ -7334,14 +7643,14 @@
       </p:pic>
       <p:sp>
         <p:nvSpPr>
-          <p:cNvPr id="19" name="card-head"/>
+          <p:cNvPr id="18" name="Text 12"/>
           <p:cNvSpPr txBox="1"/>
           <p:nvPr/>
         </p:nvSpPr>
         <p:spPr>
           <a:xfrm>
-            <a:off x="6248400" y="2286000"/>
-            <a:ext cx="2164080" cy="365760"/>
+            <a:off x="6967728" y="1618488"/>
+            <a:ext cx="1490472" cy="548640"/>
           </a:xfrm>
           <a:prstGeom prst="rect">
             <a:avLst/>
@@ -7350,34 +7659,39 @@
           <a:ln/>
         </p:spPr>
         <p:txBody>
-          <a:bodyPr wrap="square" lIns="0" tIns="0" rIns="0" bIns="0" rtlCol="0" anchor="ctr"/>
+          <a:bodyPr wrap="square" lIns="0" tIns="0" rIns="0" bIns="0" rtlCol="0" anchor="ctr">
+            <a:normAutofit/>
+          </a:bodyPr>
           <a:lstStyle/>
           <a:p>
             <a:pPr indent="0" marL="0">
               <a:buNone/>
             </a:pPr>
             <a:r>
-              <a:rPr lang="en-US" sz="1500" b="1" dirty="0">
-                <a:solidFill>
-                  <a:schemeClr val="tx1"/>
-                </a:solidFill>
+              <a:rPr lang="ja-JP" altLang="en-US" sz="1250" dirty="0">
+                <a:solidFill>
+                  <a:srgbClr val="1A1A1A"/>
+                </a:solidFill>
+                <a:latin typeface="Dela Gothic One" pitchFamily="34" charset="0"/>
+                <a:ea typeface="けいふぉんと" pitchFamily="34" charset="-122"/>
+                <a:cs typeface="Dela Gothic One" pitchFamily="34" charset="-120"/>
               </a:rPr>
               <a:t>AIの事実・数字</a:t>
             </a:r>
-            <a:endParaRPr lang="en-US" sz="1500" dirty="0"/>
-          </a:p>
-        </p:txBody>
-      </p:sp>
-      <p:sp>
-        <p:nvSpPr>
-          <p:cNvPr id="20" name="card-body"/>
+            <a:endParaRPr lang="ja-JP" sz="1250" dirty="0"/>
+          </a:p>
+        </p:txBody>
+      </p:sp>
+      <p:sp>
+        <p:nvSpPr>
+          <p:cNvPr id="19" name="card-body"/>
           <p:cNvSpPr txBox="1"/>
           <p:nvPr/>
         </p:nvSpPr>
         <p:spPr>
           <a:xfrm>
-            <a:off x="6248400" y="2697480"/>
-            <a:ext cx="2164080" cy="914400"/>
+            <a:off x="6300216" y="2313432"/>
+            <a:ext cx="2139696" cy="1298448"/>
           </a:xfrm>
           <a:prstGeom prst="rect">
             <a:avLst/>
@@ -7386,7 +7700,9 @@
           <a:ln/>
         </p:spPr>
         <p:txBody>
-          <a:bodyPr wrap="square" lIns="0" tIns="0" rIns="0" bIns="0" rtlCol="0" anchor="t"/>
+          <a:bodyPr wrap="square" lIns="0" tIns="0" rIns="0" bIns="0" rtlCol="0" anchor="t">
+            <a:normAutofit/>
+          </a:bodyPr>
           <a:lstStyle/>
           <a:p>
             <a:pPr indent="0" marL="0">
@@ -7396,14 +7712,17 @@
               <a:buNone/>
             </a:pPr>
             <a:r>
-              <a:rPr lang="en-US" sz="1300" dirty="0">
-                <a:solidFill>
-                  <a:schemeClr val="tx1"/>
-                </a:solidFill>
+              <a:rPr lang="ja-JP" altLang="en-US" sz="1350" b="1" dirty="0">
+                <a:solidFill>
+                  <a:srgbClr val="1A1A1A"/>
+                </a:solidFill>
+                <a:latin typeface="Noto Sans JP" pitchFamily="34" charset="0"/>
+                <a:ea typeface="Noto Sans JP" pitchFamily="34" charset="-122"/>
+                <a:cs typeface="Noto Sans JP" pitchFamily="34" charset="-120"/>
               </a:rPr>
               <a:t>そのまま使わず、自分で確かめる</a:t>
             </a:r>
-            <a:endParaRPr lang="en-US" sz="1300" dirty="0"/>
+            <a:endParaRPr lang="ja-JP" sz="1350" dirty="0"/>
           </a:p>
         </p:txBody>
       </p:sp>
@@ -7419,8 +7738,8 @@
         </p:nvSpPr>
         <p:spPr>
           <a:xfrm>
-            <a:off x="8229600" y="4773168"/>
-            <a:ext cx="365760" cy="228600"/>
+            <a:off x="8366760" y="4754880"/>
+            <a:ext cx="365760" cy="274320"/>
           </a:xfrm>
           <a:prstGeom prst="rect">
             <a:avLst/>
@@ -7432,20 +7751,23 @@
           </a:extLst>
         </p:spPr>
         <p:txBody>
-          <a:bodyPr/>
+          <a:bodyPr anchor="ctr"/>
           <a:lstStyle>
             <a:lvl1pPr>
-              <a:defRPr sz="900">
-                <a:solidFill>
-                  <a:srgbClr val="5A6872"/>
-                </a:solidFill>
+              <a:defRPr sz="850">
+                <a:solidFill>
+                  <a:srgbClr val="FFFFFF"/>
+                </a:solidFill>
+                <a:latin typeface="Noto Sans JP"/>
+                <a:ea typeface="Noto Sans JP"/>
+                <a:cs typeface="Noto Sans JP"/>
               </a:defRPr>
             </a:lvl1pPr>
           </a:lstStyle>
           <a:p>
             <a:pPr algn="r"/>
             <a:fld id="{F7021451-1387-4CA6-816F-3879F97B5CBC}" type="slidenum">
-              <a:rPr b="0" lang="en-US"/>
+              <a:rPr b="1" lang="en-US"/>
               <a:t>8</a:t>
             </a:fld>
             <a:endParaRPr lang="en-US"/>
@@ -7480,15 +7802,58 @@
       <p:sp>
         <p:nvSpPr>
           <p:cNvPr id="2" name="Text 0"/>
-          <p:cNvSpPr/>
-          <p:nvPr>
-            <p:ph idx="100" type="title" hasCustomPrompt="1"/>
-          </p:nvPr>
-        </p:nvSpPr>
-        <p:spPr>
-          <a:xfrm>
-            <a:off x="548640" y="658368"/>
-            <a:ext cx="8046720" cy="566928"/>
+          <p:cNvSpPr txBox="1"/>
+          <p:nvPr/>
+        </p:nvSpPr>
+        <p:spPr>
+          <a:xfrm rot="-180000">
+            <a:off x="411480" y="201168"/>
+            <a:ext cx="894740" cy="352044"/>
+          </a:xfrm>
+          <a:prstGeom prst="rect">
+            <a:avLst/>
+          </a:prstGeom>
+          <a:solidFill>
+            <a:srgbClr val="1A1A1A"/>
+          </a:solidFill>
+          <a:ln>
+            <a:solidFill>
+              <a:srgbClr val="1A1A1A"/>
+            </a:solidFill>
+          </a:ln>
+        </p:spPr>
+        <p:txBody>
+          <a:bodyPr wrap="square" lIns="0" tIns="0" rIns="0" bIns="0" rtlCol="0" anchor="ctr"/>
+          <a:lstStyle/>
+          <a:p>
+            <a:pPr algn="ctr" indent="0" marL="0">
+              <a:buNone/>
+            </a:pPr>
+            <a:r>
+              <a:rPr lang="ja-JP" altLang="en-US" sz="1100" dirty="0">
+                <a:solidFill>
+                  <a:srgbClr val="FFFFFF"/>
+                </a:solidFill>
+                <a:latin typeface="Dela Gothic One" pitchFamily="34" charset="0"/>
+                <a:ea typeface="けいふぉんと" pitchFamily="34" charset="-122"/>
+                <a:cs typeface="Dela Gothic One" pitchFamily="34" charset="-120"/>
+              </a:rPr>
+              <a:t>まとめ</a:t>
+            </a:r>
+            <a:endParaRPr lang="ja-JP" sz="1100" dirty="0"/>
+          </a:p>
+        </p:txBody>
+      </p:sp>
+      <p:sp>
+        <p:nvSpPr>
+          <p:cNvPr id="3" name="Text 1"/>
+          <p:cNvSpPr txBox="1"/>
+          <p:nvPr/>
+        </p:nvSpPr>
+        <p:spPr>
+          <a:xfrm>
+            <a:off x="411480" y="502920"/>
+            <a:ext cx="8321040" cy="685800"/>
           </a:xfrm>
           <a:prstGeom prst="rect">
             <a:avLst/>
@@ -7497,105 +7862,79 @@
           <a:ln/>
         </p:spPr>
         <p:txBody>
-          <a:bodyPr wrap="square" lIns="0" tIns="0" rIns="0" bIns="0" rtlCol="0" anchor="ctr"/>
-          <a:lstStyle/>
-          <a:p>
-            <a:pPr algn="l" indent="0" marL="0">
-              <a:buNone/>
-            </a:pPr>
-            <a:r>
-              <a:rPr lang="en-US" sz="2400" b="1" dirty="0">
-                <a:solidFill>
-                  <a:schemeClr val="tx1"/>
-                </a:solidFill>
+          <a:bodyPr wrap="square" lIns="0" tIns="0" rIns="0" bIns="0" rtlCol="0" anchor="ctr">
+            <a:normAutofit/>
+          </a:bodyPr>
+          <a:lstStyle/>
+          <a:p>
+            <a:pPr indent="0" marL="0">
+              <a:buNone/>
+            </a:pPr>
+            <a:r>
+              <a:rPr lang="ja-JP" altLang="en-US" sz="2600" dirty="0">
+                <a:solidFill>
+                  <a:srgbClr val="1A1A1A"/>
+                </a:solidFill>
+                <a:latin typeface="Dela Gothic One" pitchFamily="34" charset="0"/>
+                <a:ea typeface="けいふぉんと" pitchFamily="34" charset="-122"/>
+                <a:cs typeface="Dela Gothic One" pitchFamily="34" charset="-120"/>
               </a:rPr>
               <a:t>宿題と、今日のチェック</a:t>
             </a:r>
-            <a:endParaRPr lang="en-US" sz="2400" dirty="0"/>
-          </a:p>
-        </p:txBody>
-      </p:sp>
-      <p:sp>
-        <p:nvSpPr>
-          <p:cNvPr id="3" name="chip"/>
+            <a:endParaRPr lang="ja-JP" sz="2600" dirty="0"/>
+          </a:p>
+        </p:txBody>
+      </p:sp>
+      <p:sp>
+        <p:nvSpPr>
+          <p:cNvPr id="4" name="card"/>
           <p:cNvSpPr/>
           <p:nvPr/>
         </p:nvSpPr>
         <p:spPr>
           <a:xfrm>
-            <a:off x="548640" y="292608"/>
-            <a:ext cx="795528" cy="292608"/>
+            <a:off x="502920" y="1417320"/>
+            <a:ext cx="3931920" cy="3108960"/>
           </a:xfrm>
           <a:prstGeom prst="roundRect">
             <a:avLst>
-              <a:gd name="adj" fmla="val 50000"/>
+              <a:gd name="adj" fmla="val 2941"/>
             </a:avLst>
           </a:prstGeom>
           <a:solidFill>
-            <a:schemeClr val="tx1"/>
-          </a:solidFill>
-          <a:ln w="12700">
+            <a:srgbClr val="FFFFFF"/>
+          </a:solidFill>
+          <a:ln w="25400">
             <a:solidFill>
-              <a:schemeClr val="tx1"/>
+              <a:srgbClr val="1A1A1A"/>
             </a:solidFill>
             <a:prstDash val="solid"/>
           </a:ln>
-        </p:spPr>
-      </p:sp>
-      <p:sp>
-        <p:nvSpPr>
-          <p:cNvPr id="4" name="chip-text"/>
-          <p:cNvSpPr txBox="1"/>
-          <p:nvPr/>
-        </p:nvSpPr>
-        <p:spPr>
-          <a:xfrm>
-            <a:off x="548640" y="292608"/>
-            <a:ext cx="795528" cy="292608"/>
-          </a:xfrm>
-          <a:prstGeom prst="rect">
-            <a:avLst/>
-          </a:prstGeom>
-          <a:noFill/>
-          <a:ln/>
-        </p:spPr>
-        <p:txBody>
-          <a:bodyPr wrap="square" lIns="0" tIns="0" rIns="0" bIns="0" rtlCol="0" anchor="ctr"/>
-          <a:lstStyle/>
-          <a:p>
-            <a:pPr algn="ctr" indent="0" marL="0">
-              <a:buNone/>
-            </a:pPr>
-            <a:r>
-              <a:rPr lang="en-US" sz="1100" b="1" dirty="0">
-                <a:solidFill>
-                  <a:schemeClr val="accent1"/>
-                </a:solidFill>
-              </a:rPr>
-              <a:t>まとめ</a:t>
-            </a:r>
-            <a:endParaRPr lang="en-US" sz="1100" dirty="0"/>
-          </a:p>
-        </p:txBody>
-      </p:sp>
-      <p:sp>
-        <p:nvSpPr>
-          <p:cNvPr id="5" name="card"/>
+          <a:effectLst>
+            <a:outerShdw sx="100000" sy="100000" kx="0" ky="0" algn="bl" rotWithShape="0" blurRad="101600" dist="50800" dir="2700000">
+              <a:srgbClr val="1A1A1A">
+                <a:alpha val="100000"/>
+              </a:srgbClr>
+            </a:outerShdw>
+          </a:effectLst>
+        </p:spPr>
+      </p:sp>
+      <p:sp>
+        <p:nvSpPr>
+          <p:cNvPr id="5" name="icon-circle"/>
           <p:cNvSpPr/>
           <p:nvPr/>
         </p:nvSpPr>
         <p:spPr>
           <a:xfrm>
-            <a:off x="548640" y="1463040"/>
-            <a:ext cx="3886200" cy="3017520"/>
-          </a:xfrm>
-          <a:prstGeom prst="roundRect">
-            <a:avLst>
-              <a:gd name="adj" fmla="val 3636"/>
-            </a:avLst>
-          </a:prstGeom>
-          <a:solidFill>
-            <a:schemeClr val="bg2"/>
+            <a:off x="704088" y="1600200"/>
+            <a:ext cx="457200" cy="457200"/>
+          </a:xfrm>
+          <a:prstGeom prst="ellipse">
+            <a:avLst/>
+          </a:prstGeom>
+          <a:solidFill>
+            <a:srgbClr val="DD6420"/>
           </a:solidFill>
           <a:ln w="19050">
             <a:solidFill>
@@ -7603,43 +7942,11 @@
             </a:solidFill>
             <a:prstDash val="solid"/>
           </a:ln>
-          <a:effectLst>
-            <a:outerShdw sx="100000" sy="100000" kx="0" ky="0" algn="bl" rotWithShape="0" blurRad="101600" dist="38100" dir="2700000">
-              <a:srgbClr val="000000">
-                <a:alpha val="18000"/>
-              </a:srgbClr>
-            </a:outerShdw>
-          </a:effectLst>
-        </p:spPr>
-      </p:sp>
-      <p:sp>
-        <p:nvSpPr>
-          <p:cNvPr id="6" name="icon-circle"/>
-          <p:cNvSpPr/>
-          <p:nvPr/>
-        </p:nvSpPr>
-        <p:spPr>
-          <a:xfrm>
-            <a:off x="777240" y="1645920"/>
-            <a:ext cx="457200" cy="457200"/>
-          </a:xfrm>
-          <a:prstGeom prst="ellipse">
-            <a:avLst/>
-          </a:prstGeom>
-          <a:solidFill>
-            <a:schemeClr val="accent1"/>
-          </a:solidFill>
-          <a:ln w="15875">
-            <a:solidFill>
-              <a:srgbClr val="1A1A1A"/>
-            </a:solidFill>
-            <a:prstDash val="solid"/>
-          </a:ln>
         </p:spPr>
       </p:sp>
       <p:pic>
         <p:nvPicPr>
-          <p:cNvPr id="7" name="icon" descr="preencoded.png">    </p:cNvPr>
+          <p:cNvPr id="6" name="icon" descr="preencoded.png">    </p:cNvPr>
           <p:cNvPicPr>
             <a:picLocks noChangeAspect="1"/>
           </p:cNvPicPr>
@@ -7653,14 +7960,53 @@
         </p:blipFill>
         <p:spPr>
           <a:xfrm>
-            <a:off x="896112" y="1764792"/>
-            <a:ext cx="219456" cy="219456"/>
+            <a:off x="818388" y="1714500"/>
+            <a:ext cx="228600" cy="228600"/>
           </a:xfrm>
           <a:prstGeom prst="rect">
             <a:avLst/>
           </a:prstGeom>
         </p:spPr>
       </p:pic>
+      <p:sp>
+        <p:nvSpPr>
+          <p:cNvPr id="7" name="Text 4"/>
+          <p:cNvSpPr txBox="1"/>
+          <p:nvPr/>
+        </p:nvSpPr>
+        <p:spPr>
+          <a:xfrm>
+            <a:off x="1280160" y="1600200"/>
+            <a:ext cx="2743200" cy="457200"/>
+          </a:xfrm>
+          <a:prstGeom prst="rect">
+            <a:avLst/>
+          </a:prstGeom>
+          <a:noFill/>
+          <a:ln/>
+        </p:spPr>
+        <p:txBody>
+          <a:bodyPr wrap="square" lIns="0" tIns="0" rIns="0" bIns="0" rtlCol="0" anchor="ctr"/>
+          <a:lstStyle/>
+          <a:p>
+            <a:pPr indent="0" marL="0">
+              <a:buNone/>
+            </a:pPr>
+            <a:r>
+              <a:rPr lang="ja-JP" altLang="en-US" sz="1800" dirty="0">
+                <a:solidFill>
+                  <a:srgbClr val="1A1A1A"/>
+                </a:solidFill>
+                <a:latin typeface="Dela Gothic One" pitchFamily="34" charset="0"/>
+                <a:ea typeface="けいふぉんと" pitchFamily="34" charset="-122"/>
+                <a:cs typeface="Dela Gothic One" pitchFamily="34" charset="-120"/>
+              </a:rPr>
+              <a:t>宿題</a:t>
+            </a:r>
+            <a:endParaRPr lang="ja-JP" sz="1800" dirty="0"/>
+          </a:p>
+        </p:txBody>
+      </p:sp>
       <p:sp>
         <p:nvSpPr>
           <p:cNvPr id="8" name="Text 5"/>
@@ -7669,8 +8015,8 @@
         </p:nvSpPr>
         <p:spPr>
           <a:xfrm>
-            <a:off x="1371600" y="1645920"/>
-            <a:ext cx="2743200" cy="457200"/>
+            <a:off x="731520" y="2240280"/>
+            <a:ext cx="3474720" cy="2148840"/>
           </a:xfrm>
           <a:prstGeom prst="rect">
             <a:avLst/>
@@ -7679,43 +8025,9 @@
           <a:ln/>
         </p:spPr>
         <p:txBody>
-          <a:bodyPr wrap="square" lIns="0" tIns="0" rIns="0" bIns="0" rtlCol="0" anchor="ctr"/>
-          <a:lstStyle/>
-          <a:p>
-            <a:pPr indent="0" marL="0">
-              <a:buNone/>
-            </a:pPr>
-            <a:r>
-              <a:rPr lang="en-US" sz="1700" b="1" dirty="0">
-                <a:solidFill>
-                  <a:schemeClr val="tx1"/>
-                </a:solidFill>
-              </a:rPr>
-              <a:t>宿題</a:t>
-            </a:r>
-            <a:endParaRPr lang="en-US" sz="1700" dirty="0"/>
-          </a:p>
-        </p:txBody>
-      </p:sp>
-      <p:sp>
-        <p:nvSpPr>
-          <p:cNvPr id="9" name="Text 6"/>
-          <p:cNvSpPr txBox="1"/>
-          <p:nvPr/>
-        </p:nvSpPr>
-        <p:spPr>
-          <a:xfrm>
-            <a:off x="777240" y="2286000"/>
-            <a:ext cx="3474720" cy="2057400"/>
-          </a:xfrm>
-          <a:prstGeom prst="rect">
-            <a:avLst/>
-          </a:prstGeom>
-          <a:noFill/>
-          <a:ln/>
-        </p:spPr>
-        <p:txBody>
-          <a:bodyPr wrap="square" lIns="0" tIns="0" rIns="0" bIns="0" rtlCol="0" anchor="t"/>
+          <a:bodyPr wrap="square" lIns="0" tIns="0" rIns="0" bIns="0" rtlCol="0" anchor="t">
+            <a:normAutofit/>
+          </a:bodyPr>
           <a:lstStyle/>
           <a:p>
             <a:pPr marL="342900" indent="-342900">
@@ -7723,38 +8035,73 @@
                 <a:spcPts val="800"/>
               </a:spcAft>
               <a:buSzPct val="100000"/>
-              <a:buChar char="•"/>
-            </a:pPr>
-            <a:r>
-              <a:rPr lang="en-US" sz="1350" dirty="0">
-                <a:solidFill>
-                  <a:schemeClr val="tx1"/>
-                </a:solidFill>
+              <a:buChar char="●"/>
+            </a:pPr>
+            <a:r>
+              <a:rPr lang="ja-JP" altLang="en-US" sz="1350" b="1" dirty="0">
+                <a:solidFill>
+                  <a:srgbClr val="1A1A1A"/>
+                </a:solidFill>
+                <a:latin typeface="Noto Sans JP" pitchFamily="34" charset="0"/>
+                <a:ea typeface="Noto Sans JP" pitchFamily="34" charset="-122"/>
+                <a:cs typeface="Noto Sans JP" pitchFamily="34" charset="-120"/>
               </a:rPr>
               <a:t>設計シートを見直し、画面の手書きラフ（入力画面・一覧画面）を描いて写真を撮る</a:t>
             </a:r>
-            <a:endParaRPr lang="en-US" sz="1350" dirty="0"/>
-          </a:p>
-        </p:txBody>
-      </p:sp>
-      <p:sp>
-        <p:nvSpPr>
-          <p:cNvPr id="10" name="card"/>
+            <a:endParaRPr lang="ja-JP" sz="1350" dirty="0"/>
+          </a:p>
+        </p:txBody>
+      </p:sp>
+      <p:sp>
+        <p:nvSpPr>
+          <p:cNvPr id="9" name="card"/>
           <p:cNvSpPr/>
           <p:nvPr/>
         </p:nvSpPr>
         <p:spPr>
           <a:xfrm>
-            <a:off x="4709160" y="1463040"/>
-            <a:ext cx="3886200" cy="3017520"/>
+            <a:off x="4709160" y="1417320"/>
+            <a:ext cx="3931920" cy="3108960"/>
           </a:xfrm>
           <a:prstGeom prst="roundRect">
             <a:avLst>
-              <a:gd name="adj" fmla="val 3636"/>
+              <a:gd name="adj" fmla="val 2941"/>
             </a:avLst>
           </a:prstGeom>
           <a:solidFill>
-            <a:schemeClr val="bg1"/>
+            <a:srgbClr val="FFFFFF"/>
+          </a:solidFill>
+          <a:ln w="25400">
+            <a:solidFill>
+              <a:srgbClr val="1A1A1A"/>
+            </a:solidFill>
+            <a:prstDash val="solid"/>
+          </a:ln>
+          <a:effectLst>
+            <a:outerShdw sx="100000" sy="100000" kx="0" ky="0" algn="bl" rotWithShape="0" blurRad="101600" dist="50800" dir="2700000">
+              <a:srgbClr val="1A1A1A">
+                <a:alpha val="100000"/>
+              </a:srgbClr>
+            </a:outerShdw>
+          </a:effectLst>
+        </p:spPr>
+      </p:sp>
+      <p:sp>
+        <p:nvSpPr>
+          <p:cNvPr id="10" name="icon-circle"/>
+          <p:cNvSpPr/>
+          <p:nvPr/>
+        </p:nvSpPr>
+        <p:spPr>
+          <a:xfrm>
+            <a:off x="4910328" y="1600200"/>
+            <a:ext cx="457200" cy="457200"/>
+          </a:xfrm>
+          <a:prstGeom prst="ellipse">
+            <a:avLst/>
+          </a:prstGeom>
+          <a:solidFill>
+            <a:srgbClr val="DD6420"/>
           </a:solidFill>
           <a:ln w="19050">
             <a:solidFill>
@@ -7762,43 +8109,11 @@
             </a:solidFill>
             <a:prstDash val="solid"/>
           </a:ln>
-          <a:effectLst>
-            <a:outerShdw sx="100000" sy="100000" kx="0" ky="0" algn="bl" rotWithShape="0" blurRad="101600" dist="38100" dir="2700000">
-              <a:srgbClr val="000000">
-                <a:alpha val="18000"/>
-              </a:srgbClr>
-            </a:outerShdw>
-          </a:effectLst>
-        </p:spPr>
-      </p:sp>
-      <p:sp>
-        <p:nvSpPr>
-          <p:cNvPr id="11" name="icon-circle"/>
-          <p:cNvSpPr/>
-          <p:nvPr/>
-        </p:nvSpPr>
-        <p:spPr>
-          <a:xfrm>
-            <a:off x="4937760" y="1645920"/>
-            <a:ext cx="457200" cy="457200"/>
-          </a:xfrm>
-          <a:prstGeom prst="ellipse">
-            <a:avLst/>
-          </a:prstGeom>
-          <a:solidFill>
-            <a:schemeClr val="accent1"/>
-          </a:solidFill>
-          <a:ln w="15875">
-            <a:solidFill>
-              <a:srgbClr val="1A1A1A"/>
-            </a:solidFill>
-            <a:prstDash val="solid"/>
-          </a:ln>
         </p:spPr>
       </p:sp>
       <p:pic>
         <p:nvPicPr>
-          <p:cNvPr id="12" name="icon" descr="preencoded.png">    </p:cNvPr>
+          <p:cNvPr id="11" name="icon" descr="preencoded.png">    </p:cNvPr>
           <p:cNvPicPr>
             <a:picLocks noChangeAspect="1"/>
           </p:cNvPicPr>
@@ -7812,14 +8127,53 @@
         </p:blipFill>
         <p:spPr>
           <a:xfrm>
-            <a:off x="5056632" y="1764792"/>
-            <a:ext cx="219456" cy="219456"/>
+            <a:off x="5024628" y="1714500"/>
+            <a:ext cx="228600" cy="228600"/>
           </a:xfrm>
           <a:prstGeom prst="rect">
             <a:avLst/>
           </a:prstGeom>
         </p:spPr>
       </p:pic>
+      <p:sp>
+        <p:nvSpPr>
+          <p:cNvPr id="12" name="Text 8"/>
+          <p:cNvSpPr txBox="1"/>
+          <p:nvPr/>
+        </p:nvSpPr>
+        <p:spPr>
+          <a:xfrm>
+            <a:off x="5486400" y="1600200"/>
+            <a:ext cx="2743200" cy="457200"/>
+          </a:xfrm>
+          <a:prstGeom prst="rect">
+            <a:avLst/>
+          </a:prstGeom>
+          <a:noFill/>
+          <a:ln/>
+        </p:spPr>
+        <p:txBody>
+          <a:bodyPr wrap="square" lIns="0" tIns="0" rIns="0" bIns="0" rtlCol="0" anchor="ctr"/>
+          <a:lstStyle/>
+          <a:p>
+            <a:pPr indent="0" marL="0">
+              <a:buNone/>
+            </a:pPr>
+            <a:r>
+              <a:rPr lang="ja-JP" altLang="en-US" sz="1800" dirty="0">
+                <a:solidFill>
+                  <a:srgbClr val="1A1A1A"/>
+                </a:solidFill>
+                <a:latin typeface="Dela Gothic One" pitchFamily="34" charset="0"/>
+                <a:ea typeface="けいふぉんと" pitchFamily="34" charset="-122"/>
+                <a:cs typeface="Dela Gothic One" pitchFamily="34" charset="-120"/>
+              </a:rPr>
+              <a:t>できたらチェック</a:t>
+            </a:r>
+            <a:endParaRPr lang="ja-JP" sz="1800" dirty="0"/>
+          </a:p>
+        </p:txBody>
+      </p:sp>
       <p:sp>
         <p:nvSpPr>
           <p:cNvPr id="13" name="Text 9"/>
@@ -7828,8 +8182,8 @@
         </p:nvSpPr>
         <p:spPr>
           <a:xfrm>
-            <a:off x="5532120" y="1645920"/>
-            <a:ext cx="2743200" cy="457200"/>
+            <a:off x="4937760" y="2240280"/>
+            <a:ext cx="3474720" cy="2148840"/>
           </a:xfrm>
           <a:prstGeom prst="rect">
             <a:avLst/>
@@ -7838,43 +8192,9 @@
           <a:ln/>
         </p:spPr>
         <p:txBody>
-          <a:bodyPr wrap="square" lIns="0" tIns="0" rIns="0" bIns="0" rtlCol="0" anchor="ctr"/>
-          <a:lstStyle/>
-          <a:p>
-            <a:pPr indent="0" marL="0">
-              <a:buNone/>
-            </a:pPr>
-            <a:r>
-              <a:rPr lang="en-US" sz="1700" b="1" dirty="0">
-                <a:solidFill>
-                  <a:schemeClr val="tx1"/>
-                </a:solidFill>
-              </a:rPr>
-              <a:t>できたらチェック</a:t>
-            </a:r>
-            <a:endParaRPr lang="en-US" sz="1700" dirty="0"/>
-          </a:p>
-        </p:txBody>
-      </p:sp>
-      <p:sp>
-        <p:nvSpPr>
-          <p:cNvPr id="14" name="Text 10"/>
-          <p:cNvSpPr txBox="1"/>
-          <p:nvPr/>
-        </p:nvSpPr>
-        <p:spPr>
-          <a:xfrm>
-            <a:off x="4937760" y="2286000"/>
-            <a:ext cx="3474720" cy="2057400"/>
-          </a:xfrm>
-          <a:prstGeom prst="rect">
-            <a:avLst/>
-          </a:prstGeom>
-          <a:noFill/>
-          <a:ln/>
-        </p:spPr>
-        <p:txBody>
-          <a:bodyPr wrap="square" lIns="0" tIns="0" rIns="0" bIns="0" rtlCol="0" anchor="t"/>
+          <a:bodyPr wrap="square" lIns="0" tIns="0" rIns="0" bIns="0" rtlCol="0" anchor="t">
+            <a:normAutofit/>
+          </a:bodyPr>
           <a:lstStyle/>
           <a:p>
             <a:pPr indent="0" marL="0">
@@ -7884,14 +8204,17 @@
               <a:buNone/>
             </a:pPr>
             <a:r>
-              <a:rPr lang="en-US" sz="1350" dirty="0">
-                <a:solidFill>
-                  <a:schemeClr val="tx1"/>
-                </a:solidFill>
+              <a:rPr lang="ja-JP" altLang="en-US" sz="1350" b="1" dirty="0">
+                <a:solidFill>
+                  <a:srgbClr val="1A1A1A"/>
+                </a:solidFill>
+                <a:latin typeface="Noto Sans JP" pitchFamily="34" charset="0"/>
+                <a:ea typeface="Noto Sans JP" pitchFamily="34" charset="-122"/>
+                <a:cs typeface="Noto Sans JP" pitchFamily="34" charset="-120"/>
               </a:rPr>
               <a:t>☐ 頼み方の型を使って頼めた</a:t>
             </a:r>
-            <a:endParaRPr lang="en-US" sz="1350" dirty="0"/>
+            <a:endParaRPr lang="ja-JP" sz="1350" dirty="0"/>
           </a:p>
           <a:p>
             <a:pPr indent="0" marL="0">
@@ -7901,14 +8224,17 @@
               <a:buNone/>
             </a:pPr>
             <a:r>
-              <a:rPr lang="en-US" sz="1350" dirty="0">
-                <a:solidFill>
-                  <a:schemeClr val="tx1"/>
-                </a:solidFill>
+              <a:rPr lang="ja-JP" altLang="en-US" sz="1350" b="1" dirty="0">
+                <a:solidFill>
+                  <a:srgbClr val="1A1A1A"/>
+                </a:solidFill>
+                <a:latin typeface="Noto Sans JP" pitchFamily="34" charset="0"/>
+                <a:ea typeface="Noto Sans JP" pitchFamily="34" charset="-122"/>
+                <a:cs typeface="Noto Sans JP" pitchFamily="34" charset="-120"/>
               </a:rPr>
               <a:t>☐ 設計シートが1枚完成した</a:t>
             </a:r>
-            <a:endParaRPr lang="en-US" sz="1350" dirty="0"/>
+            <a:endParaRPr lang="ja-JP" sz="1350" dirty="0"/>
           </a:p>
         </p:txBody>
       </p:sp>
@@ -7924,8 +8250,8 @@
         </p:nvSpPr>
         <p:spPr>
           <a:xfrm>
-            <a:off x="8229600" y="4773168"/>
-            <a:ext cx="365760" cy="228600"/>
+            <a:off x="8366760" y="4754880"/>
+            <a:ext cx="365760" cy="274320"/>
           </a:xfrm>
           <a:prstGeom prst="rect">
             <a:avLst/>
@@ -7937,20 +8263,23 @@
           </a:extLst>
         </p:spPr>
         <p:txBody>
-          <a:bodyPr/>
+          <a:bodyPr anchor="ctr"/>
           <a:lstStyle>
             <a:lvl1pPr>
-              <a:defRPr sz="900">
-                <a:solidFill>
-                  <a:srgbClr val="5A6872"/>
-                </a:solidFill>
+              <a:defRPr sz="850">
+                <a:solidFill>
+                  <a:srgbClr val="FFFFFF"/>
+                </a:solidFill>
+                <a:latin typeface="Noto Sans JP"/>
+                <a:ea typeface="Noto Sans JP"/>
+                <a:cs typeface="Noto Sans JP"/>
               </a:defRPr>
             </a:lvl1pPr>
           </a:lstStyle>
           <a:p>
             <a:pPr algn="r"/>
             <a:fld id="{F7021451-1387-4CA6-816F-3879F97B5CBC}" type="slidenum">
-              <a:rPr b="0" lang="en-US"/>
+              <a:rPr b="1" lang="en-US"/>
               <a:t>9</a:t>
             </a:fld>
             <a:endParaRPr lang="en-US"/>
@@ -7966,9 +8295,9 @@
 </file>
 
 <file path=ppt/theme/theme1.xml><?xml version="1.0" encoding="utf-8"?>
-<a:theme xmlns:a="http://schemas.openxmlformats.org/drawingml/2006/main" name="Manaberu">
+<a:theme xmlns:a="http://schemas.openxmlformats.org/drawingml/2006/main" name="SasaYell">
   <a:themeElements>
-    <a:clrScheme name="Manaberu">
+    <a:clrScheme name="SasaYell">
       <a:dk1>
         <a:srgbClr val="1A1A1A"/>
       </a:dk1>
@@ -7976,10 +8305,10 @@
         <a:srgbClr val="FFFFFF"/>
       </a:lt1>
       <a:dk2>
-        <a:srgbClr val="5A6872"/>
+        <a:srgbClr val="1A1A1A"/>
       </a:dk2>
       <a:lt2>
-        <a:srgbClr val="FFF6CC"/>
+        <a:srgbClr val="FFD600"/>
       </a:lt2>
       <a:accent1>
         <a:srgbClr val="FFD600"/>
@@ -7988,128 +8317,34 @@
         <a:srgbClr val="DD6420"/>
       </a:accent2>
       <a:accent3>
-        <a:srgbClr val="3370FF"/>
+        <a:srgbClr val="F5A623"/>
       </a:accent3>
       <a:accent4>
-        <a:srgbClr val="06C755"/>
+        <a:srgbClr val="1A1A1A"/>
       </a:accent4>
       <a:accent5>
-        <a:srgbClr val="E53935"/>
+        <a:srgbClr val="FFFFFF"/>
       </a:accent5>
       <a:accent6>
-        <a:srgbClr val="F5A623"/>
+        <a:srgbClr val="DD6420"/>
       </a:accent6>
       <a:hlink>
-        <a:srgbClr val="3370FF"/>
+        <a:srgbClr val="DD6420"/>
       </a:hlink>
       <a:folHlink>
-        <a:srgbClr val="6B4FBB"/>
+        <a:srgbClr val="F5A623"/>
       </a:folHlink>
     </a:clrScheme>
-    <a:fontScheme name="Manaberu">
+    <a:fontScheme name="SasaYell">
       <a:majorFont>
-        <a:latin typeface="Yu Gothic"/>
-        <a:ea typeface=""/>
+        <a:latin typeface="Dela Gothic One"/>
+        <a:ea typeface="けいふぉんと"/>
         <a:cs typeface=""/>
-        <a:font script="Jpan" typeface="游ゴシック Light"/>
-        <a:font script="Hang" typeface="맑은 고딕"/>
-        <a:font script="Hans" typeface="等线 Light"/>
-        <a:font script="Hant" typeface="新細明體"/>
-        <a:font script="Arab" typeface="Times New Roman"/>
-        <a:font script="Hebr" typeface="Times New Roman"/>
-        <a:font script="Thai" typeface="Angsana New"/>
-        <a:font script="Ethi" typeface="Nyala"/>
-        <a:font script="Beng" typeface="Vrinda"/>
-        <a:font script="Gujr" typeface="Shruti"/>
-        <a:font script="Khmr" typeface="MoolBoran"/>
-        <a:font script="Knda" typeface="Tunga"/>
-        <a:font script="Guru" typeface="Raavi"/>
-        <a:font script="Cans" typeface="Euphemia"/>
-        <a:font script="Cher" typeface="Plantagenet Cherokee"/>
-        <a:font script="Yiii" typeface="Microsoft Yi Baiti"/>
-        <a:font script="Tibt" typeface="Microsoft Himalaya"/>
-        <a:font script="Thaa" typeface="MV Boli"/>
-        <a:font script="Deva" typeface="Mangal"/>
-        <a:font script="Telu" typeface="Gautami"/>
-        <a:font script="Taml" typeface="Latha"/>
-        <a:font script="Syrc" typeface="Estrangelo Edessa"/>
-        <a:font script="Orya" typeface="Kalinga"/>
-        <a:font script="Mlym" typeface="Kartika"/>
-        <a:font script="Laoo" typeface="DokChampa"/>
-        <a:font script="Sinh" typeface="Iskoola Pota"/>
-        <a:font script="Mong" typeface="Mongolian Baiti"/>
-        <a:font script="Viet" typeface="Times New Roman"/>
-        <a:font script="Uigh" typeface="Microsoft Uighur"/>
-        <a:font script="Geor" typeface="Sylfaen"/>
-        <a:font script="Armn" typeface="Arial"/>
-        <a:font script="Bugi" typeface="Leelawadee UI"/>
-        <a:font script="Bopo" typeface="Microsoft JhengHei"/>
-        <a:font script="Java" typeface="Javanese Text"/>
-        <a:font script="Lisu" typeface="Segoe UI"/>
-        <a:font script="Mymr" typeface="Myanmar Text"/>
-        <a:font script="Nkoo" typeface="Ebrima"/>
-        <a:font script="Olck" typeface="Nirmala UI"/>
-        <a:font script="Osma" typeface="Ebrima"/>
-        <a:font script="Phag" typeface="Phagspa"/>
-        <a:font script="Syrn" typeface="Estrangelo Edessa"/>
-        <a:font script="Syrj" typeface="Estrangelo Edessa"/>
-        <a:font script="Syre" typeface="Estrangelo Edessa"/>
-        <a:font script="Sora" typeface="Nirmala UI"/>
-        <a:font script="Tale" typeface="Microsoft Tai Le"/>
-        <a:font script="Talu" typeface="Microsoft New Tai Lue"/>
-        <a:font script="Tfng" typeface="Ebrima"/>
       </a:majorFont>
       <a:minorFont>
-        <a:latin typeface="Yu Gothic"/>
-        <a:ea typeface=""/>
+        <a:latin typeface="Noto Sans JP"/>
+        <a:ea typeface="Noto Sans JP"/>
         <a:cs typeface=""/>
-        <a:font script="Jpan" typeface="游ゴシック"/>
-        <a:font script="Hang" typeface="맑은 고딕"/>
-        <a:font script="Hans" typeface="等线"/>
-        <a:font script="Hant" typeface="新細明體"/>
-        <a:font script="Arab" typeface="Arial"/>
-        <a:font script="Hebr" typeface="Arial"/>
-        <a:font script="Thai" typeface="Cordia New"/>
-        <a:font script="Ethi" typeface="Nyala"/>
-        <a:font script="Beng" typeface="Vrinda"/>
-        <a:font script="Gujr" typeface="Shruti"/>
-        <a:font script="Khmr" typeface="DaunPenh"/>
-        <a:font script="Knda" typeface="Tunga"/>
-        <a:font script="Guru" typeface="Raavi"/>
-        <a:font script="Cans" typeface="Euphemia"/>
-        <a:font script="Cher" typeface="Plantagenet Cherokee"/>
-        <a:font script="Yiii" typeface="Microsoft Yi Baiti"/>
-        <a:font script="Tibt" typeface="Microsoft Himalaya"/>
-        <a:font script="Thaa" typeface="MV Boli"/>
-        <a:font script="Deva" typeface="Mangal"/>
-        <a:font script="Telu" typeface="Gautami"/>
-        <a:font script="Taml" typeface="Latha"/>
-        <a:font script="Syrc" typeface="Estrangelo Edessa"/>
-        <a:font script="Orya" typeface="Kalinga"/>
-        <a:font script="Mlym" typeface="Kartika"/>
-        <a:font script="Laoo" typeface="DokChampa"/>
-        <a:font script="Sinh" typeface="Iskoola Pota"/>
-        <a:font script="Mong" typeface="Mongolian Baiti"/>
-        <a:font script="Viet" typeface="Arial"/>
-        <a:font script="Uigh" typeface="Microsoft Uighur"/>
-        <a:font script="Geor" typeface="Sylfaen"/>
-        <a:font script="Armn" typeface="Arial"/>
-        <a:font script="Bugi" typeface="Leelawadee UI"/>
-        <a:font script="Bopo" typeface="Microsoft JhengHei"/>
-        <a:font script="Java" typeface="Javanese Text"/>
-        <a:font script="Lisu" typeface="Segoe UI"/>
-        <a:font script="Mymr" typeface="Myanmar Text"/>
-        <a:font script="Nkoo" typeface="Ebrima"/>
-        <a:font script="Olck" typeface="Nirmala UI"/>
-        <a:font script="Osma" typeface="Ebrima"/>
-        <a:font script="Phag" typeface="Phagspa"/>
-        <a:font script="Syrn" typeface="Estrangelo Edessa"/>
-        <a:font script="Syrj" typeface="Estrangelo Edessa"/>
-        <a:font script="Syre" typeface="Estrangelo Edessa"/>
-        <a:font script="Sora" typeface="Nirmala UI"/>
-        <a:font script="Tale" typeface="Microsoft Tai Le"/>
-        <a:font script="Talu" typeface="Microsoft New Tai Lue"/>
-        <a:font script="Tfng" typeface="Ebrima"/>
       </a:minorFont>
     </a:fontScheme>
     <a:fmtScheme name="Office">
